--- a/cloudflare-deploy/public/library/branch/hq-kr.pptx
+++ b/cloudflare-deploy/public/library/branch/hq-kr.pptx
@@ -28,6 +28,8 @@
     <p:sldId id="276" r:id="rId27"/>
     <p:sldId id="277" r:id="rId28"/>
     <p:sldId id="278" r:id="rId29"/>
+    <p:sldId id="279" r:id="rId30"/>
+    <p:sldId id="280" r:id="rId31"/>
   </p:sldIdLst>
   <p:sldSz cx="12191695" cy="6858000" type="screen4x3"/>
   <p:notesSz cx="6858000" cy="9144000"/>
@@ -11467,6 +11469,3359 @@
 </file>
 
 <file path=ppt/slides/slide18.xml><?xml version="1.0" encoding="utf-8"?>
+<p:sld xmlns:a="http://schemas.openxmlformats.org/drawingml/2006/main" xmlns:p="http://schemas.openxmlformats.org/presentationml/2006/main" xmlns:r="http://schemas.openxmlformats.org/officeDocument/2006/relationships">
+  <p:cSld>
+    <p:bg>
+      <p:bgPr>
+        <a:solidFill>
+          <a:srgbClr val="FFFFFF"/>
+        </a:solidFill>
+        <a:effectLst/>
+      </p:bgPr>
+    </p:bg>
+    <p:spTree>
+      <p:nvGrpSpPr>
+        <p:cNvPr id="1" name=""/>
+        <p:cNvGrpSpPr/>
+        <p:nvPr/>
+      </p:nvGrpSpPr>
+      <p:grpSpPr/>
+      <p:sp>
+        <p:nvSpPr>
+          <p:cNvPr id="2" name="Rectangle 1"/>
+          <p:cNvSpPr/>
+          <p:nvPr/>
+        </p:nvSpPr>
+        <p:spPr>
+          <a:xfrm>
+            <a:off x="0" y="0"/>
+            <a:ext cx="12191695" cy="566928"/>
+          </a:xfrm>
+          <a:prstGeom prst="rect">
+            <a:avLst/>
+          </a:prstGeom>
+          <a:solidFill>
+            <a:srgbClr val="0D9488"/>
+          </a:solidFill>
+          <a:ln>
+            <a:noFill/>
+          </a:ln>
+          <a:effectLst/>
+        </p:spPr>
+        <p:style>
+          <a:lnRef idx="1">
+            <a:schemeClr val="accent1"/>
+          </a:lnRef>
+          <a:fillRef idx="3">
+            <a:schemeClr val="accent1"/>
+          </a:fillRef>
+          <a:effectRef idx="2">
+            <a:schemeClr val="accent1"/>
+          </a:effectRef>
+          <a:fontRef idx="minor">
+            <a:schemeClr val="lt1"/>
+          </a:fontRef>
+        </p:style>
+        <p:txBody>
+          <a:bodyPr rtlCol="0" anchor="ctr"/>
+          <a:lstStyle/>
+          <a:p>
+            <a:pPr algn="ctr"/>
+          </a:p>
+        </p:txBody>
+      </p:sp>
+      <p:sp>
+        <p:nvSpPr>
+          <p:cNvPr id="3" name="Rectangle 2"/>
+          <p:cNvSpPr/>
+          <p:nvPr/>
+        </p:nvSpPr>
+        <p:spPr>
+          <a:xfrm>
+            <a:off x="0" y="566928"/>
+            <a:ext cx="12191695" cy="54864"/>
+          </a:xfrm>
+          <a:prstGeom prst="rect">
+            <a:avLst/>
+          </a:prstGeom>
+          <a:solidFill>
+            <a:srgbClr val="F59E0B"/>
+          </a:solidFill>
+          <a:ln>
+            <a:noFill/>
+          </a:ln>
+          <a:effectLst/>
+        </p:spPr>
+        <p:style>
+          <a:lnRef idx="1">
+            <a:schemeClr val="accent1"/>
+          </a:lnRef>
+          <a:fillRef idx="3">
+            <a:schemeClr val="accent1"/>
+          </a:fillRef>
+          <a:effectRef idx="2">
+            <a:schemeClr val="accent1"/>
+          </a:effectRef>
+          <a:fontRef idx="minor">
+            <a:schemeClr val="lt1"/>
+          </a:fontRef>
+        </p:style>
+        <p:txBody>
+          <a:bodyPr rtlCol="0" anchor="ctr"/>
+          <a:lstStyle/>
+          <a:p>
+            <a:pPr algn="ctr"/>
+          </a:p>
+        </p:txBody>
+      </p:sp>
+      <p:sp>
+        <p:nvSpPr>
+          <p:cNvPr id="4" name="TextBox 3"/>
+          <p:cNvSpPr txBox="1"/>
+          <p:nvPr/>
+        </p:nvSpPr>
+        <p:spPr>
+          <a:xfrm>
+            <a:off x="365760" y="27432"/>
+            <a:ext cx="7315200" cy="502920"/>
+          </a:xfrm>
+          <a:prstGeom prst="rect">
+            <a:avLst/>
+          </a:prstGeom>
+          <a:noFill/>
+        </p:spPr>
+        <p:txBody>
+          <a:bodyPr wrap="square" anchor="ctr">
+            <a:spAutoFit/>
+          </a:bodyPr>
+          <a:lstStyle/>
+          <a:p>
+            <a:pPr algn="l">
+              <a:lnSpc>
+                <a:spcPct val="100000"/>
+              </a:lnSpc>
+            </a:pPr>
+            <a:r>
+              <a:rPr sz="1500" b="1">
+                <a:solidFill>
+                  <a:srgbClr val="FFFFFF"/>
+                </a:solidFill>
+                <a:latin typeface="Malgun Gothic"/>
+              </a:rPr>
+              <a:t>🏢 망고아이 지사용 사용설명서</a:t>
+            </a:r>
+          </a:p>
+        </p:txBody>
+      </p:sp>
+      <p:sp>
+        <p:nvSpPr>
+          <p:cNvPr id="5" name="TextBox 4"/>
+          <p:cNvSpPr txBox="1"/>
+          <p:nvPr/>
+        </p:nvSpPr>
+        <p:spPr>
+          <a:xfrm>
+            <a:off x="8168335" y="27432"/>
+            <a:ext cx="3657600" cy="502920"/>
+          </a:xfrm>
+          <a:prstGeom prst="rect">
+            <a:avLst/>
+          </a:prstGeom>
+          <a:noFill/>
+        </p:spPr>
+        <p:txBody>
+          <a:bodyPr wrap="square" anchor="ctr">
+            <a:spAutoFit/>
+          </a:bodyPr>
+          <a:lstStyle/>
+          <a:p>
+            <a:pPr algn="r">
+              <a:lnSpc>
+                <a:spcPct val="100000"/>
+              </a:lnSpc>
+            </a:pPr>
+            <a:r>
+              <a:rPr sz="1300" b="1">
+                <a:solidFill>
+                  <a:srgbClr val="F1F5F9"/>
+                </a:solidFill>
+                <a:latin typeface="Malgun Gothic"/>
+              </a:rPr>
+              <a:t>주요 기능 사용법</a:t>
+            </a:r>
+          </a:p>
+        </p:txBody>
+      </p:sp>
+      <p:sp>
+        <p:nvSpPr>
+          <p:cNvPr id="6" name="Rounded Rectangle 5"/>
+          <p:cNvSpPr/>
+          <p:nvPr/>
+        </p:nvSpPr>
+        <p:spPr>
+          <a:xfrm>
+            <a:off x="365760" y="822960"/>
+            <a:ext cx="868680" cy="868680"/>
+          </a:xfrm>
+          <a:prstGeom prst="roundRect">
+            <a:avLst/>
+          </a:prstGeom>
+          <a:solidFill>
+            <a:srgbClr val="0D9488"/>
+          </a:solidFill>
+          <a:ln>
+            <a:noFill/>
+          </a:ln>
+          <a:effectLst/>
+        </p:spPr>
+        <p:style>
+          <a:lnRef idx="1">
+            <a:schemeClr val="accent1"/>
+          </a:lnRef>
+          <a:fillRef idx="3">
+            <a:schemeClr val="accent1"/>
+          </a:fillRef>
+          <a:effectRef idx="2">
+            <a:schemeClr val="accent1"/>
+          </a:effectRef>
+          <a:fontRef idx="minor">
+            <a:schemeClr val="lt1"/>
+          </a:fontRef>
+        </p:style>
+        <p:txBody>
+          <a:bodyPr rtlCol="0" anchor="ctr"/>
+          <a:lstStyle/>
+          <a:p>
+            <a:pPr algn="ctr"/>
+          </a:p>
+        </p:txBody>
+      </p:sp>
+      <p:sp>
+        <p:nvSpPr>
+          <p:cNvPr id="7" name="TextBox 6"/>
+          <p:cNvSpPr txBox="1"/>
+          <p:nvPr/>
+        </p:nvSpPr>
+        <p:spPr>
+          <a:xfrm>
+            <a:off x="365760" y="822960"/>
+            <a:ext cx="868680" cy="868680"/>
+          </a:xfrm>
+          <a:prstGeom prst="rect">
+            <a:avLst/>
+          </a:prstGeom>
+          <a:noFill/>
+        </p:spPr>
+        <p:txBody>
+          <a:bodyPr wrap="square" anchor="ctr">
+            <a:spAutoFit/>
+          </a:bodyPr>
+          <a:lstStyle/>
+          <a:p>
+            <a:pPr algn="ctr">
+              <a:lnSpc>
+                <a:spcPct val="100000"/>
+              </a:lnSpc>
+            </a:pPr>
+            <a:r>
+              <a:rPr sz="2600" b="1">
+                <a:solidFill>
+                  <a:srgbClr val="FFFFFF"/>
+                </a:solidFill>
+                <a:latin typeface="Malgun Gothic"/>
+              </a:rPr>
+              <a:t>16</a:t>
+            </a:r>
+          </a:p>
+        </p:txBody>
+      </p:sp>
+      <p:sp>
+        <p:nvSpPr>
+          <p:cNvPr id="8" name="TextBox 7"/>
+          <p:cNvSpPr txBox="1"/>
+          <p:nvPr/>
+        </p:nvSpPr>
+        <p:spPr>
+          <a:xfrm>
+            <a:off x="1371600" y="822960"/>
+            <a:ext cx="10424160" cy="502920"/>
+          </a:xfrm>
+          <a:prstGeom prst="rect">
+            <a:avLst/>
+          </a:prstGeom>
+          <a:noFill/>
+        </p:spPr>
+        <p:txBody>
+          <a:bodyPr wrap="square" anchor="t">
+            <a:spAutoFit/>
+          </a:bodyPr>
+          <a:lstStyle/>
+          <a:p>
+            <a:pPr algn="l">
+              <a:lnSpc>
+                <a:spcPct val="100000"/>
+              </a:lnSpc>
+            </a:pPr>
+            <a:r>
+              <a:rPr sz="2300" b="1">
+                <a:solidFill>
+                  <a:srgbClr val="1E2340"/>
+                </a:solidFill>
+                <a:latin typeface="Malgun Gothic"/>
+              </a:rPr>
+              <a:t>📢 공지 스튜디오 (포스터 + 팝업)</a:t>
+            </a:r>
+          </a:p>
+        </p:txBody>
+      </p:sp>
+      <p:sp>
+        <p:nvSpPr>
+          <p:cNvPr id="9" name="TextBox 8"/>
+          <p:cNvSpPr txBox="1"/>
+          <p:nvPr/>
+        </p:nvSpPr>
+        <p:spPr>
+          <a:xfrm>
+            <a:off x="1417320" y="1353312"/>
+            <a:ext cx="10424160" cy="320040"/>
+          </a:xfrm>
+          <a:prstGeom prst="rect">
+            <a:avLst/>
+          </a:prstGeom>
+          <a:noFill/>
+        </p:spPr>
+        <p:txBody>
+          <a:bodyPr wrap="square" anchor="t">
+            <a:spAutoFit/>
+          </a:bodyPr>
+          <a:lstStyle/>
+          <a:p>
+            <a:pPr algn="l">
+              <a:lnSpc>
+                <a:spcPct val="100000"/>
+              </a:lnSpc>
+            </a:pPr>
+            <a:r>
+              <a:rPr sz="1300" b="0">
+                <a:solidFill>
+                  <a:srgbClr val="64748B"/>
+                </a:solidFill>
+                <a:latin typeface="Malgun Gothic"/>
+              </a:rPr>
+              <a:t>공지·이벤트 포스터를 만들어 학생 앱 팝업으로</a:t>
+            </a:r>
+          </a:p>
+        </p:txBody>
+      </p:sp>
+      <p:sp>
+        <p:nvSpPr>
+          <p:cNvPr id="10" name="Rounded Rectangle 9"/>
+          <p:cNvSpPr/>
+          <p:nvPr/>
+        </p:nvSpPr>
+        <p:spPr>
+          <a:xfrm>
+            <a:off x="365760" y="1828800"/>
+            <a:ext cx="11430000" cy="777240"/>
+          </a:xfrm>
+          <a:prstGeom prst="roundRect">
+            <a:avLst/>
+          </a:prstGeom>
+          <a:solidFill>
+            <a:srgbClr val="ECFDF5"/>
+          </a:solidFill>
+          <a:ln>
+            <a:noFill/>
+          </a:ln>
+          <a:effectLst/>
+        </p:spPr>
+        <p:style>
+          <a:lnRef idx="1">
+            <a:schemeClr val="accent1"/>
+          </a:lnRef>
+          <a:fillRef idx="3">
+            <a:schemeClr val="accent1"/>
+          </a:fillRef>
+          <a:effectRef idx="2">
+            <a:schemeClr val="accent1"/>
+          </a:effectRef>
+          <a:fontRef idx="minor">
+            <a:schemeClr val="lt1"/>
+          </a:fontRef>
+        </p:style>
+        <p:txBody>
+          <a:bodyPr rtlCol="0" anchor="ctr"/>
+          <a:lstStyle/>
+          <a:p>
+            <a:pPr algn="ctr"/>
+          </a:p>
+        </p:txBody>
+      </p:sp>
+      <p:sp>
+        <p:nvSpPr>
+          <p:cNvPr id="11" name="TextBox 10"/>
+          <p:cNvSpPr txBox="1"/>
+          <p:nvPr/>
+        </p:nvSpPr>
+        <p:spPr>
+          <a:xfrm>
+            <a:off x="548640" y="1901952"/>
+            <a:ext cx="11064240" cy="640080"/>
+          </a:xfrm>
+          <a:prstGeom prst="rect">
+            <a:avLst/>
+          </a:prstGeom>
+          <a:noFill/>
+        </p:spPr>
+        <p:txBody>
+          <a:bodyPr wrap="square" anchor="t">
+            <a:spAutoFit/>
+          </a:bodyPr>
+          <a:lstStyle/>
+          <a:p>
+            <a:pPr algn="l">
+              <a:lnSpc>
+                <a:spcPct val="115000"/>
+              </a:lnSpc>
+            </a:pPr>
+            <a:r>
+              <a:rPr sz="1200" b="0">
+                <a:solidFill>
+                  <a:srgbClr val="334155"/>
+                </a:solidFill>
+                <a:latin typeface="Malgun Gothic"/>
+              </a:rPr>
+              <a:t>흩어져 있던 ‘포스터 만들기’와 ‘팝업 공지 관리’를 한 곳으로 통합한 기능이에요. ①만들기 탭에서 공지·이벤트 포스터를 디자인하고, 바로 ②게시·팝업 탭으로 넘겨 우리 지사 학생 앱에 팝업으로 띄울 수 있어요.</a:t>
+            </a:r>
+          </a:p>
+        </p:txBody>
+      </p:sp>
+      <p:sp>
+        <p:nvSpPr>
+          <p:cNvPr id="12" name="TextBox 11"/>
+          <p:cNvSpPr txBox="1"/>
+          <p:nvPr/>
+        </p:nvSpPr>
+        <p:spPr>
+          <a:xfrm>
+            <a:off x="457200" y="2743200"/>
+            <a:ext cx="5669280" cy="320040"/>
+          </a:xfrm>
+          <a:prstGeom prst="rect">
+            <a:avLst/>
+          </a:prstGeom>
+          <a:noFill/>
+        </p:spPr>
+        <p:txBody>
+          <a:bodyPr wrap="square" anchor="t">
+            <a:spAutoFit/>
+          </a:bodyPr>
+          <a:lstStyle/>
+          <a:p>
+            <a:pPr algn="l">
+              <a:lnSpc>
+                <a:spcPct val="100000"/>
+              </a:lnSpc>
+            </a:pPr>
+            <a:r>
+              <a:rPr sz="1350" b="1">
+                <a:solidFill>
+                  <a:srgbClr val="0D9488"/>
+                </a:solidFill>
+                <a:latin typeface="Malgun Gothic"/>
+              </a:rPr>
+              <a:t>사용 방법</a:t>
+            </a:r>
+          </a:p>
+        </p:txBody>
+      </p:sp>
+      <p:sp>
+        <p:nvSpPr>
+          <p:cNvPr id="13" name="TextBox 12"/>
+          <p:cNvSpPr txBox="1"/>
+          <p:nvPr/>
+        </p:nvSpPr>
+        <p:spPr>
+          <a:xfrm>
+            <a:off x="457200" y="3108960"/>
+            <a:ext cx="5669280" cy="2377440"/>
+          </a:xfrm>
+          <a:prstGeom prst="rect">
+            <a:avLst/>
+          </a:prstGeom>
+          <a:noFill/>
+        </p:spPr>
+        <p:txBody>
+          <a:bodyPr wrap="square">
+            <a:spAutoFit/>
+          </a:bodyPr>
+          <a:lstStyle/>
+          <a:p>
+            <a:pPr>
+              <a:lnSpc>
+                <a:spcPct val="115000"/>
+              </a:lnSpc>
+              <a:spcAft>
+                <a:spcPts val="600"/>
+              </a:spcAft>
+            </a:pPr>
+            <a:r>
+              <a:rPr sz="1050" b="1">
+                <a:solidFill>
+                  <a:srgbClr val="0D9488"/>
+                </a:solidFill>
+                <a:latin typeface="Malgun Gothic"/>
+              </a:rPr>
+              <a:t>● </a:t>
+            </a:r>
+            <a:r>
+              <a:rPr sz="1250">
+                <a:solidFill>
+                  <a:srgbClr val="334155"/>
+                </a:solidFill>
+                <a:latin typeface="Malgun Gothic"/>
+              </a:rPr>
+              <a:t>관리자 메뉴 알림 센터 → 📢 공지 스튜디오로 들어가요.</a:t>
+            </a:r>
+          </a:p>
+          <a:p>
+            <a:pPr>
+              <a:lnSpc>
+                <a:spcPct val="115000"/>
+              </a:lnSpc>
+              <a:spcAft>
+                <a:spcPts val="600"/>
+              </a:spcAft>
+            </a:pPr>
+            <a:r>
+              <a:rPr sz="1050" b="1">
+                <a:solidFill>
+                  <a:srgbClr val="0D9488"/>
+                </a:solidFill>
+                <a:latin typeface="Malgun Gothic"/>
+              </a:rPr>
+              <a:t>● </a:t>
+            </a:r>
+            <a:r>
+              <a:rPr sz="1250">
+                <a:solidFill>
+                  <a:srgbClr val="334155"/>
+                </a:solidFill>
+                <a:latin typeface="Malgun Gothic"/>
+              </a:rPr>
+              <a:t>①만들기 탭에서 문구·이미지·동영상으로 포스터를 꾸며요. (크기 조절·서버 저장·재사용 가능)</a:t>
+            </a:r>
+          </a:p>
+          <a:p>
+            <a:pPr>
+              <a:lnSpc>
+                <a:spcPct val="115000"/>
+              </a:lnSpc>
+              <a:spcAft>
+                <a:spcPts val="600"/>
+              </a:spcAft>
+            </a:pPr>
+            <a:r>
+              <a:rPr sz="1050" b="1">
+                <a:solidFill>
+                  <a:srgbClr val="0D9488"/>
+                </a:solidFill>
+                <a:latin typeface="Malgun Gothic"/>
+              </a:rPr>
+              <a:t>● </a:t>
+            </a:r>
+            <a:r>
+              <a:rPr sz="1250">
+                <a:solidFill>
+                  <a:srgbClr val="334155"/>
+                </a:solidFill>
+                <a:latin typeface="Malgun Gothic"/>
+              </a:rPr>
+              <a:t>완성한 포스터의 ‘📢 팝업으로 게시’ 를 누르면 ②게시·팝업 탭으로 자동 전환돼요.</a:t>
+            </a:r>
+          </a:p>
+          <a:p>
+            <a:pPr>
+              <a:lnSpc>
+                <a:spcPct val="115000"/>
+              </a:lnSpc>
+              <a:spcAft>
+                <a:spcPts val="600"/>
+              </a:spcAft>
+            </a:pPr>
+            <a:r>
+              <a:rPr sz="1050" b="1">
+                <a:solidFill>
+                  <a:srgbClr val="0D9488"/>
+                </a:solidFill>
+                <a:latin typeface="Malgun Gothic"/>
+              </a:rPr>
+              <a:t>● </a:t>
+            </a:r>
+            <a:r>
+              <a:rPr sz="1250">
+                <a:solidFill>
+                  <a:srgbClr val="334155"/>
+                </a:solidFill>
+                <a:latin typeface="Malgun Gothic"/>
+              </a:rPr>
+              <a:t>게시 탭에서 노출 기간·중단을 설정해 학생 앱 팝업으로 발행해요.</a:t>
+            </a:r>
+          </a:p>
+        </p:txBody>
+      </p:sp>
+      <p:sp>
+        <p:nvSpPr>
+          <p:cNvPr id="14" name="Rounded Rectangle 13"/>
+          <p:cNvSpPr/>
+          <p:nvPr/>
+        </p:nvSpPr>
+        <p:spPr>
+          <a:xfrm>
+            <a:off x="457200" y="4782312"/>
+            <a:ext cx="5669280" cy="1316736"/>
+          </a:xfrm>
+          <a:prstGeom prst="roundRect">
+            <a:avLst/>
+          </a:prstGeom>
+          <a:solidFill>
+            <a:srgbClr val="F4F7FF"/>
+          </a:solidFill>
+          <a:ln w="12700">
+            <a:solidFill>
+              <a:srgbClr val="0D9488"/>
+            </a:solidFill>
+          </a:ln>
+          <a:effectLst/>
+        </p:spPr>
+        <p:style>
+          <a:lnRef idx="1">
+            <a:schemeClr val="accent1"/>
+          </a:lnRef>
+          <a:fillRef idx="3">
+            <a:schemeClr val="accent1"/>
+          </a:fillRef>
+          <a:effectRef idx="2">
+            <a:schemeClr val="accent1"/>
+          </a:effectRef>
+          <a:fontRef idx="minor">
+            <a:schemeClr val="lt1"/>
+          </a:fontRef>
+        </p:style>
+        <p:txBody>
+          <a:bodyPr rtlCol="0" anchor="ctr"/>
+          <a:lstStyle/>
+          <a:p>
+            <a:pPr algn="ctr"/>
+          </a:p>
+        </p:txBody>
+      </p:sp>
+      <p:sp>
+        <p:nvSpPr>
+          <p:cNvPr id="15" name="TextBox 14"/>
+          <p:cNvSpPr txBox="1"/>
+          <p:nvPr/>
+        </p:nvSpPr>
+        <p:spPr>
+          <a:xfrm>
+            <a:off x="594360" y="4837175"/>
+            <a:ext cx="5394960" cy="274320"/>
+          </a:xfrm>
+          <a:prstGeom prst="rect">
+            <a:avLst/>
+          </a:prstGeom>
+          <a:noFill/>
+        </p:spPr>
+        <p:txBody>
+          <a:bodyPr wrap="square" anchor="t">
+            <a:spAutoFit/>
+          </a:bodyPr>
+          <a:lstStyle/>
+          <a:p>
+            <a:pPr algn="l">
+              <a:lnSpc>
+                <a:spcPct val="100000"/>
+              </a:lnSpc>
+            </a:pPr>
+            <a:r>
+              <a:rPr sz="1150" b="1">
+                <a:solidFill>
+                  <a:srgbClr val="0D9488"/>
+                </a:solidFill>
+                <a:latin typeface="Malgun Gothic"/>
+              </a:rPr>
+              <a:t>✅ 핵심 포인트</a:t>
+            </a:r>
+          </a:p>
+        </p:txBody>
+      </p:sp>
+      <p:sp>
+        <p:nvSpPr>
+          <p:cNvPr id="16" name="TextBox 15"/>
+          <p:cNvSpPr txBox="1"/>
+          <p:nvPr/>
+        </p:nvSpPr>
+        <p:spPr>
+          <a:xfrm>
+            <a:off x="594360" y="5111496"/>
+            <a:ext cx="5394960" cy="950976"/>
+          </a:xfrm>
+          <a:prstGeom prst="rect">
+            <a:avLst/>
+          </a:prstGeom>
+          <a:noFill/>
+        </p:spPr>
+        <p:txBody>
+          <a:bodyPr wrap="square">
+            <a:spAutoFit/>
+          </a:bodyPr>
+          <a:lstStyle/>
+          <a:p>
+            <a:pPr>
+              <a:lnSpc>
+                <a:spcPct val="115000"/>
+              </a:lnSpc>
+              <a:spcAft>
+                <a:spcPts val="200"/>
+              </a:spcAft>
+            </a:pPr>
+            <a:r>
+              <a:rPr sz="900" b="1">
+                <a:solidFill>
+                  <a:srgbClr val="0D9488"/>
+                </a:solidFill>
+                <a:latin typeface="Malgun Gothic"/>
+              </a:rPr>
+              <a:t>● </a:t>
+            </a:r>
+            <a:r>
+              <a:rPr sz="1100">
+                <a:solidFill>
+                  <a:srgbClr val="334155"/>
+                </a:solidFill>
+                <a:latin typeface="Malgun Gothic"/>
+              </a:rPr>
+              <a:t>포스터 제작과 팝업 발행이 한 화면 2탭으로 이어져 헷갈리지 않아요.</a:t>
+            </a:r>
+          </a:p>
+          <a:p>
+            <a:pPr>
+              <a:lnSpc>
+                <a:spcPct val="115000"/>
+              </a:lnSpc>
+              <a:spcAft>
+                <a:spcPts val="200"/>
+              </a:spcAft>
+            </a:pPr>
+            <a:r>
+              <a:rPr sz="900" b="1">
+                <a:solidFill>
+                  <a:srgbClr val="0D9488"/>
+                </a:solidFill>
+                <a:latin typeface="Malgun Gothic"/>
+              </a:rPr>
+              <a:t>● </a:t>
+            </a:r>
+            <a:r>
+              <a:rPr sz="1100">
+                <a:solidFill>
+                  <a:srgbClr val="334155"/>
+                </a:solidFill>
+                <a:latin typeface="Malgun Gothic"/>
+              </a:rPr>
+              <a:t>만든 포스터는 저장해두고 재사용할 수 있어요.</a:t>
+            </a:r>
+          </a:p>
+          <a:p>
+            <a:pPr>
+              <a:lnSpc>
+                <a:spcPct val="115000"/>
+              </a:lnSpc>
+              <a:spcAft>
+                <a:spcPts val="200"/>
+              </a:spcAft>
+            </a:pPr>
+            <a:r>
+              <a:rPr sz="900" b="1">
+                <a:solidFill>
+                  <a:srgbClr val="0D9488"/>
+                </a:solidFill>
+                <a:latin typeface="Malgun Gothic"/>
+              </a:rPr>
+              <a:t>● </a:t>
+            </a:r>
+            <a:r>
+              <a:rPr sz="1100">
+                <a:solidFill>
+                  <a:srgbClr val="334155"/>
+                </a:solidFill>
+                <a:latin typeface="Malgun Gothic"/>
+              </a:rPr>
+              <a:t>AI 비서·사이드바 검색 어느 경로로 들어와도 올바른 탭이 열려요.</a:t>
+            </a:r>
+          </a:p>
+        </p:txBody>
+      </p:sp>
+      <p:sp>
+        <p:nvSpPr>
+          <p:cNvPr id="17" name="Rounded Rectangle 16"/>
+          <p:cNvSpPr/>
+          <p:nvPr/>
+        </p:nvSpPr>
+        <p:spPr>
+          <a:xfrm>
+            <a:off x="457200" y="6208775"/>
+            <a:ext cx="5669280" cy="640080"/>
+          </a:xfrm>
+          <a:prstGeom prst="roundRect">
+            <a:avLst/>
+          </a:prstGeom>
+          <a:solidFill>
+            <a:srgbClr val="FFFBEB"/>
+          </a:solidFill>
+          <a:ln w="12700">
+            <a:solidFill>
+              <a:srgbClr val="F59E0B"/>
+            </a:solidFill>
+          </a:ln>
+          <a:effectLst/>
+        </p:spPr>
+        <p:style>
+          <a:lnRef idx="1">
+            <a:schemeClr val="accent1"/>
+          </a:lnRef>
+          <a:fillRef idx="3">
+            <a:schemeClr val="accent1"/>
+          </a:fillRef>
+          <a:effectRef idx="2">
+            <a:schemeClr val="accent1"/>
+          </a:effectRef>
+          <a:fontRef idx="minor">
+            <a:schemeClr val="lt1"/>
+          </a:fontRef>
+        </p:style>
+        <p:txBody>
+          <a:bodyPr rtlCol="0" anchor="ctr"/>
+          <a:lstStyle/>
+          <a:p>
+            <a:pPr algn="ctr"/>
+          </a:p>
+        </p:txBody>
+      </p:sp>
+      <p:sp>
+        <p:nvSpPr>
+          <p:cNvPr id="18" name="TextBox 17"/>
+          <p:cNvSpPr txBox="1"/>
+          <p:nvPr/>
+        </p:nvSpPr>
+        <p:spPr>
+          <a:xfrm>
+            <a:off x="594360" y="6254495"/>
+            <a:ext cx="5394960" cy="548640"/>
+          </a:xfrm>
+          <a:prstGeom prst="rect">
+            <a:avLst/>
+          </a:prstGeom>
+          <a:noFill/>
+        </p:spPr>
+        <p:txBody>
+          <a:bodyPr wrap="square" anchor="t">
+            <a:spAutoFit/>
+          </a:bodyPr>
+          <a:lstStyle/>
+          <a:p>
+            <a:pPr algn="l">
+              <a:lnSpc>
+                <a:spcPct val="105000"/>
+              </a:lnSpc>
+            </a:pPr>
+            <a:r>
+              <a:rPr sz="1050" b="0">
+                <a:solidFill>
+                  <a:srgbClr val="92670A"/>
+                </a:solidFill>
+                <a:latin typeface="Malgun Gothic"/>
+              </a:rPr>
+              <a:t>⚠️ 알아두기 · 기존 포스터·팝업 데이터는 그대로 유지돼요(통합만 됐고 삭제되지 않았어요).</a:t>
+            </a:r>
+          </a:p>
+        </p:txBody>
+      </p:sp>
+      <p:sp>
+        <p:nvSpPr>
+          <p:cNvPr id="19" name="Rounded Rectangle 18"/>
+          <p:cNvSpPr/>
+          <p:nvPr/>
+        </p:nvSpPr>
+        <p:spPr>
+          <a:xfrm>
+            <a:off x="457200" y="6940295"/>
+            <a:ext cx="5669280" cy="658368"/>
+          </a:xfrm>
+          <a:prstGeom prst="roundRect">
+            <a:avLst/>
+          </a:prstGeom>
+          <a:solidFill>
+            <a:srgbClr val="FFF7E6"/>
+          </a:solidFill>
+          <a:ln w="12700">
+            <a:solidFill>
+              <a:srgbClr val="F59E0B"/>
+            </a:solidFill>
+          </a:ln>
+          <a:effectLst/>
+        </p:spPr>
+        <p:style>
+          <a:lnRef idx="1">
+            <a:schemeClr val="accent1"/>
+          </a:lnRef>
+          <a:fillRef idx="3">
+            <a:schemeClr val="accent1"/>
+          </a:fillRef>
+          <a:effectRef idx="2">
+            <a:schemeClr val="accent1"/>
+          </a:effectRef>
+          <a:fontRef idx="minor">
+            <a:schemeClr val="lt1"/>
+          </a:fontRef>
+        </p:style>
+        <p:txBody>
+          <a:bodyPr rtlCol="0" anchor="ctr"/>
+          <a:lstStyle/>
+          <a:p>
+            <a:pPr algn="ctr"/>
+          </a:p>
+        </p:txBody>
+      </p:sp>
+      <p:sp>
+        <p:nvSpPr>
+          <p:cNvPr id="20" name="TextBox 19"/>
+          <p:cNvSpPr txBox="1"/>
+          <p:nvPr/>
+        </p:nvSpPr>
+        <p:spPr>
+          <a:xfrm>
+            <a:off x="594360" y="6986015"/>
+            <a:ext cx="5394960" cy="566928"/>
+          </a:xfrm>
+          <a:prstGeom prst="rect">
+            <a:avLst/>
+          </a:prstGeom>
+          <a:noFill/>
+        </p:spPr>
+        <p:txBody>
+          <a:bodyPr wrap="square" anchor="t">
+            <a:spAutoFit/>
+          </a:bodyPr>
+          <a:lstStyle/>
+          <a:p>
+            <a:pPr algn="l">
+              <a:lnSpc>
+                <a:spcPct val="105000"/>
+              </a:lnSpc>
+            </a:pPr>
+            <a:r>
+              <a:rPr sz="1050" b="0">
+                <a:solidFill>
+                  <a:srgbClr val="5B4A2A"/>
+                </a:solidFill>
+                <a:latin typeface="Malgun Gothic"/>
+              </a:rPr>
+              <a:t>💡 꿀팁 · 이벤트 홍보는 ‘만들기 → 바로 팝업 게시’ 흐름 한 번이면 끝나요.</a:t>
+            </a:r>
+          </a:p>
+        </p:txBody>
+      </p:sp>
+      <p:sp>
+        <p:nvSpPr>
+          <p:cNvPr id="21" name="Rectangle 20"/>
+          <p:cNvSpPr/>
+          <p:nvPr/>
+        </p:nvSpPr>
+        <p:spPr>
+          <a:xfrm>
+            <a:off x="6300216" y="2345436"/>
+            <a:ext cx="5596128" cy="3538728"/>
+          </a:xfrm>
+          <a:prstGeom prst="rect">
+            <a:avLst/>
+          </a:prstGeom>
+          <a:solidFill>
+            <a:srgbClr val="FFFFFF"/>
+          </a:solidFill>
+          <a:ln w="12700">
+            <a:solidFill>
+              <a:srgbClr val="E2E8F0"/>
+            </a:solidFill>
+          </a:ln>
+          <a:effectLst/>
+        </p:spPr>
+        <p:style>
+          <a:lnRef idx="1">
+            <a:schemeClr val="accent1"/>
+          </a:lnRef>
+          <a:fillRef idx="3">
+            <a:schemeClr val="accent1"/>
+          </a:fillRef>
+          <a:effectRef idx="2">
+            <a:schemeClr val="accent1"/>
+          </a:effectRef>
+          <a:fontRef idx="minor">
+            <a:schemeClr val="lt1"/>
+          </a:fontRef>
+        </p:style>
+        <p:txBody>
+          <a:bodyPr rtlCol="0" anchor="ctr"/>
+          <a:lstStyle/>
+          <a:p>
+            <a:pPr algn="ctr"/>
+          </a:p>
+        </p:txBody>
+      </p:sp>
+      <p:pic>
+        <p:nvPicPr>
+          <p:cNvPr id="22" name="Picture 21" descr="admin_noticestudio.jpg"/>
+          <p:cNvPicPr>
+            <a:picLocks noChangeAspect="1"/>
+          </p:cNvPicPr>
+          <p:nvPr/>
+        </p:nvPicPr>
+        <p:blipFill>
+          <a:blip r:embed="rId2"/>
+          <a:stretch>
+            <a:fillRect/>
+          </a:stretch>
+        </p:blipFill>
+        <p:spPr>
+          <a:xfrm>
+            <a:off x="6355080" y="2400300"/>
+            <a:ext cx="5486400" cy="3429000"/>
+          </a:xfrm>
+          <a:prstGeom prst="rect">
+            <a:avLst/>
+          </a:prstGeom>
+        </p:spPr>
+      </p:pic>
+    </p:spTree>
+  </p:cSld>
+  <p:clrMapOvr>
+    <a:masterClrMapping/>
+  </p:clrMapOvr>
+</p:sld>
+</file>
+
+<file path=ppt/slides/slide19.xml><?xml version="1.0" encoding="utf-8"?>
+<p:sld xmlns:a="http://schemas.openxmlformats.org/drawingml/2006/main" xmlns:p="http://schemas.openxmlformats.org/presentationml/2006/main" xmlns:r="http://schemas.openxmlformats.org/officeDocument/2006/relationships">
+  <p:cSld>
+    <p:bg>
+      <p:bgPr>
+        <a:solidFill>
+          <a:srgbClr val="FFFFFF"/>
+        </a:solidFill>
+        <a:effectLst/>
+      </p:bgPr>
+    </p:bg>
+    <p:spTree>
+      <p:nvGrpSpPr>
+        <p:cNvPr id="1" name=""/>
+        <p:cNvGrpSpPr/>
+        <p:nvPr/>
+      </p:nvGrpSpPr>
+      <p:grpSpPr/>
+      <p:sp>
+        <p:nvSpPr>
+          <p:cNvPr id="2" name="Rectangle 1"/>
+          <p:cNvSpPr/>
+          <p:nvPr/>
+        </p:nvSpPr>
+        <p:spPr>
+          <a:xfrm>
+            <a:off x="0" y="0"/>
+            <a:ext cx="12191695" cy="566928"/>
+          </a:xfrm>
+          <a:prstGeom prst="rect">
+            <a:avLst/>
+          </a:prstGeom>
+          <a:solidFill>
+            <a:srgbClr val="0D9488"/>
+          </a:solidFill>
+          <a:ln>
+            <a:noFill/>
+          </a:ln>
+          <a:effectLst/>
+        </p:spPr>
+        <p:style>
+          <a:lnRef idx="1">
+            <a:schemeClr val="accent1"/>
+          </a:lnRef>
+          <a:fillRef idx="3">
+            <a:schemeClr val="accent1"/>
+          </a:fillRef>
+          <a:effectRef idx="2">
+            <a:schemeClr val="accent1"/>
+          </a:effectRef>
+          <a:fontRef idx="minor">
+            <a:schemeClr val="lt1"/>
+          </a:fontRef>
+        </p:style>
+        <p:txBody>
+          <a:bodyPr rtlCol="0" anchor="ctr"/>
+          <a:lstStyle/>
+          <a:p>
+            <a:pPr algn="ctr"/>
+          </a:p>
+        </p:txBody>
+      </p:sp>
+      <p:sp>
+        <p:nvSpPr>
+          <p:cNvPr id="3" name="Rectangle 2"/>
+          <p:cNvSpPr/>
+          <p:nvPr/>
+        </p:nvSpPr>
+        <p:spPr>
+          <a:xfrm>
+            <a:off x="0" y="566928"/>
+            <a:ext cx="12191695" cy="54864"/>
+          </a:xfrm>
+          <a:prstGeom prst="rect">
+            <a:avLst/>
+          </a:prstGeom>
+          <a:solidFill>
+            <a:srgbClr val="F59E0B"/>
+          </a:solidFill>
+          <a:ln>
+            <a:noFill/>
+          </a:ln>
+          <a:effectLst/>
+        </p:spPr>
+        <p:style>
+          <a:lnRef idx="1">
+            <a:schemeClr val="accent1"/>
+          </a:lnRef>
+          <a:fillRef idx="3">
+            <a:schemeClr val="accent1"/>
+          </a:fillRef>
+          <a:effectRef idx="2">
+            <a:schemeClr val="accent1"/>
+          </a:effectRef>
+          <a:fontRef idx="minor">
+            <a:schemeClr val="lt1"/>
+          </a:fontRef>
+        </p:style>
+        <p:txBody>
+          <a:bodyPr rtlCol="0" anchor="ctr"/>
+          <a:lstStyle/>
+          <a:p>
+            <a:pPr algn="ctr"/>
+          </a:p>
+        </p:txBody>
+      </p:sp>
+      <p:sp>
+        <p:nvSpPr>
+          <p:cNvPr id="4" name="TextBox 3"/>
+          <p:cNvSpPr txBox="1"/>
+          <p:nvPr/>
+        </p:nvSpPr>
+        <p:spPr>
+          <a:xfrm>
+            <a:off x="365760" y="27432"/>
+            <a:ext cx="7315200" cy="502920"/>
+          </a:xfrm>
+          <a:prstGeom prst="rect">
+            <a:avLst/>
+          </a:prstGeom>
+          <a:noFill/>
+        </p:spPr>
+        <p:txBody>
+          <a:bodyPr wrap="square" anchor="ctr">
+            <a:spAutoFit/>
+          </a:bodyPr>
+          <a:lstStyle/>
+          <a:p>
+            <a:pPr algn="l">
+              <a:lnSpc>
+                <a:spcPct val="100000"/>
+              </a:lnSpc>
+            </a:pPr>
+            <a:r>
+              <a:rPr sz="1500" b="1">
+                <a:solidFill>
+                  <a:srgbClr val="FFFFFF"/>
+                </a:solidFill>
+                <a:latin typeface="Malgun Gothic"/>
+              </a:rPr>
+              <a:t>🏢 망고아이 지사용 사용설명서</a:t>
+            </a:r>
+          </a:p>
+        </p:txBody>
+      </p:sp>
+      <p:sp>
+        <p:nvSpPr>
+          <p:cNvPr id="5" name="TextBox 4"/>
+          <p:cNvSpPr txBox="1"/>
+          <p:nvPr/>
+        </p:nvSpPr>
+        <p:spPr>
+          <a:xfrm>
+            <a:off x="8168335" y="27432"/>
+            <a:ext cx="3657600" cy="502920"/>
+          </a:xfrm>
+          <a:prstGeom prst="rect">
+            <a:avLst/>
+          </a:prstGeom>
+          <a:noFill/>
+        </p:spPr>
+        <p:txBody>
+          <a:bodyPr wrap="square" anchor="ctr">
+            <a:spAutoFit/>
+          </a:bodyPr>
+          <a:lstStyle/>
+          <a:p>
+            <a:pPr algn="r">
+              <a:lnSpc>
+                <a:spcPct val="100000"/>
+              </a:lnSpc>
+            </a:pPr>
+            <a:r>
+              <a:rPr sz="1300" b="1">
+                <a:solidFill>
+                  <a:srgbClr val="F1F5F9"/>
+                </a:solidFill>
+                <a:latin typeface="Malgun Gothic"/>
+              </a:rPr>
+              <a:t>주요 기능 사용법</a:t>
+            </a:r>
+          </a:p>
+        </p:txBody>
+      </p:sp>
+      <p:sp>
+        <p:nvSpPr>
+          <p:cNvPr id="6" name="Rounded Rectangle 5"/>
+          <p:cNvSpPr/>
+          <p:nvPr/>
+        </p:nvSpPr>
+        <p:spPr>
+          <a:xfrm>
+            <a:off x="365760" y="822960"/>
+            <a:ext cx="868680" cy="868680"/>
+          </a:xfrm>
+          <a:prstGeom prst="roundRect">
+            <a:avLst/>
+          </a:prstGeom>
+          <a:solidFill>
+            <a:srgbClr val="0D9488"/>
+          </a:solidFill>
+          <a:ln>
+            <a:noFill/>
+          </a:ln>
+          <a:effectLst/>
+        </p:spPr>
+        <p:style>
+          <a:lnRef idx="1">
+            <a:schemeClr val="accent1"/>
+          </a:lnRef>
+          <a:fillRef idx="3">
+            <a:schemeClr val="accent1"/>
+          </a:fillRef>
+          <a:effectRef idx="2">
+            <a:schemeClr val="accent1"/>
+          </a:effectRef>
+          <a:fontRef idx="minor">
+            <a:schemeClr val="lt1"/>
+          </a:fontRef>
+        </p:style>
+        <p:txBody>
+          <a:bodyPr rtlCol="0" anchor="ctr"/>
+          <a:lstStyle/>
+          <a:p>
+            <a:pPr algn="ctr"/>
+          </a:p>
+        </p:txBody>
+      </p:sp>
+      <p:sp>
+        <p:nvSpPr>
+          <p:cNvPr id="7" name="TextBox 6"/>
+          <p:cNvSpPr txBox="1"/>
+          <p:nvPr/>
+        </p:nvSpPr>
+        <p:spPr>
+          <a:xfrm>
+            <a:off x="365760" y="822960"/>
+            <a:ext cx="868680" cy="868680"/>
+          </a:xfrm>
+          <a:prstGeom prst="rect">
+            <a:avLst/>
+          </a:prstGeom>
+          <a:noFill/>
+        </p:spPr>
+        <p:txBody>
+          <a:bodyPr wrap="square" anchor="ctr">
+            <a:spAutoFit/>
+          </a:bodyPr>
+          <a:lstStyle/>
+          <a:p>
+            <a:pPr algn="ctr">
+              <a:lnSpc>
+                <a:spcPct val="100000"/>
+              </a:lnSpc>
+            </a:pPr>
+            <a:r>
+              <a:rPr sz="2600" b="1">
+                <a:solidFill>
+                  <a:srgbClr val="FFFFFF"/>
+                </a:solidFill>
+                <a:latin typeface="Malgun Gothic"/>
+              </a:rPr>
+              <a:t>17</a:t>
+            </a:r>
+          </a:p>
+        </p:txBody>
+      </p:sp>
+      <p:sp>
+        <p:nvSpPr>
+          <p:cNvPr id="8" name="TextBox 7"/>
+          <p:cNvSpPr txBox="1"/>
+          <p:nvPr/>
+        </p:nvSpPr>
+        <p:spPr>
+          <a:xfrm>
+            <a:off x="1371600" y="822960"/>
+            <a:ext cx="10424160" cy="502920"/>
+          </a:xfrm>
+          <a:prstGeom prst="rect">
+            <a:avLst/>
+          </a:prstGeom>
+          <a:noFill/>
+        </p:spPr>
+        <p:txBody>
+          <a:bodyPr wrap="square" anchor="t">
+            <a:spAutoFit/>
+          </a:bodyPr>
+          <a:lstStyle/>
+          <a:p>
+            <a:pPr algn="l">
+              <a:lnSpc>
+                <a:spcPct val="100000"/>
+              </a:lnSpc>
+            </a:pPr>
+            <a:r>
+              <a:rPr sz="2300" b="1">
+                <a:solidFill>
+                  <a:srgbClr val="1E2340"/>
+                </a:solidFill>
+                <a:latin typeface="Malgun Gothic"/>
+              </a:rPr>
+              <a:t>🤖 AI 운영비서에게 시키기</a:t>
+            </a:r>
+          </a:p>
+        </p:txBody>
+      </p:sp>
+      <p:sp>
+        <p:nvSpPr>
+          <p:cNvPr id="9" name="TextBox 8"/>
+          <p:cNvSpPr txBox="1"/>
+          <p:nvPr/>
+        </p:nvSpPr>
+        <p:spPr>
+          <a:xfrm>
+            <a:off x="1417320" y="1353312"/>
+            <a:ext cx="10424160" cy="320040"/>
+          </a:xfrm>
+          <a:prstGeom prst="rect">
+            <a:avLst/>
+          </a:prstGeom>
+          <a:noFill/>
+        </p:spPr>
+        <p:txBody>
+          <a:bodyPr wrap="square" anchor="t">
+            <a:spAutoFit/>
+          </a:bodyPr>
+          <a:lstStyle/>
+          <a:p>
+            <a:pPr algn="l">
+              <a:lnSpc>
+                <a:spcPct val="100000"/>
+              </a:lnSpc>
+            </a:pPr>
+            <a:r>
+              <a:rPr sz="1300" b="0">
+                <a:solidFill>
+                  <a:srgbClr val="64748B"/>
+                </a:solidFill>
+                <a:latin typeface="Malgun Gothic"/>
+              </a:rPr>
+              <a:t>“○○ 화면으로 가게 해줘” 한마디로 이동</a:t>
+            </a:r>
+          </a:p>
+        </p:txBody>
+      </p:sp>
+      <p:sp>
+        <p:nvSpPr>
+          <p:cNvPr id="10" name="Rounded Rectangle 9"/>
+          <p:cNvSpPr/>
+          <p:nvPr/>
+        </p:nvSpPr>
+        <p:spPr>
+          <a:xfrm>
+            <a:off x="365760" y="1828800"/>
+            <a:ext cx="11430000" cy="777240"/>
+          </a:xfrm>
+          <a:prstGeom prst="roundRect">
+            <a:avLst/>
+          </a:prstGeom>
+          <a:solidFill>
+            <a:srgbClr val="ECFDF5"/>
+          </a:solidFill>
+          <a:ln>
+            <a:noFill/>
+          </a:ln>
+          <a:effectLst/>
+        </p:spPr>
+        <p:style>
+          <a:lnRef idx="1">
+            <a:schemeClr val="accent1"/>
+          </a:lnRef>
+          <a:fillRef idx="3">
+            <a:schemeClr val="accent1"/>
+          </a:fillRef>
+          <a:effectRef idx="2">
+            <a:schemeClr val="accent1"/>
+          </a:effectRef>
+          <a:fontRef idx="minor">
+            <a:schemeClr val="lt1"/>
+          </a:fontRef>
+        </p:style>
+        <p:txBody>
+          <a:bodyPr rtlCol="0" anchor="ctr"/>
+          <a:lstStyle/>
+          <a:p>
+            <a:pPr algn="ctr"/>
+          </a:p>
+        </p:txBody>
+      </p:sp>
+      <p:sp>
+        <p:nvSpPr>
+          <p:cNvPr id="11" name="TextBox 10"/>
+          <p:cNvSpPr txBox="1"/>
+          <p:nvPr/>
+        </p:nvSpPr>
+        <p:spPr>
+          <a:xfrm>
+            <a:off x="548640" y="1901952"/>
+            <a:ext cx="11064240" cy="640080"/>
+          </a:xfrm>
+          <a:prstGeom prst="rect">
+            <a:avLst/>
+          </a:prstGeom>
+          <a:noFill/>
+        </p:spPr>
+        <p:txBody>
+          <a:bodyPr wrap="square" anchor="t">
+            <a:spAutoFit/>
+          </a:bodyPr>
+          <a:lstStyle/>
+          <a:p>
+            <a:pPr algn="l">
+              <a:lnSpc>
+                <a:spcPct val="115000"/>
+              </a:lnSpc>
+            </a:pPr>
+            <a:r>
+              <a:rPr sz="1200" b="0">
+                <a:solidFill>
+                  <a:srgbClr val="334155"/>
+                </a:solidFill>
+                <a:latin typeface="Malgun Gothic"/>
+              </a:rPr>
+              <a:t>상단 통합 검색창(또는 우하단 AI 운영비서) 에 하고 싶은 일을 자연스럽게 말하면, AI가 알아듣고 바로 그 화면으로 이동시켜줘요. 이제 ‘○○ 강사 스케줄로 가게 해줘’, ‘자동 스케줄링 열어줘’ 같은 이동 명령을 정확히 따라요.</a:t>
+            </a:r>
+          </a:p>
+        </p:txBody>
+      </p:sp>
+      <p:sp>
+        <p:nvSpPr>
+          <p:cNvPr id="12" name="TextBox 11"/>
+          <p:cNvSpPr txBox="1"/>
+          <p:nvPr/>
+        </p:nvSpPr>
+        <p:spPr>
+          <a:xfrm>
+            <a:off x="457200" y="2743200"/>
+            <a:ext cx="5669280" cy="320040"/>
+          </a:xfrm>
+          <a:prstGeom prst="rect">
+            <a:avLst/>
+          </a:prstGeom>
+          <a:noFill/>
+        </p:spPr>
+        <p:txBody>
+          <a:bodyPr wrap="square" anchor="t">
+            <a:spAutoFit/>
+          </a:bodyPr>
+          <a:lstStyle/>
+          <a:p>
+            <a:pPr algn="l">
+              <a:lnSpc>
+                <a:spcPct val="100000"/>
+              </a:lnSpc>
+            </a:pPr>
+            <a:r>
+              <a:rPr sz="1350" b="1">
+                <a:solidFill>
+                  <a:srgbClr val="0D9488"/>
+                </a:solidFill>
+                <a:latin typeface="Malgun Gothic"/>
+              </a:rPr>
+              <a:t>사용 방법</a:t>
+            </a:r>
+          </a:p>
+        </p:txBody>
+      </p:sp>
+      <p:sp>
+        <p:nvSpPr>
+          <p:cNvPr id="13" name="TextBox 12"/>
+          <p:cNvSpPr txBox="1"/>
+          <p:nvPr/>
+        </p:nvSpPr>
+        <p:spPr>
+          <a:xfrm>
+            <a:off x="457200" y="3108960"/>
+            <a:ext cx="5669280" cy="2377440"/>
+          </a:xfrm>
+          <a:prstGeom prst="rect">
+            <a:avLst/>
+          </a:prstGeom>
+          <a:noFill/>
+        </p:spPr>
+        <p:txBody>
+          <a:bodyPr wrap="square">
+            <a:spAutoFit/>
+          </a:bodyPr>
+          <a:lstStyle/>
+          <a:p>
+            <a:pPr>
+              <a:lnSpc>
+                <a:spcPct val="115000"/>
+              </a:lnSpc>
+              <a:spcAft>
+                <a:spcPts val="600"/>
+              </a:spcAft>
+            </a:pPr>
+            <a:r>
+              <a:rPr sz="1050" b="1">
+                <a:solidFill>
+                  <a:srgbClr val="0D9488"/>
+                </a:solidFill>
+                <a:latin typeface="Malgun Gothic"/>
+              </a:rPr>
+              <a:t>● </a:t>
+            </a:r>
+            <a:r>
+              <a:rPr sz="1250">
+                <a:solidFill>
+                  <a:srgbClr val="334155"/>
+                </a:solidFill>
+                <a:latin typeface="Malgun Gothic"/>
+              </a:rPr>
+              <a:t>상단 검색창에 명령을 입력하거나 🎤 마이크로 말해요.</a:t>
+            </a:r>
+          </a:p>
+          <a:p>
+            <a:pPr>
+              <a:lnSpc>
+                <a:spcPct val="115000"/>
+              </a:lnSpc>
+              <a:spcAft>
+                <a:spcPts val="600"/>
+              </a:spcAft>
+            </a:pPr>
+            <a:r>
+              <a:rPr sz="1050" b="1">
+                <a:solidFill>
+                  <a:srgbClr val="0D9488"/>
+                </a:solidFill>
+                <a:latin typeface="Malgun Gothic"/>
+              </a:rPr>
+              <a:t>● </a:t>
+            </a:r>
+            <a:r>
+              <a:rPr sz="1250">
+                <a:solidFill>
+                  <a:srgbClr val="334155"/>
+                </a:solidFill>
+                <a:latin typeface="Malgun Gothic"/>
+              </a:rPr>
+              <a:t>예: “김민지 강사 스케줄로 가게 해줘” → 주간 스케줄에서 해당 강사를 자동으로 찾아 열어줘요.</a:t>
+            </a:r>
+          </a:p>
+          <a:p>
+            <a:pPr>
+              <a:lnSpc>
+                <a:spcPct val="115000"/>
+              </a:lnSpc>
+              <a:spcAft>
+                <a:spcPts val="600"/>
+              </a:spcAft>
+            </a:pPr>
+            <a:r>
+              <a:rPr sz="1050" b="1">
+                <a:solidFill>
+                  <a:srgbClr val="0D9488"/>
+                </a:solidFill>
+                <a:latin typeface="Malgun Gothic"/>
+              </a:rPr>
+              <a:t>● </a:t>
+            </a:r>
+            <a:r>
+              <a:rPr sz="1250">
+                <a:solidFill>
+                  <a:srgbClr val="334155"/>
+                </a:solidFill>
+                <a:latin typeface="Malgun Gothic"/>
+              </a:rPr>
+              <a:t>예: “자동 스케줄링 열어줘”, “정산 화면으로” 처럼 메뉴 이동을 시켜요.</a:t>
+            </a:r>
+          </a:p>
+          <a:p>
+            <a:pPr>
+              <a:lnSpc>
+                <a:spcPct val="115000"/>
+              </a:lnSpc>
+              <a:spcAft>
+                <a:spcPts val="600"/>
+              </a:spcAft>
+            </a:pPr>
+            <a:r>
+              <a:rPr sz="1050" b="1">
+                <a:solidFill>
+                  <a:srgbClr val="0D9488"/>
+                </a:solidFill>
+                <a:latin typeface="Malgun Gothic"/>
+              </a:rPr>
+              <a:t>● </a:t>
+            </a:r>
+            <a:r>
+              <a:rPr sz="1250">
+                <a:solidFill>
+                  <a:srgbClr val="334155"/>
+                </a:solidFill>
+                <a:latin typeface="Malgun Gothic"/>
+              </a:rPr>
+              <a:t>AI 응답 카드의 ‘지금 이동 →’ 을 누르면 해당 화면으로 넘어가요.</a:t>
+            </a:r>
+          </a:p>
+        </p:txBody>
+      </p:sp>
+      <p:sp>
+        <p:nvSpPr>
+          <p:cNvPr id="14" name="Rounded Rectangle 13"/>
+          <p:cNvSpPr/>
+          <p:nvPr/>
+        </p:nvSpPr>
+        <p:spPr>
+          <a:xfrm>
+            <a:off x="457200" y="4782312"/>
+            <a:ext cx="5669280" cy="1316736"/>
+          </a:xfrm>
+          <a:prstGeom prst="roundRect">
+            <a:avLst/>
+          </a:prstGeom>
+          <a:solidFill>
+            <a:srgbClr val="F4F7FF"/>
+          </a:solidFill>
+          <a:ln w="12700">
+            <a:solidFill>
+              <a:srgbClr val="0D9488"/>
+            </a:solidFill>
+          </a:ln>
+          <a:effectLst/>
+        </p:spPr>
+        <p:style>
+          <a:lnRef idx="1">
+            <a:schemeClr val="accent1"/>
+          </a:lnRef>
+          <a:fillRef idx="3">
+            <a:schemeClr val="accent1"/>
+          </a:fillRef>
+          <a:effectRef idx="2">
+            <a:schemeClr val="accent1"/>
+          </a:effectRef>
+          <a:fontRef idx="minor">
+            <a:schemeClr val="lt1"/>
+          </a:fontRef>
+        </p:style>
+        <p:txBody>
+          <a:bodyPr rtlCol="0" anchor="ctr"/>
+          <a:lstStyle/>
+          <a:p>
+            <a:pPr algn="ctr"/>
+          </a:p>
+        </p:txBody>
+      </p:sp>
+      <p:sp>
+        <p:nvSpPr>
+          <p:cNvPr id="15" name="TextBox 14"/>
+          <p:cNvSpPr txBox="1"/>
+          <p:nvPr/>
+        </p:nvSpPr>
+        <p:spPr>
+          <a:xfrm>
+            <a:off x="594360" y="4837175"/>
+            <a:ext cx="5394960" cy="274320"/>
+          </a:xfrm>
+          <a:prstGeom prst="rect">
+            <a:avLst/>
+          </a:prstGeom>
+          <a:noFill/>
+        </p:spPr>
+        <p:txBody>
+          <a:bodyPr wrap="square" anchor="t">
+            <a:spAutoFit/>
+          </a:bodyPr>
+          <a:lstStyle/>
+          <a:p>
+            <a:pPr algn="l">
+              <a:lnSpc>
+                <a:spcPct val="100000"/>
+              </a:lnSpc>
+            </a:pPr>
+            <a:r>
+              <a:rPr sz="1150" b="1">
+                <a:solidFill>
+                  <a:srgbClr val="0D9488"/>
+                </a:solidFill>
+                <a:latin typeface="Malgun Gothic"/>
+              </a:rPr>
+              <a:t>✅ 핵심 포인트</a:t>
+            </a:r>
+          </a:p>
+        </p:txBody>
+      </p:sp>
+      <p:sp>
+        <p:nvSpPr>
+          <p:cNvPr id="16" name="TextBox 15"/>
+          <p:cNvSpPr txBox="1"/>
+          <p:nvPr/>
+        </p:nvSpPr>
+        <p:spPr>
+          <a:xfrm>
+            <a:off x="594360" y="5111496"/>
+            <a:ext cx="5394960" cy="950976"/>
+          </a:xfrm>
+          <a:prstGeom prst="rect">
+            <a:avLst/>
+          </a:prstGeom>
+          <a:noFill/>
+        </p:spPr>
+        <p:txBody>
+          <a:bodyPr wrap="square">
+            <a:spAutoFit/>
+          </a:bodyPr>
+          <a:lstStyle/>
+          <a:p>
+            <a:pPr>
+              <a:lnSpc>
+                <a:spcPct val="115000"/>
+              </a:lnSpc>
+              <a:spcAft>
+                <a:spcPts val="200"/>
+              </a:spcAft>
+            </a:pPr>
+            <a:r>
+              <a:rPr sz="900" b="1">
+                <a:solidFill>
+                  <a:srgbClr val="0D9488"/>
+                </a:solidFill>
+                <a:latin typeface="Malgun Gothic"/>
+              </a:rPr>
+              <a:t>● </a:t>
+            </a:r>
+            <a:r>
+              <a:rPr sz="1100">
+                <a:solidFill>
+                  <a:srgbClr val="334155"/>
+                </a:solidFill>
+                <a:latin typeface="Malgun Gothic"/>
+              </a:rPr>
+              <a:t>이동 명령은 확실히 이동하고, 설명만 하고 마는 일이 줄었어요.</a:t>
+            </a:r>
+          </a:p>
+          <a:p>
+            <a:pPr>
+              <a:lnSpc>
+                <a:spcPct val="115000"/>
+              </a:lnSpc>
+              <a:spcAft>
+                <a:spcPts val="200"/>
+              </a:spcAft>
+            </a:pPr>
+            <a:r>
+              <a:rPr sz="900" b="1">
+                <a:solidFill>
+                  <a:srgbClr val="0D9488"/>
+                </a:solidFill>
+                <a:latin typeface="Malgun Gothic"/>
+              </a:rPr>
+              <a:t>● </a:t>
+            </a:r>
+            <a:r>
+              <a:rPr sz="1100">
+                <a:solidFill>
+                  <a:srgbClr val="334155"/>
+                </a:solidFill>
+                <a:latin typeface="Malgun Gothic"/>
+              </a:rPr>
+              <a:t>강사 이름으로 스케줄을 검색하면 검색창 자동 채움 + 필터 + 스크롤까지 돼요.</a:t>
+            </a:r>
+          </a:p>
+          <a:p>
+            <a:pPr>
+              <a:lnSpc>
+                <a:spcPct val="115000"/>
+              </a:lnSpc>
+              <a:spcAft>
+                <a:spcPts val="200"/>
+              </a:spcAft>
+            </a:pPr>
+            <a:r>
+              <a:rPr sz="900" b="1">
+                <a:solidFill>
+                  <a:srgbClr val="0D9488"/>
+                </a:solidFill>
+                <a:latin typeface="Malgun Gothic"/>
+              </a:rPr>
+              <a:t>● </a:t>
+            </a:r>
+            <a:r>
+              <a:rPr sz="1100">
+                <a:solidFill>
+                  <a:srgbClr val="334155"/>
+                </a:solidFill>
+                <a:latin typeface="Malgun Gothic"/>
+              </a:rPr>
+              <a:t>데이터 조회·통계 질문에는 카드형 답변으로도 도와줘요.</a:t>
+            </a:r>
+          </a:p>
+        </p:txBody>
+      </p:sp>
+      <p:sp>
+        <p:nvSpPr>
+          <p:cNvPr id="17" name="Rounded Rectangle 16"/>
+          <p:cNvSpPr/>
+          <p:nvPr/>
+        </p:nvSpPr>
+        <p:spPr>
+          <a:xfrm>
+            <a:off x="457200" y="6208775"/>
+            <a:ext cx="5669280" cy="640080"/>
+          </a:xfrm>
+          <a:prstGeom prst="roundRect">
+            <a:avLst/>
+          </a:prstGeom>
+          <a:solidFill>
+            <a:srgbClr val="FFFBEB"/>
+          </a:solidFill>
+          <a:ln w="12700">
+            <a:solidFill>
+              <a:srgbClr val="F59E0B"/>
+            </a:solidFill>
+          </a:ln>
+          <a:effectLst/>
+        </p:spPr>
+        <p:style>
+          <a:lnRef idx="1">
+            <a:schemeClr val="accent1"/>
+          </a:lnRef>
+          <a:fillRef idx="3">
+            <a:schemeClr val="accent1"/>
+          </a:fillRef>
+          <a:effectRef idx="2">
+            <a:schemeClr val="accent1"/>
+          </a:effectRef>
+          <a:fontRef idx="minor">
+            <a:schemeClr val="lt1"/>
+          </a:fontRef>
+        </p:style>
+        <p:txBody>
+          <a:bodyPr rtlCol="0" anchor="ctr"/>
+          <a:lstStyle/>
+          <a:p>
+            <a:pPr algn="ctr"/>
+          </a:p>
+        </p:txBody>
+      </p:sp>
+      <p:sp>
+        <p:nvSpPr>
+          <p:cNvPr id="18" name="TextBox 17"/>
+          <p:cNvSpPr txBox="1"/>
+          <p:nvPr/>
+        </p:nvSpPr>
+        <p:spPr>
+          <a:xfrm>
+            <a:off x="594360" y="6254495"/>
+            <a:ext cx="5394960" cy="548640"/>
+          </a:xfrm>
+          <a:prstGeom prst="rect">
+            <a:avLst/>
+          </a:prstGeom>
+          <a:noFill/>
+        </p:spPr>
+        <p:txBody>
+          <a:bodyPr wrap="square" anchor="t">
+            <a:spAutoFit/>
+          </a:bodyPr>
+          <a:lstStyle/>
+          <a:p>
+            <a:pPr algn="l">
+              <a:lnSpc>
+                <a:spcPct val="105000"/>
+              </a:lnSpc>
+            </a:pPr>
+            <a:r>
+              <a:rPr sz="1050" b="0">
+                <a:solidFill>
+                  <a:srgbClr val="92670A"/>
+                </a:solidFill>
+                <a:latin typeface="Malgun Gothic"/>
+              </a:rPr>
+              <a:t>⚠️ 알아두기 · ‘등록·발송·변경’처럼 실제로 무언가를 바꾸는 명령은 한 번 더 확인해요(안전장치).</a:t>
+            </a:r>
+          </a:p>
+        </p:txBody>
+      </p:sp>
+      <p:sp>
+        <p:nvSpPr>
+          <p:cNvPr id="19" name="Rounded Rectangle 18"/>
+          <p:cNvSpPr/>
+          <p:nvPr/>
+        </p:nvSpPr>
+        <p:spPr>
+          <a:xfrm>
+            <a:off x="457200" y="6940295"/>
+            <a:ext cx="5669280" cy="658368"/>
+          </a:xfrm>
+          <a:prstGeom prst="roundRect">
+            <a:avLst/>
+          </a:prstGeom>
+          <a:solidFill>
+            <a:srgbClr val="FFF7E6"/>
+          </a:solidFill>
+          <a:ln w="12700">
+            <a:solidFill>
+              <a:srgbClr val="F59E0B"/>
+            </a:solidFill>
+          </a:ln>
+          <a:effectLst/>
+        </p:spPr>
+        <p:style>
+          <a:lnRef idx="1">
+            <a:schemeClr val="accent1"/>
+          </a:lnRef>
+          <a:fillRef idx="3">
+            <a:schemeClr val="accent1"/>
+          </a:fillRef>
+          <a:effectRef idx="2">
+            <a:schemeClr val="accent1"/>
+          </a:effectRef>
+          <a:fontRef idx="minor">
+            <a:schemeClr val="lt1"/>
+          </a:fontRef>
+        </p:style>
+        <p:txBody>
+          <a:bodyPr rtlCol="0" anchor="ctr"/>
+          <a:lstStyle/>
+          <a:p>
+            <a:pPr algn="ctr"/>
+          </a:p>
+        </p:txBody>
+      </p:sp>
+      <p:sp>
+        <p:nvSpPr>
+          <p:cNvPr id="20" name="TextBox 19"/>
+          <p:cNvSpPr txBox="1"/>
+          <p:nvPr/>
+        </p:nvSpPr>
+        <p:spPr>
+          <a:xfrm>
+            <a:off x="594360" y="6986015"/>
+            <a:ext cx="5394960" cy="566928"/>
+          </a:xfrm>
+          <a:prstGeom prst="rect">
+            <a:avLst/>
+          </a:prstGeom>
+          <a:noFill/>
+        </p:spPr>
+        <p:txBody>
+          <a:bodyPr wrap="square" anchor="t">
+            <a:spAutoFit/>
+          </a:bodyPr>
+          <a:lstStyle/>
+          <a:p>
+            <a:pPr algn="l">
+              <a:lnSpc>
+                <a:spcPct val="105000"/>
+              </a:lnSpc>
+            </a:pPr>
+            <a:r>
+              <a:rPr sz="1050" b="0">
+                <a:solidFill>
+                  <a:srgbClr val="5B4A2A"/>
+                </a:solidFill>
+                <a:latin typeface="Malgun Gothic"/>
+              </a:rPr>
+              <a:t>💡 꿀팁 · 메뉴 이름이 기억나지 않을 땐 하고 싶은 일을 그대로 말해보세요 — 알아서 찾아가요.</a:t>
+            </a:r>
+          </a:p>
+        </p:txBody>
+      </p:sp>
+      <p:sp>
+        <p:nvSpPr>
+          <p:cNvPr id="21" name="Rectangle 20"/>
+          <p:cNvSpPr/>
+          <p:nvPr/>
+        </p:nvSpPr>
+        <p:spPr>
+          <a:xfrm>
+            <a:off x="6300216" y="2345436"/>
+            <a:ext cx="5596128" cy="3538728"/>
+          </a:xfrm>
+          <a:prstGeom prst="rect">
+            <a:avLst/>
+          </a:prstGeom>
+          <a:solidFill>
+            <a:srgbClr val="FFFFFF"/>
+          </a:solidFill>
+          <a:ln w="12700">
+            <a:solidFill>
+              <a:srgbClr val="E2E8F0"/>
+            </a:solidFill>
+          </a:ln>
+          <a:effectLst/>
+        </p:spPr>
+        <p:style>
+          <a:lnRef idx="1">
+            <a:schemeClr val="accent1"/>
+          </a:lnRef>
+          <a:fillRef idx="3">
+            <a:schemeClr val="accent1"/>
+          </a:fillRef>
+          <a:effectRef idx="2">
+            <a:schemeClr val="accent1"/>
+          </a:effectRef>
+          <a:fontRef idx="minor">
+            <a:schemeClr val="lt1"/>
+          </a:fontRef>
+        </p:style>
+        <p:txBody>
+          <a:bodyPr rtlCol="0" anchor="ctr"/>
+          <a:lstStyle/>
+          <a:p>
+            <a:pPr algn="ctr"/>
+          </a:p>
+        </p:txBody>
+      </p:sp>
+      <p:pic>
+        <p:nvPicPr>
+          <p:cNvPr id="22" name="Picture 21" descr="admin_aicommand.jpg"/>
+          <p:cNvPicPr>
+            <a:picLocks noChangeAspect="1"/>
+          </p:cNvPicPr>
+          <p:nvPr/>
+        </p:nvPicPr>
+        <p:blipFill>
+          <a:blip r:embed="rId2"/>
+          <a:stretch>
+            <a:fillRect/>
+          </a:stretch>
+        </p:blipFill>
+        <p:spPr>
+          <a:xfrm>
+            <a:off x="6355080" y="2400300"/>
+            <a:ext cx="5486400" cy="3429000"/>
+          </a:xfrm>
+          <a:prstGeom prst="rect">
+            <a:avLst/>
+          </a:prstGeom>
+        </p:spPr>
+      </p:pic>
+    </p:spTree>
+  </p:cSld>
+  <p:clrMapOvr>
+    <a:masterClrMapping/>
+  </p:clrMapOvr>
+</p:sld>
+</file>
+
+<file path=ppt/slides/slide2.xml><?xml version="1.0" encoding="utf-8"?>
+<p:sld xmlns:a="http://schemas.openxmlformats.org/drawingml/2006/main" xmlns:p="http://schemas.openxmlformats.org/presentationml/2006/main" xmlns:r="http://schemas.openxmlformats.org/officeDocument/2006/relationships">
+  <p:cSld>
+    <p:bg>
+      <p:bgPr>
+        <a:solidFill>
+          <a:srgbClr val="FFFFFF"/>
+        </a:solidFill>
+        <a:effectLst/>
+      </p:bgPr>
+    </p:bg>
+    <p:spTree>
+      <p:nvGrpSpPr>
+        <p:cNvPr id="1" name=""/>
+        <p:cNvGrpSpPr/>
+        <p:nvPr/>
+      </p:nvGrpSpPr>
+      <p:grpSpPr/>
+      <p:sp>
+        <p:nvSpPr>
+          <p:cNvPr id="2" name="Rectangle 1"/>
+          <p:cNvSpPr/>
+          <p:nvPr/>
+        </p:nvSpPr>
+        <p:spPr>
+          <a:xfrm>
+            <a:off x="0" y="0"/>
+            <a:ext cx="12191695" cy="566928"/>
+          </a:xfrm>
+          <a:prstGeom prst="rect">
+            <a:avLst/>
+          </a:prstGeom>
+          <a:solidFill>
+            <a:srgbClr val="0D9488"/>
+          </a:solidFill>
+          <a:ln>
+            <a:noFill/>
+          </a:ln>
+          <a:effectLst/>
+        </p:spPr>
+        <p:style>
+          <a:lnRef idx="1">
+            <a:schemeClr val="accent1"/>
+          </a:lnRef>
+          <a:fillRef idx="3">
+            <a:schemeClr val="accent1"/>
+          </a:fillRef>
+          <a:effectRef idx="2">
+            <a:schemeClr val="accent1"/>
+          </a:effectRef>
+          <a:fontRef idx="minor">
+            <a:schemeClr val="lt1"/>
+          </a:fontRef>
+        </p:style>
+        <p:txBody>
+          <a:bodyPr rtlCol="0" anchor="ctr"/>
+          <a:lstStyle/>
+          <a:p>
+            <a:pPr algn="ctr"/>
+          </a:p>
+        </p:txBody>
+      </p:sp>
+      <p:sp>
+        <p:nvSpPr>
+          <p:cNvPr id="3" name="Rectangle 2"/>
+          <p:cNvSpPr/>
+          <p:nvPr/>
+        </p:nvSpPr>
+        <p:spPr>
+          <a:xfrm>
+            <a:off x="0" y="566928"/>
+            <a:ext cx="12191695" cy="54864"/>
+          </a:xfrm>
+          <a:prstGeom prst="rect">
+            <a:avLst/>
+          </a:prstGeom>
+          <a:solidFill>
+            <a:srgbClr val="F59E0B"/>
+          </a:solidFill>
+          <a:ln>
+            <a:noFill/>
+          </a:ln>
+          <a:effectLst/>
+        </p:spPr>
+        <p:style>
+          <a:lnRef idx="1">
+            <a:schemeClr val="accent1"/>
+          </a:lnRef>
+          <a:fillRef idx="3">
+            <a:schemeClr val="accent1"/>
+          </a:fillRef>
+          <a:effectRef idx="2">
+            <a:schemeClr val="accent1"/>
+          </a:effectRef>
+          <a:fontRef idx="minor">
+            <a:schemeClr val="lt1"/>
+          </a:fontRef>
+        </p:style>
+        <p:txBody>
+          <a:bodyPr rtlCol="0" anchor="ctr"/>
+          <a:lstStyle/>
+          <a:p>
+            <a:pPr algn="ctr"/>
+          </a:p>
+        </p:txBody>
+      </p:sp>
+      <p:sp>
+        <p:nvSpPr>
+          <p:cNvPr id="4" name="TextBox 3"/>
+          <p:cNvSpPr txBox="1"/>
+          <p:nvPr/>
+        </p:nvSpPr>
+        <p:spPr>
+          <a:xfrm>
+            <a:off x="365760" y="27432"/>
+            <a:ext cx="7315200" cy="502920"/>
+          </a:xfrm>
+          <a:prstGeom prst="rect">
+            <a:avLst/>
+          </a:prstGeom>
+          <a:noFill/>
+        </p:spPr>
+        <p:txBody>
+          <a:bodyPr wrap="square" anchor="ctr">
+            <a:spAutoFit/>
+          </a:bodyPr>
+          <a:lstStyle/>
+          <a:p>
+            <a:pPr algn="l">
+              <a:lnSpc>
+                <a:spcPct val="100000"/>
+              </a:lnSpc>
+            </a:pPr>
+            <a:r>
+              <a:rPr sz="1500" b="1">
+                <a:solidFill>
+                  <a:srgbClr val="FFFFFF"/>
+                </a:solidFill>
+                <a:latin typeface="Malgun Gothic"/>
+              </a:rPr>
+              <a:t>🏢 망고아이 지사용 사용설명서</a:t>
+            </a:r>
+          </a:p>
+        </p:txBody>
+      </p:sp>
+      <p:sp>
+        <p:nvSpPr>
+          <p:cNvPr id="5" name="TextBox 4"/>
+          <p:cNvSpPr txBox="1"/>
+          <p:nvPr/>
+        </p:nvSpPr>
+        <p:spPr>
+          <a:xfrm>
+            <a:off x="8168335" y="27432"/>
+            <a:ext cx="3657600" cy="502920"/>
+          </a:xfrm>
+          <a:prstGeom prst="rect">
+            <a:avLst/>
+          </a:prstGeom>
+          <a:noFill/>
+        </p:spPr>
+        <p:txBody>
+          <a:bodyPr wrap="square" anchor="ctr">
+            <a:spAutoFit/>
+          </a:bodyPr>
+          <a:lstStyle/>
+          <a:p>
+            <a:pPr algn="r">
+              <a:lnSpc>
+                <a:spcPct val="100000"/>
+              </a:lnSpc>
+            </a:pPr>
+            <a:r>
+              <a:rPr sz="1300" b="1">
+                <a:solidFill>
+                  <a:srgbClr val="F1F5F9"/>
+                </a:solidFill>
+                <a:latin typeface="Malgun Gothic"/>
+              </a:rPr>
+              <a:t>소개</a:t>
+            </a:r>
+          </a:p>
+        </p:txBody>
+      </p:sp>
+      <p:sp>
+        <p:nvSpPr>
+          <p:cNvPr id="6" name="Rounded Rectangle 5"/>
+          <p:cNvSpPr/>
+          <p:nvPr/>
+        </p:nvSpPr>
+        <p:spPr>
+          <a:xfrm>
+            <a:off x="365760" y="868680"/>
+            <a:ext cx="11460175" cy="1554480"/>
+          </a:xfrm>
+          <a:prstGeom prst="roundRect">
+            <a:avLst/>
+          </a:prstGeom>
+          <a:solidFill>
+            <a:srgbClr val="ECFDF5"/>
+          </a:solidFill>
+          <a:ln>
+            <a:noFill/>
+          </a:ln>
+          <a:effectLst/>
+        </p:spPr>
+        <p:style>
+          <a:lnRef idx="1">
+            <a:schemeClr val="accent1"/>
+          </a:lnRef>
+          <a:fillRef idx="3">
+            <a:schemeClr val="accent1"/>
+          </a:fillRef>
+          <a:effectRef idx="2">
+            <a:schemeClr val="accent1"/>
+          </a:effectRef>
+          <a:fontRef idx="minor">
+            <a:schemeClr val="lt1"/>
+          </a:fontRef>
+        </p:style>
+        <p:txBody>
+          <a:bodyPr rtlCol="0" anchor="ctr"/>
+          <a:lstStyle/>
+          <a:p>
+            <a:pPr algn="ctr"/>
+          </a:p>
+        </p:txBody>
+      </p:sp>
+      <p:sp>
+        <p:nvSpPr>
+          <p:cNvPr id="7" name="TextBox 6"/>
+          <p:cNvSpPr txBox="1"/>
+          <p:nvPr/>
+        </p:nvSpPr>
+        <p:spPr>
+          <a:xfrm>
+            <a:off x="640080" y="1005840"/>
+            <a:ext cx="10881360" cy="457200"/>
+          </a:xfrm>
+          <a:prstGeom prst="rect">
+            <a:avLst/>
+          </a:prstGeom>
+          <a:noFill/>
+        </p:spPr>
+        <p:txBody>
+          <a:bodyPr wrap="square" anchor="t">
+            <a:spAutoFit/>
+          </a:bodyPr>
+          <a:lstStyle/>
+          <a:p>
+            <a:pPr algn="l">
+              <a:lnSpc>
+                <a:spcPct val="100000"/>
+              </a:lnSpc>
+            </a:pPr>
+            <a:r>
+              <a:rPr sz="2400" b="1">
+                <a:solidFill>
+                  <a:srgbClr val="0D9488"/>
+                </a:solidFill>
+                <a:latin typeface="Malgun Gothic"/>
+              </a:rPr>
+              <a:t>지사 관리 페이지란?</a:t>
+            </a:r>
+          </a:p>
+        </p:txBody>
+      </p:sp>
+      <p:sp>
+        <p:nvSpPr>
+          <p:cNvPr id="8" name="TextBox 7"/>
+          <p:cNvSpPr txBox="1"/>
+          <p:nvPr/>
+        </p:nvSpPr>
+        <p:spPr>
+          <a:xfrm>
+            <a:off x="640080" y="1481328"/>
+            <a:ext cx="10972800" cy="914400"/>
+          </a:xfrm>
+          <a:prstGeom prst="rect">
+            <a:avLst/>
+          </a:prstGeom>
+          <a:noFill/>
+        </p:spPr>
+        <p:txBody>
+          <a:bodyPr wrap="square" anchor="t">
+            <a:spAutoFit/>
+          </a:bodyPr>
+          <a:lstStyle/>
+          <a:p>
+            <a:pPr algn="l">
+              <a:lnSpc>
+                <a:spcPct val="125000"/>
+              </a:lnSpc>
+            </a:pPr>
+            <a:r>
+              <a:rPr sz="1300" b="0">
+                <a:solidFill>
+                  <a:srgbClr val="334155"/>
+                </a:solidFill>
+                <a:latin typeface="Malgun Gothic"/>
+              </a:rPr>
+              <a:t>지사 페이지는 본사에서 위임받은 권한으로 우리 지사와 산하 대리점을 관리하는 곳이에요. 로그인하면 ‘내 지사’ 범위의 데이터(매출·재원생·출석·정산)만 자동으로 보이고, 산하 대리점의 성과를 한눈에 확인하며 본사↔지사↔대리점으로 이어지는 정산을 처리해요. 화면 구성은 관리자 페이지와 같고, 보이는 범위만 달라요.</a:t>
+            </a:r>
+          </a:p>
+        </p:txBody>
+      </p:sp>
+      <p:sp>
+        <p:nvSpPr>
+          <p:cNvPr id="9" name="Rounded Rectangle 8"/>
+          <p:cNvSpPr/>
+          <p:nvPr/>
+        </p:nvSpPr>
+        <p:spPr>
+          <a:xfrm>
+            <a:off x="365760" y="2697480"/>
+            <a:ext cx="5524347" cy="822960"/>
+          </a:xfrm>
+          <a:prstGeom prst="roundRect">
+            <a:avLst/>
+          </a:prstGeom>
+          <a:solidFill>
+            <a:srgbClr val="FFFFFF"/>
+          </a:solidFill>
+          <a:ln w="12700">
+            <a:solidFill>
+              <a:srgbClr val="E2E8F0"/>
+            </a:solidFill>
+          </a:ln>
+          <a:effectLst/>
+        </p:spPr>
+        <p:style>
+          <a:lnRef idx="1">
+            <a:schemeClr val="accent1"/>
+          </a:lnRef>
+          <a:fillRef idx="3">
+            <a:schemeClr val="accent1"/>
+          </a:fillRef>
+          <a:effectRef idx="2">
+            <a:schemeClr val="accent1"/>
+          </a:effectRef>
+          <a:fontRef idx="minor">
+            <a:schemeClr val="lt1"/>
+          </a:fontRef>
+        </p:style>
+        <p:txBody>
+          <a:bodyPr rtlCol="0" anchor="ctr"/>
+          <a:lstStyle/>
+          <a:p>
+            <a:pPr algn="ctr"/>
+          </a:p>
+        </p:txBody>
+      </p:sp>
+      <p:sp>
+        <p:nvSpPr>
+          <p:cNvPr id="10" name="Rounded Rectangle 9"/>
+          <p:cNvSpPr/>
+          <p:nvPr/>
+        </p:nvSpPr>
+        <p:spPr>
+          <a:xfrm>
+            <a:off x="502920" y="2852928"/>
+            <a:ext cx="512064" cy="512064"/>
+          </a:xfrm>
+          <a:prstGeom prst="roundRect">
+            <a:avLst/>
+          </a:prstGeom>
+          <a:solidFill>
+            <a:srgbClr val="CCFBF1"/>
+          </a:solidFill>
+          <a:ln>
+            <a:noFill/>
+          </a:ln>
+          <a:effectLst/>
+        </p:spPr>
+        <p:style>
+          <a:lnRef idx="1">
+            <a:schemeClr val="accent1"/>
+          </a:lnRef>
+          <a:fillRef idx="3">
+            <a:schemeClr val="accent1"/>
+          </a:fillRef>
+          <a:effectRef idx="2">
+            <a:schemeClr val="accent1"/>
+          </a:effectRef>
+          <a:fontRef idx="minor">
+            <a:schemeClr val="lt1"/>
+          </a:fontRef>
+        </p:style>
+        <p:txBody>
+          <a:bodyPr rtlCol="0" anchor="ctr"/>
+          <a:lstStyle/>
+          <a:p>
+            <a:pPr algn="ctr"/>
+          </a:p>
+        </p:txBody>
+      </p:sp>
+      <p:sp>
+        <p:nvSpPr>
+          <p:cNvPr id="11" name="TextBox 10"/>
+          <p:cNvSpPr txBox="1"/>
+          <p:nvPr/>
+        </p:nvSpPr>
+        <p:spPr>
+          <a:xfrm>
+            <a:off x="502920" y="2852928"/>
+            <a:ext cx="512064" cy="512064"/>
+          </a:xfrm>
+          <a:prstGeom prst="rect">
+            <a:avLst/>
+          </a:prstGeom>
+          <a:noFill/>
+        </p:spPr>
+        <p:txBody>
+          <a:bodyPr wrap="square" anchor="ctr">
+            <a:spAutoFit/>
+          </a:bodyPr>
+          <a:lstStyle/>
+          <a:p>
+            <a:pPr algn="ctr">
+              <a:lnSpc>
+                <a:spcPct val="100000"/>
+              </a:lnSpc>
+            </a:pPr>
+            <a:r>
+              <a:rPr sz="2000" b="0">
+                <a:solidFill>
+                  <a:srgbClr val="0D9488"/>
+                </a:solidFill>
+                <a:latin typeface="Malgun Gothic"/>
+              </a:rPr>
+              <a:t>🏢</a:t>
+            </a:r>
+          </a:p>
+        </p:txBody>
+      </p:sp>
+      <p:sp>
+        <p:nvSpPr>
+          <p:cNvPr id="12" name="TextBox 11"/>
+          <p:cNvSpPr txBox="1"/>
+          <p:nvPr/>
+        </p:nvSpPr>
+        <p:spPr>
+          <a:xfrm>
+            <a:off x="1143000" y="2816352"/>
+            <a:ext cx="4609947" cy="365760"/>
+          </a:xfrm>
+          <a:prstGeom prst="rect">
+            <a:avLst/>
+          </a:prstGeom>
+          <a:noFill/>
+        </p:spPr>
+        <p:txBody>
+          <a:bodyPr wrap="square" anchor="t">
+            <a:spAutoFit/>
+          </a:bodyPr>
+          <a:lstStyle/>
+          <a:p>
+            <a:pPr algn="l">
+              <a:lnSpc>
+                <a:spcPct val="100000"/>
+              </a:lnSpc>
+            </a:pPr>
+            <a:r>
+              <a:rPr sz="1400" b="1">
+                <a:solidFill>
+                  <a:srgbClr val="1E2340"/>
+                </a:solidFill>
+                <a:latin typeface="Malgun Gothic"/>
+              </a:rPr>
+              <a:t>내 지사 범위 자동 적용</a:t>
+            </a:r>
+          </a:p>
+        </p:txBody>
+      </p:sp>
+      <p:sp>
+        <p:nvSpPr>
+          <p:cNvPr id="13" name="TextBox 12"/>
+          <p:cNvSpPr txBox="1"/>
+          <p:nvPr/>
+        </p:nvSpPr>
+        <p:spPr>
+          <a:xfrm>
+            <a:off x="1143000" y="3127248"/>
+            <a:ext cx="4609947" cy="365760"/>
+          </a:xfrm>
+          <a:prstGeom prst="rect">
+            <a:avLst/>
+          </a:prstGeom>
+          <a:noFill/>
+        </p:spPr>
+        <p:txBody>
+          <a:bodyPr wrap="square" anchor="t">
+            <a:spAutoFit/>
+          </a:bodyPr>
+          <a:lstStyle/>
+          <a:p>
+            <a:pPr algn="l">
+              <a:lnSpc>
+                <a:spcPct val="100000"/>
+              </a:lnSpc>
+            </a:pPr>
+            <a:r>
+              <a:rPr sz="1050" b="0">
+                <a:solidFill>
+                  <a:srgbClr val="64748B"/>
+                </a:solidFill>
+                <a:latin typeface="Malgun Gothic"/>
+              </a:rPr>
+              <a:t>로그인만 하면 우리 지사 데이터만 보여요.</a:t>
+            </a:r>
+          </a:p>
+        </p:txBody>
+      </p:sp>
+      <p:sp>
+        <p:nvSpPr>
+          <p:cNvPr id="14" name="Rounded Rectangle 13"/>
+          <p:cNvSpPr/>
+          <p:nvPr/>
+        </p:nvSpPr>
+        <p:spPr>
+          <a:xfrm>
+            <a:off x="6301587" y="2697480"/>
+            <a:ext cx="5524347" cy="822960"/>
+          </a:xfrm>
+          <a:prstGeom prst="roundRect">
+            <a:avLst/>
+          </a:prstGeom>
+          <a:solidFill>
+            <a:srgbClr val="FFFFFF"/>
+          </a:solidFill>
+          <a:ln w="12700">
+            <a:solidFill>
+              <a:srgbClr val="E2E8F0"/>
+            </a:solidFill>
+          </a:ln>
+          <a:effectLst/>
+        </p:spPr>
+        <p:style>
+          <a:lnRef idx="1">
+            <a:schemeClr val="accent1"/>
+          </a:lnRef>
+          <a:fillRef idx="3">
+            <a:schemeClr val="accent1"/>
+          </a:fillRef>
+          <a:effectRef idx="2">
+            <a:schemeClr val="accent1"/>
+          </a:effectRef>
+          <a:fontRef idx="minor">
+            <a:schemeClr val="lt1"/>
+          </a:fontRef>
+        </p:style>
+        <p:txBody>
+          <a:bodyPr rtlCol="0" anchor="ctr"/>
+          <a:lstStyle/>
+          <a:p>
+            <a:pPr algn="ctr"/>
+          </a:p>
+        </p:txBody>
+      </p:sp>
+      <p:sp>
+        <p:nvSpPr>
+          <p:cNvPr id="15" name="Rounded Rectangle 14"/>
+          <p:cNvSpPr/>
+          <p:nvPr/>
+        </p:nvSpPr>
+        <p:spPr>
+          <a:xfrm>
+            <a:off x="6438747" y="2852928"/>
+            <a:ext cx="512064" cy="512064"/>
+          </a:xfrm>
+          <a:prstGeom prst="roundRect">
+            <a:avLst/>
+          </a:prstGeom>
+          <a:solidFill>
+            <a:srgbClr val="CCFBF1"/>
+          </a:solidFill>
+          <a:ln>
+            <a:noFill/>
+          </a:ln>
+          <a:effectLst/>
+        </p:spPr>
+        <p:style>
+          <a:lnRef idx="1">
+            <a:schemeClr val="accent1"/>
+          </a:lnRef>
+          <a:fillRef idx="3">
+            <a:schemeClr val="accent1"/>
+          </a:fillRef>
+          <a:effectRef idx="2">
+            <a:schemeClr val="accent1"/>
+          </a:effectRef>
+          <a:fontRef idx="minor">
+            <a:schemeClr val="lt1"/>
+          </a:fontRef>
+        </p:style>
+        <p:txBody>
+          <a:bodyPr rtlCol="0" anchor="ctr"/>
+          <a:lstStyle/>
+          <a:p>
+            <a:pPr algn="ctr"/>
+          </a:p>
+        </p:txBody>
+      </p:sp>
+      <p:sp>
+        <p:nvSpPr>
+          <p:cNvPr id="16" name="TextBox 15"/>
+          <p:cNvSpPr txBox="1"/>
+          <p:nvPr/>
+        </p:nvSpPr>
+        <p:spPr>
+          <a:xfrm>
+            <a:off x="6438747" y="2852928"/>
+            <a:ext cx="512064" cy="512064"/>
+          </a:xfrm>
+          <a:prstGeom prst="rect">
+            <a:avLst/>
+          </a:prstGeom>
+          <a:noFill/>
+        </p:spPr>
+        <p:txBody>
+          <a:bodyPr wrap="square" anchor="ctr">
+            <a:spAutoFit/>
+          </a:bodyPr>
+          <a:lstStyle/>
+          <a:p>
+            <a:pPr algn="ctr">
+              <a:lnSpc>
+                <a:spcPct val="100000"/>
+              </a:lnSpc>
+            </a:pPr>
+            <a:r>
+              <a:rPr sz="2000" b="0">
+                <a:solidFill>
+                  <a:srgbClr val="0D9488"/>
+                </a:solidFill>
+                <a:latin typeface="Malgun Gothic"/>
+              </a:rPr>
+              <a:t>🏬</a:t>
+            </a:r>
+          </a:p>
+        </p:txBody>
+      </p:sp>
+      <p:sp>
+        <p:nvSpPr>
+          <p:cNvPr id="17" name="TextBox 16"/>
+          <p:cNvSpPr txBox="1"/>
+          <p:nvPr/>
+        </p:nvSpPr>
+        <p:spPr>
+          <a:xfrm>
+            <a:off x="7078827" y="2816352"/>
+            <a:ext cx="4609947" cy="365760"/>
+          </a:xfrm>
+          <a:prstGeom prst="rect">
+            <a:avLst/>
+          </a:prstGeom>
+          <a:noFill/>
+        </p:spPr>
+        <p:txBody>
+          <a:bodyPr wrap="square" anchor="t">
+            <a:spAutoFit/>
+          </a:bodyPr>
+          <a:lstStyle/>
+          <a:p>
+            <a:pPr algn="l">
+              <a:lnSpc>
+                <a:spcPct val="100000"/>
+              </a:lnSpc>
+            </a:pPr>
+            <a:r>
+              <a:rPr sz="1400" b="1">
+                <a:solidFill>
+                  <a:srgbClr val="1E2340"/>
+                </a:solidFill>
+                <a:latin typeface="Malgun Gothic"/>
+              </a:rPr>
+              <a:t>산하 대리점 관리</a:t>
+            </a:r>
+          </a:p>
+        </p:txBody>
+      </p:sp>
+      <p:sp>
+        <p:nvSpPr>
+          <p:cNvPr id="18" name="TextBox 17"/>
+          <p:cNvSpPr txBox="1"/>
+          <p:nvPr/>
+        </p:nvSpPr>
+        <p:spPr>
+          <a:xfrm>
+            <a:off x="7078827" y="3127248"/>
+            <a:ext cx="4609947" cy="365760"/>
+          </a:xfrm>
+          <a:prstGeom prst="rect">
+            <a:avLst/>
+          </a:prstGeom>
+          <a:noFill/>
+        </p:spPr>
+        <p:txBody>
+          <a:bodyPr wrap="square" anchor="t">
+            <a:spAutoFit/>
+          </a:bodyPr>
+          <a:lstStyle/>
+          <a:p>
+            <a:pPr algn="l">
+              <a:lnSpc>
+                <a:spcPct val="100000"/>
+              </a:lnSpc>
+            </a:pPr>
+            <a:r>
+              <a:rPr sz="1050" b="0">
+                <a:solidFill>
+                  <a:srgbClr val="64748B"/>
+                </a:solidFill>
+                <a:latin typeface="Malgun Gothic"/>
+              </a:rPr>
+              <a:t>대리점 목록·성과·모집을 한 곳에서.</a:t>
+            </a:r>
+          </a:p>
+        </p:txBody>
+      </p:sp>
+      <p:sp>
+        <p:nvSpPr>
+          <p:cNvPr id="19" name="Rounded Rectangle 18"/>
+          <p:cNvSpPr/>
+          <p:nvPr/>
+        </p:nvSpPr>
+        <p:spPr>
+          <a:xfrm>
+            <a:off x="365760" y="3657600"/>
+            <a:ext cx="5524347" cy="822960"/>
+          </a:xfrm>
+          <a:prstGeom prst="roundRect">
+            <a:avLst/>
+          </a:prstGeom>
+          <a:solidFill>
+            <a:srgbClr val="FFFFFF"/>
+          </a:solidFill>
+          <a:ln w="12700">
+            <a:solidFill>
+              <a:srgbClr val="E2E8F0"/>
+            </a:solidFill>
+          </a:ln>
+          <a:effectLst/>
+        </p:spPr>
+        <p:style>
+          <a:lnRef idx="1">
+            <a:schemeClr val="accent1"/>
+          </a:lnRef>
+          <a:fillRef idx="3">
+            <a:schemeClr val="accent1"/>
+          </a:fillRef>
+          <a:effectRef idx="2">
+            <a:schemeClr val="accent1"/>
+          </a:effectRef>
+          <a:fontRef idx="minor">
+            <a:schemeClr val="lt1"/>
+          </a:fontRef>
+        </p:style>
+        <p:txBody>
+          <a:bodyPr rtlCol="0" anchor="ctr"/>
+          <a:lstStyle/>
+          <a:p>
+            <a:pPr algn="ctr"/>
+          </a:p>
+        </p:txBody>
+      </p:sp>
+      <p:sp>
+        <p:nvSpPr>
+          <p:cNvPr id="20" name="Rounded Rectangle 19"/>
+          <p:cNvSpPr/>
+          <p:nvPr/>
+        </p:nvSpPr>
+        <p:spPr>
+          <a:xfrm>
+            <a:off x="502920" y="3813048"/>
+            <a:ext cx="512064" cy="512064"/>
+          </a:xfrm>
+          <a:prstGeom prst="roundRect">
+            <a:avLst/>
+          </a:prstGeom>
+          <a:solidFill>
+            <a:srgbClr val="CCFBF1"/>
+          </a:solidFill>
+          <a:ln>
+            <a:noFill/>
+          </a:ln>
+          <a:effectLst/>
+        </p:spPr>
+        <p:style>
+          <a:lnRef idx="1">
+            <a:schemeClr val="accent1"/>
+          </a:lnRef>
+          <a:fillRef idx="3">
+            <a:schemeClr val="accent1"/>
+          </a:fillRef>
+          <a:effectRef idx="2">
+            <a:schemeClr val="accent1"/>
+          </a:effectRef>
+          <a:fontRef idx="minor">
+            <a:schemeClr val="lt1"/>
+          </a:fontRef>
+        </p:style>
+        <p:txBody>
+          <a:bodyPr rtlCol="0" anchor="ctr"/>
+          <a:lstStyle/>
+          <a:p>
+            <a:pPr algn="ctr"/>
+          </a:p>
+        </p:txBody>
+      </p:sp>
+      <p:sp>
+        <p:nvSpPr>
+          <p:cNvPr id="21" name="TextBox 20"/>
+          <p:cNvSpPr txBox="1"/>
+          <p:nvPr/>
+        </p:nvSpPr>
+        <p:spPr>
+          <a:xfrm>
+            <a:off x="502920" y="3813048"/>
+            <a:ext cx="512064" cy="512064"/>
+          </a:xfrm>
+          <a:prstGeom prst="rect">
+            <a:avLst/>
+          </a:prstGeom>
+          <a:noFill/>
+        </p:spPr>
+        <p:txBody>
+          <a:bodyPr wrap="square" anchor="ctr">
+            <a:spAutoFit/>
+          </a:bodyPr>
+          <a:lstStyle/>
+          <a:p>
+            <a:pPr algn="ctr">
+              <a:lnSpc>
+                <a:spcPct val="100000"/>
+              </a:lnSpc>
+            </a:pPr>
+            <a:r>
+              <a:rPr sz="2000" b="0">
+                <a:solidFill>
+                  <a:srgbClr val="0D9488"/>
+                </a:solidFill>
+                <a:latin typeface="Malgun Gothic"/>
+              </a:rPr>
+              <a:t>🌳</a:t>
+            </a:r>
+          </a:p>
+        </p:txBody>
+      </p:sp>
+      <p:sp>
+        <p:nvSpPr>
+          <p:cNvPr id="22" name="TextBox 21"/>
+          <p:cNvSpPr txBox="1"/>
+          <p:nvPr/>
+        </p:nvSpPr>
+        <p:spPr>
+          <a:xfrm>
+            <a:off x="1143000" y="3776472"/>
+            <a:ext cx="4609947" cy="365760"/>
+          </a:xfrm>
+          <a:prstGeom prst="rect">
+            <a:avLst/>
+          </a:prstGeom>
+          <a:noFill/>
+        </p:spPr>
+        <p:txBody>
+          <a:bodyPr wrap="square" anchor="t">
+            <a:spAutoFit/>
+          </a:bodyPr>
+          <a:lstStyle/>
+          <a:p>
+            <a:pPr algn="l">
+              <a:lnSpc>
+                <a:spcPct val="100000"/>
+              </a:lnSpc>
+            </a:pPr>
+            <a:r>
+              <a:rPr sz="1400" b="1">
+                <a:solidFill>
+                  <a:srgbClr val="1E2340"/>
+                </a:solidFill>
+                <a:latin typeface="Malgun Gothic"/>
+              </a:rPr>
+              <a:t>본사→지사→대리점 정산</a:t>
+            </a:r>
+          </a:p>
+        </p:txBody>
+      </p:sp>
+      <p:sp>
+        <p:nvSpPr>
+          <p:cNvPr id="23" name="TextBox 22"/>
+          <p:cNvSpPr txBox="1"/>
+          <p:nvPr/>
+        </p:nvSpPr>
+        <p:spPr>
+          <a:xfrm>
+            <a:off x="1143000" y="4087368"/>
+            <a:ext cx="4609947" cy="365760"/>
+          </a:xfrm>
+          <a:prstGeom prst="rect">
+            <a:avLst/>
+          </a:prstGeom>
+          <a:noFill/>
+        </p:spPr>
+        <p:txBody>
+          <a:bodyPr wrap="square" anchor="t">
+            <a:spAutoFit/>
+          </a:bodyPr>
+          <a:lstStyle/>
+          <a:p>
+            <a:pPr algn="l">
+              <a:lnSpc>
+                <a:spcPct val="100000"/>
+              </a:lnSpc>
+            </a:pPr>
+            <a:r>
+              <a:rPr sz="1050" b="0">
+                <a:solidFill>
+                  <a:srgbClr val="64748B"/>
+                </a:solidFill>
+                <a:latin typeface="Malgun Gothic"/>
+              </a:rPr>
+              <a:t>수령·배분이 트리 구조로 자동 계산.</a:t>
+            </a:r>
+          </a:p>
+        </p:txBody>
+      </p:sp>
+      <p:sp>
+        <p:nvSpPr>
+          <p:cNvPr id="24" name="Rounded Rectangle 23"/>
+          <p:cNvSpPr/>
+          <p:nvPr/>
+        </p:nvSpPr>
+        <p:spPr>
+          <a:xfrm>
+            <a:off x="6301587" y="3657600"/>
+            <a:ext cx="5524347" cy="822960"/>
+          </a:xfrm>
+          <a:prstGeom prst="roundRect">
+            <a:avLst/>
+          </a:prstGeom>
+          <a:solidFill>
+            <a:srgbClr val="FFFFFF"/>
+          </a:solidFill>
+          <a:ln w="12700">
+            <a:solidFill>
+              <a:srgbClr val="E2E8F0"/>
+            </a:solidFill>
+          </a:ln>
+          <a:effectLst/>
+        </p:spPr>
+        <p:style>
+          <a:lnRef idx="1">
+            <a:schemeClr val="accent1"/>
+          </a:lnRef>
+          <a:fillRef idx="3">
+            <a:schemeClr val="accent1"/>
+          </a:fillRef>
+          <a:effectRef idx="2">
+            <a:schemeClr val="accent1"/>
+          </a:effectRef>
+          <a:fontRef idx="minor">
+            <a:schemeClr val="lt1"/>
+          </a:fontRef>
+        </p:style>
+        <p:txBody>
+          <a:bodyPr rtlCol="0" anchor="ctr"/>
+          <a:lstStyle/>
+          <a:p>
+            <a:pPr algn="ctr"/>
+          </a:p>
+        </p:txBody>
+      </p:sp>
+      <p:sp>
+        <p:nvSpPr>
+          <p:cNvPr id="25" name="Rounded Rectangle 24"/>
+          <p:cNvSpPr/>
+          <p:nvPr/>
+        </p:nvSpPr>
+        <p:spPr>
+          <a:xfrm>
+            <a:off x="6438747" y="3813048"/>
+            <a:ext cx="512064" cy="512064"/>
+          </a:xfrm>
+          <a:prstGeom prst="roundRect">
+            <a:avLst/>
+          </a:prstGeom>
+          <a:solidFill>
+            <a:srgbClr val="CCFBF1"/>
+          </a:solidFill>
+          <a:ln>
+            <a:noFill/>
+          </a:ln>
+          <a:effectLst/>
+        </p:spPr>
+        <p:style>
+          <a:lnRef idx="1">
+            <a:schemeClr val="accent1"/>
+          </a:lnRef>
+          <a:fillRef idx="3">
+            <a:schemeClr val="accent1"/>
+          </a:fillRef>
+          <a:effectRef idx="2">
+            <a:schemeClr val="accent1"/>
+          </a:effectRef>
+          <a:fontRef idx="minor">
+            <a:schemeClr val="lt1"/>
+          </a:fontRef>
+        </p:style>
+        <p:txBody>
+          <a:bodyPr rtlCol="0" anchor="ctr"/>
+          <a:lstStyle/>
+          <a:p>
+            <a:pPr algn="ctr"/>
+          </a:p>
+        </p:txBody>
+      </p:sp>
+      <p:sp>
+        <p:nvSpPr>
+          <p:cNvPr id="26" name="TextBox 25"/>
+          <p:cNvSpPr txBox="1"/>
+          <p:nvPr/>
+        </p:nvSpPr>
+        <p:spPr>
+          <a:xfrm>
+            <a:off x="6438747" y="3813048"/>
+            <a:ext cx="512064" cy="512064"/>
+          </a:xfrm>
+          <a:prstGeom prst="rect">
+            <a:avLst/>
+          </a:prstGeom>
+          <a:noFill/>
+        </p:spPr>
+        <p:txBody>
+          <a:bodyPr wrap="square" anchor="ctr">
+            <a:spAutoFit/>
+          </a:bodyPr>
+          <a:lstStyle/>
+          <a:p>
+            <a:pPr algn="ctr">
+              <a:lnSpc>
+                <a:spcPct val="100000"/>
+              </a:lnSpc>
+            </a:pPr>
+            <a:r>
+              <a:rPr sz="2000" b="0">
+                <a:solidFill>
+                  <a:srgbClr val="0D9488"/>
+                </a:solidFill>
+                <a:latin typeface="Malgun Gothic"/>
+              </a:rPr>
+              <a:t>📊</a:t>
+            </a:r>
+          </a:p>
+        </p:txBody>
+      </p:sp>
+      <p:sp>
+        <p:nvSpPr>
+          <p:cNvPr id="27" name="TextBox 26"/>
+          <p:cNvSpPr txBox="1"/>
+          <p:nvPr/>
+        </p:nvSpPr>
+        <p:spPr>
+          <a:xfrm>
+            <a:off x="7078827" y="3776472"/>
+            <a:ext cx="4609947" cy="365760"/>
+          </a:xfrm>
+          <a:prstGeom prst="rect">
+            <a:avLst/>
+          </a:prstGeom>
+          <a:noFill/>
+        </p:spPr>
+        <p:txBody>
+          <a:bodyPr wrap="square" anchor="t">
+            <a:spAutoFit/>
+          </a:bodyPr>
+          <a:lstStyle/>
+          <a:p>
+            <a:pPr algn="l">
+              <a:lnSpc>
+                <a:spcPct val="100000"/>
+              </a:lnSpc>
+            </a:pPr>
+            <a:r>
+              <a:rPr sz="1400" b="1">
+                <a:solidFill>
+                  <a:srgbClr val="1E2340"/>
+                </a:solidFill>
+                <a:latin typeface="Malgun Gothic"/>
+              </a:rPr>
+              <a:t>성과 리포트</a:t>
+            </a:r>
+          </a:p>
+        </p:txBody>
+      </p:sp>
+      <p:sp>
+        <p:nvSpPr>
+          <p:cNvPr id="28" name="TextBox 27"/>
+          <p:cNvSpPr txBox="1"/>
+          <p:nvPr/>
+        </p:nvSpPr>
+        <p:spPr>
+          <a:xfrm>
+            <a:off x="7078827" y="4087368"/>
+            <a:ext cx="4609947" cy="365760"/>
+          </a:xfrm>
+          <a:prstGeom prst="rect">
+            <a:avLst/>
+          </a:prstGeom>
+          <a:noFill/>
+        </p:spPr>
+        <p:txBody>
+          <a:bodyPr wrap="square" anchor="t">
+            <a:spAutoFit/>
+          </a:bodyPr>
+          <a:lstStyle/>
+          <a:p>
+            <a:pPr algn="l">
+              <a:lnSpc>
+                <a:spcPct val="100000"/>
+              </a:lnSpc>
+            </a:pPr>
+            <a:r>
+              <a:rPr sz="1050" b="0">
+                <a:solidFill>
+                  <a:srgbClr val="64748B"/>
+                </a:solidFill>
+                <a:latin typeface="Malgun Gothic"/>
+              </a:rPr>
+              <a:t>지사·대리점 성과를 월간 리포트로.</a:t>
+            </a:r>
+          </a:p>
+        </p:txBody>
+      </p:sp>
+      <p:sp>
+        <p:nvSpPr>
+          <p:cNvPr id="29" name="TextBox 28"/>
+          <p:cNvSpPr txBox="1"/>
+          <p:nvPr/>
+        </p:nvSpPr>
+        <p:spPr>
+          <a:xfrm>
+            <a:off x="365760" y="4754880"/>
+            <a:ext cx="5486400" cy="365760"/>
+          </a:xfrm>
+          <a:prstGeom prst="rect">
+            <a:avLst/>
+          </a:prstGeom>
+          <a:noFill/>
+        </p:spPr>
+        <p:txBody>
+          <a:bodyPr wrap="square" anchor="t">
+            <a:spAutoFit/>
+          </a:bodyPr>
+          <a:lstStyle/>
+          <a:p>
+            <a:pPr algn="l">
+              <a:lnSpc>
+                <a:spcPct val="100000"/>
+              </a:lnSpc>
+            </a:pPr>
+            <a:r>
+              <a:rPr sz="1300" b="1">
+                <a:solidFill>
+                  <a:srgbClr val="0D9488"/>
+                </a:solidFill>
+                <a:latin typeface="Malgun Gothic"/>
+              </a:rPr>
+              <a:t>우리 지사 지표(예시)</a:t>
+            </a:r>
+          </a:p>
+        </p:txBody>
+      </p:sp>
+      <p:graphicFrame>
+        <p:nvGraphicFramePr>
+          <p:cNvPr id="30" name="Chart 29"/>
+          <p:cNvGraphicFramePr>
+            <a:graphicFrameLocks noGrp="1"/>
+          </p:cNvGraphicFramePr>
+          <p:nvPr/>
+        </p:nvGraphicFramePr>
+        <p:xfrm>
+          <a:off x="365760" y="5074920"/>
+          <a:ext cx="5669280" cy="1554480"/>
+        </p:xfrm>
+        <a:graphic>
+          <a:graphicData uri="http://schemas.openxmlformats.org/drawingml/2006/chart">
+            <c:chart xmlns:c="http://schemas.openxmlformats.org/drawingml/2006/chart" r:id="rId2"/>
+          </a:graphicData>
+        </a:graphic>
+      </p:graphicFrame>
+      <p:sp>
+        <p:nvSpPr>
+          <p:cNvPr id="31" name="Rectangle 30"/>
+          <p:cNvSpPr/>
+          <p:nvPr/>
+        </p:nvSpPr>
+        <p:spPr>
+          <a:xfrm>
+            <a:off x="7470648" y="4654296"/>
+            <a:ext cx="3255264" cy="2075688"/>
+          </a:xfrm>
+          <a:prstGeom prst="rect">
+            <a:avLst/>
+          </a:prstGeom>
+          <a:solidFill>
+            <a:srgbClr val="FFFFFF"/>
+          </a:solidFill>
+          <a:ln w="12700">
+            <a:solidFill>
+              <a:srgbClr val="E2E8F0"/>
+            </a:solidFill>
+          </a:ln>
+          <a:effectLst/>
+        </p:spPr>
+        <p:style>
+          <a:lnRef idx="1">
+            <a:schemeClr val="accent1"/>
+          </a:lnRef>
+          <a:fillRef idx="3">
+            <a:schemeClr val="accent1"/>
+          </a:fillRef>
+          <a:effectRef idx="2">
+            <a:schemeClr val="accent1"/>
+          </a:effectRef>
+          <a:fontRef idx="minor">
+            <a:schemeClr val="lt1"/>
+          </a:fontRef>
+        </p:style>
+        <p:txBody>
+          <a:bodyPr rtlCol="0" anchor="ctr"/>
+          <a:lstStyle/>
+          <a:p>
+            <a:pPr algn="ctr"/>
+          </a:p>
+        </p:txBody>
+      </p:sp>
+      <p:pic>
+        <p:nvPicPr>
+          <p:cNvPr id="32" name="Picture 31" descr="admin_login.jpg"/>
+          <p:cNvPicPr>
+            <a:picLocks noChangeAspect="1"/>
+          </p:cNvPicPr>
+          <p:nvPr/>
+        </p:nvPicPr>
+        <p:blipFill>
+          <a:blip r:embed="rId3"/>
+          <a:stretch>
+            <a:fillRect/>
+          </a:stretch>
+        </p:blipFill>
+        <p:spPr>
+          <a:xfrm>
+            <a:off x="7525512" y="4709160"/>
+            <a:ext cx="3145536" cy="1965960"/>
+          </a:xfrm>
+          <a:prstGeom prst="rect">
+            <a:avLst/>
+          </a:prstGeom>
+        </p:spPr>
+      </p:pic>
+    </p:spTree>
+  </p:cSld>
+  <p:clrMapOvr>
+    <a:masterClrMapping/>
+  </p:clrMapOvr>
+</p:sld>
+</file>
+
+<file path=ppt/slides/slide20.xml><?xml version="1.0" encoding="utf-8"?>
 <p:sld xmlns:a="http://schemas.openxmlformats.org/drawingml/2006/main" xmlns:p="http://schemas.openxmlformats.org/presentationml/2006/main" xmlns:r="http://schemas.openxmlformats.org/officeDocument/2006/relationships">
   <p:cSld>
     <p:bg>
@@ -12477,7 +15832,7 @@
 </p:sld>
 </file>
 
-<file path=ppt/slides/slide19.xml><?xml version="1.0" encoding="utf-8"?>
+<file path=ppt/slides/slide21.xml><?xml version="1.0" encoding="utf-8"?>
 <p:sld xmlns:a="http://schemas.openxmlformats.org/drawingml/2006/main" xmlns:p="http://schemas.openxmlformats.org/presentationml/2006/main" xmlns:r="http://schemas.openxmlformats.org/officeDocument/2006/relationships">
   <p:cSld>
     <p:bg>
@@ -12814,2976 +16169,6 @@
           </a:graphicData>
         </a:graphic>
       </p:graphicFrame>
-    </p:spTree>
-  </p:cSld>
-  <p:clrMapOvr>
-    <a:masterClrMapping/>
-  </p:clrMapOvr>
-</p:sld>
-</file>
-
-<file path=ppt/slides/slide2.xml><?xml version="1.0" encoding="utf-8"?>
-<p:sld xmlns:a="http://schemas.openxmlformats.org/drawingml/2006/main" xmlns:p="http://schemas.openxmlformats.org/presentationml/2006/main" xmlns:r="http://schemas.openxmlformats.org/officeDocument/2006/relationships">
-  <p:cSld>
-    <p:bg>
-      <p:bgPr>
-        <a:solidFill>
-          <a:srgbClr val="FFFFFF"/>
-        </a:solidFill>
-        <a:effectLst/>
-      </p:bgPr>
-    </p:bg>
-    <p:spTree>
-      <p:nvGrpSpPr>
-        <p:cNvPr id="1" name=""/>
-        <p:cNvGrpSpPr/>
-        <p:nvPr/>
-      </p:nvGrpSpPr>
-      <p:grpSpPr/>
-      <p:sp>
-        <p:nvSpPr>
-          <p:cNvPr id="2" name="Rectangle 1"/>
-          <p:cNvSpPr/>
-          <p:nvPr/>
-        </p:nvSpPr>
-        <p:spPr>
-          <a:xfrm>
-            <a:off x="0" y="0"/>
-            <a:ext cx="12191695" cy="566928"/>
-          </a:xfrm>
-          <a:prstGeom prst="rect">
-            <a:avLst/>
-          </a:prstGeom>
-          <a:solidFill>
-            <a:srgbClr val="0D9488"/>
-          </a:solidFill>
-          <a:ln>
-            <a:noFill/>
-          </a:ln>
-          <a:effectLst/>
-        </p:spPr>
-        <p:style>
-          <a:lnRef idx="1">
-            <a:schemeClr val="accent1"/>
-          </a:lnRef>
-          <a:fillRef idx="3">
-            <a:schemeClr val="accent1"/>
-          </a:fillRef>
-          <a:effectRef idx="2">
-            <a:schemeClr val="accent1"/>
-          </a:effectRef>
-          <a:fontRef idx="minor">
-            <a:schemeClr val="lt1"/>
-          </a:fontRef>
-        </p:style>
-        <p:txBody>
-          <a:bodyPr rtlCol="0" anchor="ctr"/>
-          <a:lstStyle/>
-          <a:p>
-            <a:pPr algn="ctr"/>
-          </a:p>
-        </p:txBody>
-      </p:sp>
-      <p:sp>
-        <p:nvSpPr>
-          <p:cNvPr id="3" name="Rectangle 2"/>
-          <p:cNvSpPr/>
-          <p:nvPr/>
-        </p:nvSpPr>
-        <p:spPr>
-          <a:xfrm>
-            <a:off x="0" y="566928"/>
-            <a:ext cx="12191695" cy="54864"/>
-          </a:xfrm>
-          <a:prstGeom prst="rect">
-            <a:avLst/>
-          </a:prstGeom>
-          <a:solidFill>
-            <a:srgbClr val="F59E0B"/>
-          </a:solidFill>
-          <a:ln>
-            <a:noFill/>
-          </a:ln>
-          <a:effectLst/>
-        </p:spPr>
-        <p:style>
-          <a:lnRef idx="1">
-            <a:schemeClr val="accent1"/>
-          </a:lnRef>
-          <a:fillRef idx="3">
-            <a:schemeClr val="accent1"/>
-          </a:fillRef>
-          <a:effectRef idx="2">
-            <a:schemeClr val="accent1"/>
-          </a:effectRef>
-          <a:fontRef idx="minor">
-            <a:schemeClr val="lt1"/>
-          </a:fontRef>
-        </p:style>
-        <p:txBody>
-          <a:bodyPr rtlCol="0" anchor="ctr"/>
-          <a:lstStyle/>
-          <a:p>
-            <a:pPr algn="ctr"/>
-          </a:p>
-        </p:txBody>
-      </p:sp>
-      <p:sp>
-        <p:nvSpPr>
-          <p:cNvPr id="4" name="TextBox 3"/>
-          <p:cNvSpPr txBox="1"/>
-          <p:nvPr/>
-        </p:nvSpPr>
-        <p:spPr>
-          <a:xfrm>
-            <a:off x="365760" y="27432"/>
-            <a:ext cx="7315200" cy="502920"/>
-          </a:xfrm>
-          <a:prstGeom prst="rect">
-            <a:avLst/>
-          </a:prstGeom>
-          <a:noFill/>
-        </p:spPr>
-        <p:txBody>
-          <a:bodyPr wrap="square" anchor="ctr">
-            <a:spAutoFit/>
-          </a:bodyPr>
-          <a:lstStyle/>
-          <a:p>
-            <a:pPr algn="l">
-              <a:lnSpc>
-                <a:spcPct val="100000"/>
-              </a:lnSpc>
-            </a:pPr>
-            <a:r>
-              <a:rPr sz="1500" b="1">
-                <a:solidFill>
-                  <a:srgbClr val="FFFFFF"/>
-                </a:solidFill>
-                <a:latin typeface="Malgun Gothic"/>
-              </a:rPr>
-              <a:t>🏢 망고아이 지사용 사용설명서</a:t>
-            </a:r>
-          </a:p>
-        </p:txBody>
-      </p:sp>
-      <p:sp>
-        <p:nvSpPr>
-          <p:cNvPr id="5" name="TextBox 4"/>
-          <p:cNvSpPr txBox="1"/>
-          <p:nvPr/>
-        </p:nvSpPr>
-        <p:spPr>
-          <a:xfrm>
-            <a:off x="8168335" y="27432"/>
-            <a:ext cx="3657600" cy="502920"/>
-          </a:xfrm>
-          <a:prstGeom prst="rect">
-            <a:avLst/>
-          </a:prstGeom>
-          <a:noFill/>
-        </p:spPr>
-        <p:txBody>
-          <a:bodyPr wrap="square" anchor="ctr">
-            <a:spAutoFit/>
-          </a:bodyPr>
-          <a:lstStyle/>
-          <a:p>
-            <a:pPr algn="r">
-              <a:lnSpc>
-                <a:spcPct val="100000"/>
-              </a:lnSpc>
-            </a:pPr>
-            <a:r>
-              <a:rPr sz="1300" b="1">
-                <a:solidFill>
-                  <a:srgbClr val="F1F5F9"/>
-                </a:solidFill>
-                <a:latin typeface="Malgun Gothic"/>
-              </a:rPr>
-              <a:t>소개</a:t>
-            </a:r>
-          </a:p>
-        </p:txBody>
-      </p:sp>
-      <p:sp>
-        <p:nvSpPr>
-          <p:cNvPr id="6" name="Rounded Rectangle 5"/>
-          <p:cNvSpPr/>
-          <p:nvPr/>
-        </p:nvSpPr>
-        <p:spPr>
-          <a:xfrm>
-            <a:off x="365760" y="868680"/>
-            <a:ext cx="11460175" cy="1554480"/>
-          </a:xfrm>
-          <a:prstGeom prst="roundRect">
-            <a:avLst/>
-          </a:prstGeom>
-          <a:solidFill>
-            <a:srgbClr val="ECFDF5"/>
-          </a:solidFill>
-          <a:ln>
-            <a:noFill/>
-          </a:ln>
-          <a:effectLst/>
-        </p:spPr>
-        <p:style>
-          <a:lnRef idx="1">
-            <a:schemeClr val="accent1"/>
-          </a:lnRef>
-          <a:fillRef idx="3">
-            <a:schemeClr val="accent1"/>
-          </a:fillRef>
-          <a:effectRef idx="2">
-            <a:schemeClr val="accent1"/>
-          </a:effectRef>
-          <a:fontRef idx="minor">
-            <a:schemeClr val="lt1"/>
-          </a:fontRef>
-        </p:style>
-        <p:txBody>
-          <a:bodyPr rtlCol="0" anchor="ctr"/>
-          <a:lstStyle/>
-          <a:p>
-            <a:pPr algn="ctr"/>
-          </a:p>
-        </p:txBody>
-      </p:sp>
-      <p:sp>
-        <p:nvSpPr>
-          <p:cNvPr id="7" name="TextBox 6"/>
-          <p:cNvSpPr txBox="1"/>
-          <p:nvPr/>
-        </p:nvSpPr>
-        <p:spPr>
-          <a:xfrm>
-            <a:off x="640080" y="1005840"/>
-            <a:ext cx="10881360" cy="457200"/>
-          </a:xfrm>
-          <a:prstGeom prst="rect">
-            <a:avLst/>
-          </a:prstGeom>
-          <a:noFill/>
-        </p:spPr>
-        <p:txBody>
-          <a:bodyPr wrap="square" anchor="t">
-            <a:spAutoFit/>
-          </a:bodyPr>
-          <a:lstStyle/>
-          <a:p>
-            <a:pPr algn="l">
-              <a:lnSpc>
-                <a:spcPct val="100000"/>
-              </a:lnSpc>
-            </a:pPr>
-            <a:r>
-              <a:rPr sz="2400" b="1">
-                <a:solidFill>
-                  <a:srgbClr val="0D9488"/>
-                </a:solidFill>
-                <a:latin typeface="Malgun Gothic"/>
-              </a:rPr>
-              <a:t>지사 관리 페이지란?</a:t>
-            </a:r>
-          </a:p>
-        </p:txBody>
-      </p:sp>
-      <p:sp>
-        <p:nvSpPr>
-          <p:cNvPr id="8" name="TextBox 7"/>
-          <p:cNvSpPr txBox="1"/>
-          <p:nvPr/>
-        </p:nvSpPr>
-        <p:spPr>
-          <a:xfrm>
-            <a:off x="640080" y="1481328"/>
-            <a:ext cx="10972800" cy="914400"/>
-          </a:xfrm>
-          <a:prstGeom prst="rect">
-            <a:avLst/>
-          </a:prstGeom>
-          <a:noFill/>
-        </p:spPr>
-        <p:txBody>
-          <a:bodyPr wrap="square" anchor="t">
-            <a:spAutoFit/>
-          </a:bodyPr>
-          <a:lstStyle/>
-          <a:p>
-            <a:pPr algn="l">
-              <a:lnSpc>
-                <a:spcPct val="125000"/>
-              </a:lnSpc>
-            </a:pPr>
-            <a:r>
-              <a:rPr sz="1300" b="0">
-                <a:solidFill>
-                  <a:srgbClr val="334155"/>
-                </a:solidFill>
-                <a:latin typeface="Malgun Gothic"/>
-              </a:rPr>
-              <a:t>지사 페이지는 본사에서 위임받은 권한으로 우리 지사와 산하 대리점을 관리하는 곳이에요. 로그인하면 ‘내 지사’ 범위의 데이터(매출·재원생·출석·정산)만 자동으로 보이고, 산하 대리점의 성과를 한눈에 확인하며 본사↔지사↔대리점으로 이어지는 정산을 처리해요. 화면 구성은 관리자 페이지와 같고, 보이는 범위만 달라요.</a:t>
-            </a:r>
-          </a:p>
-        </p:txBody>
-      </p:sp>
-      <p:sp>
-        <p:nvSpPr>
-          <p:cNvPr id="9" name="Rounded Rectangle 8"/>
-          <p:cNvSpPr/>
-          <p:nvPr/>
-        </p:nvSpPr>
-        <p:spPr>
-          <a:xfrm>
-            <a:off x="365760" y="2697480"/>
-            <a:ext cx="5524347" cy="822960"/>
-          </a:xfrm>
-          <a:prstGeom prst="roundRect">
-            <a:avLst/>
-          </a:prstGeom>
-          <a:solidFill>
-            <a:srgbClr val="FFFFFF"/>
-          </a:solidFill>
-          <a:ln w="12700">
-            <a:solidFill>
-              <a:srgbClr val="E2E8F0"/>
-            </a:solidFill>
-          </a:ln>
-          <a:effectLst/>
-        </p:spPr>
-        <p:style>
-          <a:lnRef idx="1">
-            <a:schemeClr val="accent1"/>
-          </a:lnRef>
-          <a:fillRef idx="3">
-            <a:schemeClr val="accent1"/>
-          </a:fillRef>
-          <a:effectRef idx="2">
-            <a:schemeClr val="accent1"/>
-          </a:effectRef>
-          <a:fontRef idx="minor">
-            <a:schemeClr val="lt1"/>
-          </a:fontRef>
-        </p:style>
-        <p:txBody>
-          <a:bodyPr rtlCol="0" anchor="ctr"/>
-          <a:lstStyle/>
-          <a:p>
-            <a:pPr algn="ctr"/>
-          </a:p>
-        </p:txBody>
-      </p:sp>
-      <p:sp>
-        <p:nvSpPr>
-          <p:cNvPr id="10" name="Rounded Rectangle 9"/>
-          <p:cNvSpPr/>
-          <p:nvPr/>
-        </p:nvSpPr>
-        <p:spPr>
-          <a:xfrm>
-            <a:off x="502920" y="2852928"/>
-            <a:ext cx="512064" cy="512064"/>
-          </a:xfrm>
-          <a:prstGeom prst="roundRect">
-            <a:avLst/>
-          </a:prstGeom>
-          <a:solidFill>
-            <a:srgbClr val="CCFBF1"/>
-          </a:solidFill>
-          <a:ln>
-            <a:noFill/>
-          </a:ln>
-          <a:effectLst/>
-        </p:spPr>
-        <p:style>
-          <a:lnRef idx="1">
-            <a:schemeClr val="accent1"/>
-          </a:lnRef>
-          <a:fillRef idx="3">
-            <a:schemeClr val="accent1"/>
-          </a:fillRef>
-          <a:effectRef idx="2">
-            <a:schemeClr val="accent1"/>
-          </a:effectRef>
-          <a:fontRef idx="minor">
-            <a:schemeClr val="lt1"/>
-          </a:fontRef>
-        </p:style>
-        <p:txBody>
-          <a:bodyPr rtlCol="0" anchor="ctr"/>
-          <a:lstStyle/>
-          <a:p>
-            <a:pPr algn="ctr"/>
-          </a:p>
-        </p:txBody>
-      </p:sp>
-      <p:sp>
-        <p:nvSpPr>
-          <p:cNvPr id="11" name="TextBox 10"/>
-          <p:cNvSpPr txBox="1"/>
-          <p:nvPr/>
-        </p:nvSpPr>
-        <p:spPr>
-          <a:xfrm>
-            <a:off x="502920" y="2852928"/>
-            <a:ext cx="512064" cy="512064"/>
-          </a:xfrm>
-          <a:prstGeom prst="rect">
-            <a:avLst/>
-          </a:prstGeom>
-          <a:noFill/>
-        </p:spPr>
-        <p:txBody>
-          <a:bodyPr wrap="square" anchor="ctr">
-            <a:spAutoFit/>
-          </a:bodyPr>
-          <a:lstStyle/>
-          <a:p>
-            <a:pPr algn="ctr">
-              <a:lnSpc>
-                <a:spcPct val="100000"/>
-              </a:lnSpc>
-            </a:pPr>
-            <a:r>
-              <a:rPr sz="2000" b="0">
-                <a:solidFill>
-                  <a:srgbClr val="0D9488"/>
-                </a:solidFill>
-                <a:latin typeface="Malgun Gothic"/>
-              </a:rPr>
-              <a:t>🏢</a:t>
-            </a:r>
-          </a:p>
-        </p:txBody>
-      </p:sp>
-      <p:sp>
-        <p:nvSpPr>
-          <p:cNvPr id="12" name="TextBox 11"/>
-          <p:cNvSpPr txBox="1"/>
-          <p:nvPr/>
-        </p:nvSpPr>
-        <p:spPr>
-          <a:xfrm>
-            <a:off x="1143000" y="2816352"/>
-            <a:ext cx="4609947" cy="365760"/>
-          </a:xfrm>
-          <a:prstGeom prst="rect">
-            <a:avLst/>
-          </a:prstGeom>
-          <a:noFill/>
-        </p:spPr>
-        <p:txBody>
-          <a:bodyPr wrap="square" anchor="t">
-            <a:spAutoFit/>
-          </a:bodyPr>
-          <a:lstStyle/>
-          <a:p>
-            <a:pPr algn="l">
-              <a:lnSpc>
-                <a:spcPct val="100000"/>
-              </a:lnSpc>
-            </a:pPr>
-            <a:r>
-              <a:rPr sz="1400" b="1">
-                <a:solidFill>
-                  <a:srgbClr val="1E2340"/>
-                </a:solidFill>
-                <a:latin typeface="Malgun Gothic"/>
-              </a:rPr>
-              <a:t>내 지사 범위 자동 적용</a:t>
-            </a:r>
-          </a:p>
-        </p:txBody>
-      </p:sp>
-      <p:sp>
-        <p:nvSpPr>
-          <p:cNvPr id="13" name="TextBox 12"/>
-          <p:cNvSpPr txBox="1"/>
-          <p:nvPr/>
-        </p:nvSpPr>
-        <p:spPr>
-          <a:xfrm>
-            <a:off x="1143000" y="3127248"/>
-            <a:ext cx="4609947" cy="365760"/>
-          </a:xfrm>
-          <a:prstGeom prst="rect">
-            <a:avLst/>
-          </a:prstGeom>
-          <a:noFill/>
-        </p:spPr>
-        <p:txBody>
-          <a:bodyPr wrap="square" anchor="t">
-            <a:spAutoFit/>
-          </a:bodyPr>
-          <a:lstStyle/>
-          <a:p>
-            <a:pPr algn="l">
-              <a:lnSpc>
-                <a:spcPct val="100000"/>
-              </a:lnSpc>
-            </a:pPr>
-            <a:r>
-              <a:rPr sz="1050" b="0">
-                <a:solidFill>
-                  <a:srgbClr val="64748B"/>
-                </a:solidFill>
-                <a:latin typeface="Malgun Gothic"/>
-              </a:rPr>
-              <a:t>로그인만 하면 우리 지사 데이터만 보여요.</a:t>
-            </a:r>
-          </a:p>
-        </p:txBody>
-      </p:sp>
-      <p:sp>
-        <p:nvSpPr>
-          <p:cNvPr id="14" name="Rounded Rectangle 13"/>
-          <p:cNvSpPr/>
-          <p:nvPr/>
-        </p:nvSpPr>
-        <p:spPr>
-          <a:xfrm>
-            <a:off x="6301587" y="2697480"/>
-            <a:ext cx="5524347" cy="822960"/>
-          </a:xfrm>
-          <a:prstGeom prst="roundRect">
-            <a:avLst/>
-          </a:prstGeom>
-          <a:solidFill>
-            <a:srgbClr val="FFFFFF"/>
-          </a:solidFill>
-          <a:ln w="12700">
-            <a:solidFill>
-              <a:srgbClr val="E2E8F0"/>
-            </a:solidFill>
-          </a:ln>
-          <a:effectLst/>
-        </p:spPr>
-        <p:style>
-          <a:lnRef idx="1">
-            <a:schemeClr val="accent1"/>
-          </a:lnRef>
-          <a:fillRef idx="3">
-            <a:schemeClr val="accent1"/>
-          </a:fillRef>
-          <a:effectRef idx="2">
-            <a:schemeClr val="accent1"/>
-          </a:effectRef>
-          <a:fontRef idx="minor">
-            <a:schemeClr val="lt1"/>
-          </a:fontRef>
-        </p:style>
-        <p:txBody>
-          <a:bodyPr rtlCol="0" anchor="ctr"/>
-          <a:lstStyle/>
-          <a:p>
-            <a:pPr algn="ctr"/>
-          </a:p>
-        </p:txBody>
-      </p:sp>
-      <p:sp>
-        <p:nvSpPr>
-          <p:cNvPr id="15" name="Rounded Rectangle 14"/>
-          <p:cNvSpPr/>
-          <p:nvPr/>
-        </p:nvSpPr>
-        <p:spPr>
-          <a:xfrm>
-            <a:off x="6438747" y="2852928"/>
-            <a:ext cx="512064" cy="512064"/>
-          </a:xfrm>
-          <a:prstGeom prst="roundRect">
-            <a:avLst/>
-          </a:prstGeom>
-          <a:solidFill>
-            <a:srgbClr val="CCFBF1"/>
-          </a:solidFill>
-          <a:ln>
-            <a:noFill/>
-          </a:ln>
-          <a:effectLst/>
-        </p:spPr>
-        <p:style>
-          <a:lnRef idx="1">
-            <a:schemeClr val="accent1"/>
-          </a:lnRef>
-          <a:fillRef idx="3">
-            <a:schemeClr val="accent1"/>
-          </a:fillRef>
-          <a:effectRef idx="2">
-            <a:schemeClr val="accent1"/>
-          </a:effectRef>
-          <a:fontRef idx="minor">
-            <a:schemeClr val="lt1"/>
-          </a:fontRef>
-        </p:style>
-        <p:txBody>
-          <a:bodyPr rtlCol="0" anchor="ctr"/>
-          <a:lstStyle/>
-          <a:p>
-            <a:pPr algn="ctr"/>
-          </a:p>
-        </p:txBody>
-      </p:sp>
-      <p:sp>
-        <p:nvSpPr>
-          <p:cNvPr id="16" name="TextBox 15"/>
-          <p:cNvSpPr txBox="1"/>
-          <p:nvPr/>
-        </p:nvSpPr>
-        <p:spPr>
-          <a:xfrm>
-            <a:off x="6438747" y="2852928"/>
-            <a:ext cx="512064" cy="512064"/>
-          </a:xfrm>
-          <a:prstGeom prst="rect">
-            <a:avLst/>
-          </a:prstGeom>
-          <a:noFill/>
-        </p:spPr>
-        <p:txBody>
-          <a:bodyPr wrap="square" anchor="ctr">
-            <a:spAutoFit/>
-          </a:bodyPr>
-          <a:lstStyle/>
-          <a:p>
-            <a:pPr algn="ctr">
-              <a:lnSpc>
-                <a:spcPct val="100000"/>
-              </a:lnSpc>
-            </a:pPr>
-            <a:r>
-              <a:rPr sz="2000" b="0">
-                <a:solidFill>
-                  <a:srgbClr val="0D9488"/>
-                </a:solidFill>
-                <a:latin typeface="Malgun Gothic"/>
-              </a:rPr>
-              <a:t>🏬</a:t>
-            </a:r>
-          </a:p>
-        </p:txBody>
-      </p:sp>
-      <p:sp>
-        <p:nvSpPr>
-          <p:cNvPr id="17" name="TextBox 16"/>
-          <p:cNvSpPr txBox="1"/>
-          <p:nvPr/>
-        </p:nvSpPr>
-        <p:spPr>
-          <a:xfrm>
-            <a:off x="7078827" y="2816352"/>
-            <a:ext cx="4609947" cy="365760"/>
-          </a:xfrm>
-          <a:prstGeom prst="rect">
-            <a:avLst/>
-          </a:prstGeom>
-          <a:noFill/>
-        </p:spPr>
-        <p:txBody>
-          <a:bodyPr wrap="square" anchor="t">
-            <a:spAutoFit/>
-          </a:bodyPr>
-          <a:lstStyle/>
-          <a:p>
-            <a:pPr algn="l">
-              <a:lnSpc>
-                <a:spcPct val="100000"/>
-              </a:lnSpc>
-            </a:pPr>
-            <a:r>
-              <a:rPr sz="1400" b="1">
-                <a:solidFill>
-                  <a:srgbClr val="1E2340"/>
-                </a:solidFill>
-                <a:latin typeface="Malgun Gothic"/>
-              </a:rPr>
-              <a:t>산하 대리점 관리</a:t>
-            </a:r>
-          </a:p>
-        </p:txBody>
-      </p:sp>
-      <p:sp>
-        <p:nvSpPr>
-          <p:cNvPr id="18" name="TextBox 17"/>
-          <p:cNvSpPr txBox="1"/>
-          <p:nvPr/>
-        </p:nvSpPr>
-        <p:spPr>
-          <a:xfrm>
-            <a:off x="7078827" y="3127248"/>
-            <a:ext cx="4609947" cy="365760"/>
-          </a:xfrm>
-          <a:prstGeom prst="rect">
-            <a:avLst/>
-          </a:prstGeom>
-          <a:noFill/>
-        </p:spPr>
-        <p:txBody>
-          <a:bodyPr wrap="square" anchor="t">
-            <a:spAutoFit/>
-          </a:bodyPr>
-          <a:lstStyle/>
-          <a:p>
-            <a:pPr algn="l">
-              <a:lnSpc>
-                <a:spcPct val="100000"/>
-              </a:lnSpc>
-            </a:pPr>
-            <a:r>
-              <a:rPr sz="1050" b="0">
-                <a:solidFill>
-                  <a:srgbClr val="64748B"/>
-                </a:solidFill>
-                <a:latin typeface="Malgun Gothic"/>
-              </a:rPr>
-              <a:t>대리점 목록·성과·모집을 한 곳에서.</a:t>
-            </a:r>
-          </a:p>
-        </p:txBody>
-      </p:sp>
-      <p:sp>
-        <p:nvSpPr>
-          <p:cNvPr id="19" name="Rounded Rectangle 18"/>
-          <p:cNvSpPr/>
-          <p:nvPr/>
-        </p:nvSpPr>
-        <p:spPr>
-          <a:xfrm>
-            <a:off x="365760" y="3657600"/>
-            <a:ext cx="5524347" cy="822960"/>
-          </a:xfrm>
-          <a:prstGeom prst="roundRect">
-            <a:avLst/>
-          </a:prstGeom>
-          <a:solidFill>
-            <a:srgbClr val="FFFFFF"/>
-          </a:solidFill>
-          <a:ln w="12700">
-            <a:solidFill>
-              <a:srgbClr val="E2E8F0"/>
-            </a:solidFill>
-          </a:ln>
-          <a:effectLst/>
-        </p:spPr>
-        <p:style>
-          <a:lnRef idx="1">
-            <a:schemeClr val="accent1"/>
-          </a:lnRef>
-          <a:fillRef idx="3">
-            <a:schemeClr val="accent1"/>
-          </a:fillRef>
-          <a:effectRef idx="2">
-            <a:schemeClr val="accent1"/>
-          </a:effectRef>
-          <a:fontRef idx="minor">
-            <a:schemeClr val="lt1"/>
-          </a:fontRef>
-        </p:style>
-        <p:txBody>
-          <a:bodyPr rtlCol="0" anchor="ctr"/>
-          <a:lstStyle/>
-          <a:p>
-            <a:pPr algn="ctr"/>
-          </a:p>
-        </p:txBody>
-      </p:sp>
-      <p:sp>
-        <p:nvSpPr>
-          <p:cNvPr id="20" name="Rounded Rectangle 19"/>
-          <p:cNvSpPr/>
-          <p:nvPr/>
-        </p:nvSpPr>
-        <p:spPr>
-          <a:xfrm>
-            <a:off x="502920" y="3813048"/>
-            <a:ext cx="512064" cy="512064"/>
-          </a:xfrm>
-          <a:prstGeom prst="roundRect">
-            <a:avLst/>
-          </a:prstGeom>
-          <a:solidFill>
-            <a:srgbClr val="CCFBF1"/>
-          </a:solidFill>
-          <a:ln>
-            <a:noFill/>
-          </a:ln>
-          <a:effectLst/>
-        </p:spPr>
-        <p:style>
-          <a:lnRef idx="1">
-            <a:schemeClr val="accent1"/>
-          </a:lnRef>
-          <a:fillRef idx="3">
-            <a:schemeClr val="accent1"/>
-          </a:fillRef>
-          <a:effectRef idx="2">
-            <a:schemeClr val="accent1"/>
-          </a:effectRef>
-          <a:fontRef idx="minor">
-            <a:schemeClr val="lt1"/>
-          </a:fontRef>
-        </p:style>
-        <p:txBody>
-          <a:bodyPr rtlCol="0" anchor="ctr"/>
-          <a:lstStyle/>
-          <a:p>
-            <a:pPr algn="ctr"/>
-          </a:p>
-        </p:txBody>
-      </p:sp>
-      <p:sp>
-        <p:nvSpPr>
-          <p:cNvPr id="21" name="TextBox 20"/>
-          <p:cNvSpPr txBox="1"/>
-          <p:nvPr/>
-        </p:nvSpPr>
-        <p:spPr>
-          <a:xfrm>
-            <a:off x="502920" y="3813048"/>
-            <a:ext cx="512064" cy="512064"/>
-          </a:xfrm>
-          <a:prstGeom prst="rect">
-            <a:avLst/>
-          </a:prstGeom>
-          <a:noFill/>
-        </p:spPr>
-        <p:txBody>
-          <a:bodyPr wrap="square" anchor="ctr">
-            <a:spAutoFit/>
-          </a:bodyPr>
-          <a:lstStyle/>
-          <a:p>
-            <a:pPr algn="ctr">
-              <a:lnSpc>
-                <a:spcPct val="100000"/>
-              </a:lnSpc>
-            </a:pPr>
-            <a:r>
-              <a:rPr sz="2000" b="0">
-                <a:solidFill>
-                  <a:srgbClr val="0D9488"/>
-                </a:solidFill>
-                <a:latin typeface="Malgun Gothic"/>
-              </a:rPr>
-              <a:t>🌳</a:t>
-            </a:r>
-          </a:p>
-        </p:txBody>
-      </p:sp>
-      <p:sp>
-        <p:nvSpPr>
-          <p:cNvPr id="22" name="TextBox 21"/>
-          <p:cNvSpPr txBox="1"/>
-          <p:nvPr/>
-        </p:nvSpPr>
-        <p:spPr>
-          <a:xfrm>
-            <a:off x="1143000" y="3776472"/>
-            <a:ext cx="4609947" cy="365760"/>
-          </a:xfrm>
-          <a:prstGeom prst="rect">
-            <a:avLst/>
-          </a:prstGeom>
-          <a:noFill/>
-        </p:spPr>
-        <p:txBody>
-          <a:bodyPr wrap="square" anchor="t">
-            <a:spAutoFit/>
-          </a:bodyPr>
-          <a:lstStyle/>
-          <a:p>
-            <a:pPr algn="l">
-              <a:lnSpc>
-                <a:spcPct val="100000"/>
-              </a:lnSpc>
-            </a:pPr>
-            <a:r>
-              <a:rPr sz="1400" b="1">
-                <a:solidFill>
-                  <a:srgbClr val="1E2340"/>
-                </a:solidFill>
-                <a:latin typeface="Malgun Gothic"/>
-              </a:rPr>
-              <a:t>본사→지사→대리점 정산</a:t>
-            </a:r>
-          </a:p>
-        </p:txBody>
-      </p:sp>
-      <p:sp>
-        <p:nvSpPr>
-          <p:cNvPr id="23" name="TextBox 22"/>
-          <p:cNvSpPr txBox="1"/>
-          <p:nvPr/>
-        </p:nvSpPr>
-        <p:spPr>
-          <a:xfrm>
-            <a:off x="1143000" y="4087368"/>
-            <a:ext cx="4609947" cy="365760"/>
-          </a:xfrm>
-          <a:prstGeom prst="rect">
-            <a:avLst/>
-          </a:prstGeom>
-          <a:noFill/>
-        </p:spPr>
-        <p:txBody>
-          <a:bodyPr wrap="square" anchor="t">
-            <a:spAutoFit/>
-          </a:bodyPr>
-          <a:lstStyle/>
-          <a:p>
-            <a:pPr algn="l">
-              <a:lnSpc>
-                <a:spcPct val="100000"/>
-              </a:lnSpc>
-            </a:pPr>
-            <a:r>
-              <a:rPr sz="1050" b="0">
-                <a:solidFill>
-                  <a:srgbClr val="64748B"/>
-                </a:solidFill>
-                <a:latin typeface="Malgun Gothic"/>
-              </a:rPr>
-              <a:t>수령·배분이 트리 구조로 자동 계산.</a:t>
-            </a:r>
-          </a:p>
-        </p:txBody>
-      </p:sp>
-      <p:sp>
-        <p:nvSpPr>
-          <p:cNvPr id="24" name="Rounded Rectangle 23"/>
-          <p:cNvSpPr/>
-          <p:nvPr/>
-        </p:nvSpPr>
-        <p:spPr>
-          <a:xfrm>
-            <a:off x="6301587" y="3657600"/>
-            <a:ext cx="5524347" cy="822960"/>
-          </a:xfrm>
-          <a:prstGeom prst="roundRect">
-            <a:avLst/>
-          </a:prstGeom>
-          <a:solidFill>
-            <a:srgbClr val="FFFFFF"/>
-          </a:solidFill>
-          <a:ln w="12700">
-            <a:solidFill>
-              <a:srgbClr val="E2E8F0"/>
-            </a:solidFill>
-          </a:ln>
-          <a:effectLst/>
-        </p:spPr>
-        <p:style>
-          <a:lnRef idx="1">
-            <a:schemeClr val="accent1"/>
-          </a:lnRef>
-          <a:fillRef idx="3">
-            <a:schemeClr val="accent1"/>
-          </a:fillRef>
-          <a:effectRef idx="2">
-            <a:schemeClr val="accent1"/>
-          </a:effectRef>
-          <a:fontRef idx="minor">
-            <a:schemeClr val="lt1"/>
-          </a:fontRef>
-        </p:style>
-        <p:txBody>
-          <a:bodyPr rtlCol="0" anchor="ctr"/>
-          <a:lstStyle/>
-          <a:p>
-            <a:pPr algn="ctr"/>
-          </a:p>
-        </p:txBody>
-      </p:sp>
-      <p:sp>
-        <p:nvSpPr>
-          <p:cNvPr id="25" name="Rounded Rectangle 24"/>
-          <p:cNvSpPr/>
-          <p:nvPr/>
-        </p:nvSpPr>
-        <p:spPr>
-          <a:xfrm>
-            <a:off x="6438747" y="3813048"/>
-            <a:ext cx="512064" cy="512064"/>
-          </a:xfrm>
-          <a:prstGeom prst="roundRect">
-            <a:avLst/>
-          </a:prstGeom>
-          <a:solidFill>
-            <a:srgbClr val="CCFBF1"/>
-          </a:solidFill>
-          <a:ln>
-            <a:noFill/>
-          </a:ln>
-          <a:effectLst/>
-        </p:spPr>
-        <p:style>
-          <a:lnRef idx="1">
-            <a:schemeClr val="accent1"/>
-          </a:lnRef>
-          <a:fillRef idx="3">
-            <a:schemeClr val="accent1"/>
-          </a:fillRef>
-          <a:effectRef idx="2">
-            <a:schemeClr val="accent1"/>
-          </a:effectRef>
-          <a:fontRef idx="minor">
-            <a:schemeClr val="lt1"/>
-          </a:fontRef>
-        </p:style>
-        <p:txBody>
-          <a:bodyPr rtlCol="0" anchor="ctr"/>
-          <a:lstStyle/>
-          <a:p>
-            <a:pPr algn="ctr"/>
-          </a:p>
-        </p:txBody>
-      </p:sp>
-      <p:sp>
-        <p:nvSpPr>
-          <p:cNvPr id="26" name="TextBox 25"/>
-          <p:cNvSpPr txBox="1"/>
-          <p:nvPr/>
-        </p:nvSpPr>
-        <p:spPr>
-          <a:xfrm>
-            <a:off x="6438747" y="3813048"/>
-            <a:ext cx="512064" cy="512064"/>
-          </a:xfrm>
-          <a:prstGeom prst="rect">
-            <a:avLst/>
-          </a:prstGeom>
-          <a:noFill/>
-        </p:spPr>
-        <p:txBody>
-          <a:bodyPr wrap="square" anchor="ctr">
-            <a:spAutoFit/>
-          </a:bodyPr>
-          <a:lstStyle/>
-          <a:p>
-            <a:pPr algn="ctr">
-              <a:lnSpc>
-                <a:spcPct val="100000"/>
-              </a:lnSpc>
-            </a:pPr>
-            <a:r>
-              <a:rPr sz="2000" b="0">
-                <a:solidFill>
-                  <a:srgbClr val="0D9488"/>
-                </a:solidFill>
-                <a:latin typeface="Malgun Gothic"/>
-              </a:rPr>
-              <a:t>📊</a:t>
-            </a:r>
-          </a:p>
-        </p:txBody>
-      </p:sp>
-      <p:sp>
-        <p:nvSpPr>
-          <p:cNvPr id="27" name="TextBox 26"/>
-          <p:cNvSpPr txBox="1"/>
-          <p:nvPr/>
-        </p:nvSpPr>
-        <p:spPr>
-          <a:xfrm>
-            <a:off x="7078827" y="3776472"/>
-            <a:ext cx="4609947" cy="365760"/>
-          </a:xfrm>
-          <a:prstGeom prst="rect">
-            <a:avLst/>
-          </a:prstGeom>
-          <a:noFill/>
-        </p:spPr>
-        <p:txBody>
-          <a:bodyPr wrap="square" anchor="t">
-            <a:spAutoFit/>
-          </a:bodyPr>
-          <a:lstStyle/>
-          <a:p>
-            <a:pPr algn="l">
-              <a:lnSpc>
-                <a:spcPct val="100000"/>
-              </a:lnSpc>
-            </a:pPr>
-            <a:r>
-              <a:rPr sz="1400" b="1">
-                <a:solidFill>
-                  <a:srgbClr val="1E2340"/>
-                </a:solidFill>
-                <a:latin typeface="Malgun Gothic"/>
-              </a:rPr>
-              <a:t>성과 리포트</a:t>
-            </a:r>
-          </a:p>
-        </p:txBody>
-      </p:sp>
-      <p:sp>
-        <p:nvSpPr>
-          <p:cNvPr id="28" name="TextBox 27"/>
-          <p:cNvSpPr txBox="1"/>
-          <p:nvPr/>
-        </p:nvSpPr>
-        <p:spPr>
-          <a:xfrm>
-            <a:off x="7078827" y="4087368"/>
-            <a:ext cx="4609947" cy="365760"/>
-          </a:xfrm>
-          <a:prstGeom prst="rect">
-            <a:avLst/>
-          </a:prstGeom>
-          <a:noFill/>
-        </p:spPr>
-        <p:txBody>
-          <a:bodyPr wrap="square" anchor="t">
-            <a:spAutoFit/>
-          </a:bodyPr>
-          <a:lstStyle/>
-          <a:p>
-            <a:pPr algn="l">
-              <a:lnSpc>
-                <a:spcPct val="100000"/>
-              </a:lnSpc>
-            </a:pPr>
-            <a:r>
-              <a:rPr sz="1050" b="0">
-                <a:solidFill>
-                  <a:srgbClr val="64748B"/>
-                </a:solidFill>
-                <a:latin typeface="Malgun Gothic"/>
-              </a:rPr>
-              <a:t>지사·대리점 성과를 월간 리포트로.</a:t>
-            </a:r>
-          </a:p>
-        </p:txBody>
-      </p:sp>
-      <p:sp>
-        <p:nvSpPr>
-          <p:cNvPr id="29" name="TextBox 28"/>
-          <p:cNvSpPr txBox="1"/>
-          <p:nvPr/>
-        </p:nvSpPr>
-        <p:spPr>
-          <a:xfrm>
-            <a:off x="365760" y="4754880"/>
-            <a:ext cx="5486400" cy="365760"/>
-          </a:xfrm>
-          <a:prstGeom prst="rect">
-            <a:avLst/>
-          </a:prstGeom>
-          <a:noFill/>
-        </p:spPr>
-        <p:txBody>
-          <a:bodyPr wrap="square" anchor="t">
-            <a:spAutoFit/>
-          </a:bodyPr>
-          <a:lstStyle/>
-          <a:p>
-            <a:pPr algn="l">
-              <a:lnSpc>
-                <a:spcPct val="100000"/>
-              </a:lnSpc>
-            </a:pPr>
-            <a:r>
-              <a:rPr sz="1300" b="1">
-                <a:solidFill>
-                  <a:srgbClr val="0D9488"/>
-                </a:solidFill>
-                <a:latin typeface="Malgun Gothic"/>
-              </a:rPr>
-              <a:t>우리 지사 지표(예시)</a:t>
-            </a:r>
-          </a:p>
-        </p:txBody>
-      </p:sp>
-      <p:graphicFrame>
-        <p:nvGraphicFramePr>
-          <p:cNvPr id="30" name="Chart 29"/>
-          <p:cNvGraphicFramePr>
-            <a:graphicFrameLocks noGrp="1"/>
-          </p:cNvGraphicFramePr>
-          <p:nvPr/>
-        </p:nvGraphicFramePr>
-        <p:xfrm>
-          <a:off x="365760" y="5074920"/>
-          <a:ext cx="5669280" cy="1554480"/>
-        </p:xfrm>
-        <a:graphic>
-          <a:graphicData uri="http://schemas.openxmlformats.org/drawingml/2006/chart">
-            <c:chart xmlns:c="http://schemas.openxmlformats.org/drawingml/2006/chart" r:id="rId2"/>
-          </a:graphicData>
-        </a:graphic>
-      </p:graphicFrame>
-      <p:sp>
-        <p:nvSpPr>
-          <p:cNvPr id="31" name="Rectangle 30"/>
-          <p:cNvSpPr/>
-          <p:nvPr/>
-        </p:nvSpPr>
-        <p:spPr>
-          <a:xfrm>
-            <a:off x="7470648" y="4654296"/>
-            <a:ext cx="3255264" cy="2075688"/>
-          </a:xfrm>
-          <a:prstGeom prst="rect">
-            <a:avLst/>
-          </a:prstGeom>
-          <a:solidFill>
-            <a:srgbClr val="FFFFFF"/>
-          </a:solidFill>
-          <a:ln w="12700">
-            <a:solidFill>
-              <a:srgbClr val="E2E8F0"/>
-            </a:solidFill>
-          </a:ln>
-          <a:effectLst/>
-        </p:spPr>
-        <p:style>
-          <a:lnRef idx="1">
-            <a:schemeClr val="accent1"/>
-          </a:lnRef>
-          <a:fillRef idx="3">
-            <a:schemeClr val="accent1"/>
-          </a:fillRef>
-          <a:effectRef idx="2">
-            <a:schemeClr val="accent1"/>
-          </a:effectRef>
-          <a:fontRef idx="minor">
-            <a:schemeClr val="lt1"/>
-          </a:fontRef>
-        </p:style>
-        <p:txBody>
-          <a:bodyPr rtlCol="0" anchor="ctr"/>
-          <a:lstStyle/>
-          <a:p>
-            <a:pPr algn="ctr"/>
-          </a:p>
-        </p:txBody>
-      </p:sp>
-      <p:pic>
-        <p:nvPicPr>
-          <p:cNvPr id="32" name="Picture 31" descr="admin_login.jpg"/>
-          <p:cNvPicPr>
-            <a:picLocks noChangeAspect="1"/>
-          </p:cNvPicPr>
-          <p:nvPr/>
-        </p:nvPicPr>
-        <p:blipFill>
-          <a:blip r:embed="rId3"/>
-          <a:stretch>
-            <a:fillRect/>
-          </a:stretch>
-        </p:blipFill>
-        <p:spPr>
-          <a:xfrm>
-            <a:off x="7525512" y="4709160"/>
-            <a:ext cx="3145536" cy="1965960"/>
-          </a:xfrm>
-          <a:prstGeom prst="rect">
-            <a:avLst/>
-          </a:prstGeom>
-        </p:spPr>
-      </p:pic>
-    </p:spTree>
-  </p:cSld>
-  <p:clrMapOvr>
-    <a:masterClrMapping/>
-  </p:clrMapOvr>
-</p:sld>
-</file>
-
-<file path=ppt/slides/slide20.xml><?xml version="1.0" encoding="utf-8"?>
-<p:sld xmlns:a="http://schemas.openxmlformats.org/drawingml/2006/main" xmlns:p="http://schemas.openxmlformats.org/presentationml/2006/main" xmlns:r="http://schemas.openxmlformats.org/officeDocument/2006/relationships">
-  <p:cSld>
-    <p:bg>
-      <p:bgPr>
-        <a:solidFill>
-          <a:srgbClr val="FFFFFF"/>
-        </a:solidFill>
-        <a:effectLst/>
-      </p:bgPr>
-    </p:bg>
-    <p:spTree>
-      <p:nvGrpSpPr>
-        <p:cNvPr id="1" name=""/>
-        <p:cNvGrpSpPr/>
-        <p:nvPr/>
-      </p:nvGrpSpPr>
-      <p:grpSpPr/>
-      <p:sp>
-        <p:nvSpPr>
-          <p:cNvPr id="2" name="Rectangle 1"/>
-          <p:cNvSpPr/>
-          <p:nvPr/>
-        </p:nvSpPr>
-        <p:spPr>
-          <a:xfrm>
-            <a:off x="0" y="0"/>
-            <a:ext cx="12191695" cy="566928"/>
-          </a:xfrm>
-          <a:prstGeom prst="rect">
-            <a:avLst/>
-          </a:prstGeom>
-          <a:solidFill>
-            <a:srgbClr val="0D9488"/>
-          </a:solidFill>
-          <a:ln>
-            <a:noFill/>
-          </a:ln>
-          <a:effectLst/>
-        </p:spPr>
-        <p:style>
-          <a:lnRef idx="1">
-            <a:schemeClr val="accent1"/>
-          </a:lnRef>
-          <a:fillRef idx="3">
-            <a:schemeClr val="accent1"/>
-          </a:fillRef>
-          <a:effectRef idx="2">
-            <a:schemeClr val="accent1"/>
-          </a:effectRef>
-          <a:fontRef idx="minor">
-            <a:schemeClr val="lt1"/>
-          </a:fontRef>
-        </p:style>
-        <p:txBody>
-          <a:bodyPr rtlCol="0" anchor="ctr"/>
-          <a:lstStyle/>
-          <a:p>
-            <a:pPr algn="ctr"/>
-          </a:p>
-        </p:txBody>
-      </p:sp>
-      <p:sp>
-        <p:nvSpPr>
-          <p:cNvPr id="3" name="Rectangle 2"/>
-          <p:cNvSpPr/>
-          <p:nvPr/>
-        </p:nvSpPr>
-        <p:spPr>
-          <a:xfrm>
-            <a:off x="0" y="566928"/>
-            <a:ext cx="12191695" cy="54864"/>
-          </a:xfrm>
-          <a:prstGeom prst="rect">
-            <a:avLst/>
-          </a:prstGeom>
-          <a:solidFill>
-            <a:srgbClr val="F59E0B"/>
-          </a:solidFill>
-          <a:ln>
-            <a:noFill/>
-          </a:ln>
-          <a:effectLst/>
-        </p:spPr>
-        <p:style>
-          <a:lnRef idx="1">
-            <a:schemeClr val="accent1"/>
-          </a:lnRef>
-          <a:fillRef idx="3">
-            <a:schemeClr val="accent1"/>
-          </a:fillRef>
-          <a:effectRef idx="2">
-            <a:schemeClr val="accent1"/>
-          </a:effectRef>
-          <a:fontRef idx="minor">
-            <a:schemeClr val="lt1"/>
-          </a:fontRef>
-        </p:style>
-        <p:txBody>
-          <a:bodyPr rtlCol="0" anchor="ctr"/>
-          <a:lstStyle/>
-          <a:p>
-            <a:pPr algn="ctr"/>
-          </a:p>
-        </p:txBody>
-      </p:sp>
-      <p:sp>
-        <p:nvSpPr>
-          <p:cNvPr id="4" name="TextBox 3"/>
-          <p:cNvSpPr txBox="1"/>
-          <p:nvPr/>
-        </p:nvSpPr>
-        <p:spPr>
-          <a:xfrm>
-            <a:off x="365760" y="27432"/>
-            <a:ext cx="7315200" cy="502920"/>
-          </a:xfrm>
-          <a:prstGeom prst="rect">
-            <a:avLst/>
-          </a:prstGeom>
-          <a:noFill/>
-        </p:spPr>
-        <p:txBody>
-          <a:bodyPr wrap="square" anchor="ctr">
-            <a:spAutoFit/>
-          </a:bodyPr>
-          <a:lstStyle/>
-          <a:p>
-            <a:pPr algn="l">
-              <a:lnSpc>
-                <a:spcPct val="100000"/>
-              </a:lnSpc>
-            </a:pPr>
-            <a:r>
-              <a:rPr sz="1500" b="1">
-                <a:solidFill>
-                  <a:srgbClr val="FFFFFF"/>
-                </a:solidFill>
-                <a:latin typeface="Malgun Gothic"/>
-              </a:rPr>
-              <a:t>🏢 망고아이 지사용 사용설명서</a:t>
-            </a:r>
-          </a:p>
-        </p:txBody>
-      </p:sp>
-      <p:sp>
-        <p:nvSpPr>
-          <p:cNvPr id="5" name="TextBox 4"/>
-          <p:cNvSpPr txBox="1"/>
-          <p:nvPr/>
-        </p:nvSpPr>
-        <p:spPr>
-          <a:xfrm>
-            <a:off x="8168335" y="27432"/>
-            <a:ext cx="3657600" cy="502920"/>
-          </a:xfrm>
-          <a:prstGeom prst="rect">
-            <a:avLst/>
-          </a:prstGeom>
-          <a:noFill/>
-        </p:spPr>
-        <p:txBody>
-          <a:bodyPr wrap="square" anchor="ctr">
-            <a:spAutoFit/>
-          </a:bodyPr>
-          <a:lstStyle/>
-          <a:p>
-            <a:pPr algn="r">
-              <a:lnSpc>
-                <a:spcPct val="100000"/>
-              </a:lnSpc>
-            </a:pPr>
-            <a:r>
-              <a:rPr sz="1300" b="1">
-                <a:solidFill>
-                  <a:srgbClr val="F1F5F9"/>
-                </a:solidFill>
-                <a:latin typeface="Malgun Gothic"/>
-              </a:rPr>
-              <a:t>자주 묻는 질문 (FAQ)</a:t>
-            </a:r>
-          </a:p>
-        </p:txBody>
-      </p:sp>
-      <p:sp>
-        <p:nvSpPr>
-          <p:cNvPr id="6" name="TextBox 5"/>
-          <p:cNvSpPr txBox="1"/>
-          <p:nvPr/>
-        </p:nvSpPr>
-        <p:spPr>
-          <a:xfrm>
-            <a:off x="365760" y="868680"/>
-            <a:ext cx="9144000" cy="457200"/>
-          </a:xfrm>
-          <a:prstGeom prst="rect">
-            <a:avLst/>
-          </a:prstGeom>
-          <a:noFill/>
-        </p:spPr>
-        <p:txBody>
-          <a:bodyPr wrap="square" anchor="t">
-            <a:spAutoFit/>
-          </a:bodyPr>
-          <a:lstStyle/>
-          <a:p>
-            <a:pPr algn="l">
-              <a:lnSpc>
-                <a:spcPct val="100000"/>
-              </a:lnSpc>
-            </a:pPr>
-            <a:r>
-              <a:rPr sz="2200" b="1">
-                <a:solidFill>
-                  <a:srgbClr val="0D9488"/>
-                </a:solidFill>
-                <a:latin typeface="Malgun Gothic"/>
-              </a:rPr>
-              <a:t>❓ 자주 묻는 질문 (FAQ)</a:t>
-            </a:r>
-          </a:p>
-        </p:txBody>
-      </p:sp>
-      <p:sp>
-        <p:nvSpPr>
-          <p:cNvPr id="7" name="Rounded Rectangle 6"/>
-          <p:cNvSpPr/>
-          <p:nvPr/>
-        </p:nvSpPr>
-        <p:spPr>
-          <a:xfrm>
-            <a:off x="365760" y="1554480"/>
-            <a:ext cx="11460175" cy="868680"/>
-          </a:xfrm>
-          <a:prstGeom prst="roundRect">
-            <a:avLst/>
-          </a:prstGeom>
-          <a:solidFill>
-            <a:srgbClr val="F8FAFC"/>
-          </a:solidFill>
-          <a:ln w="12700">
-            <a:solidFill>
-              <a:srgbClr val="E2E8F0"/>
-            </a:solidFill>
-          </a:ln>
-          <a:effectLst/>
-        </p:spPr>
-        <p:style>
-          <a:lnRef idx="1">
-            <a:schemeClr val="accent1"/>
-          </a:lnRef>
-          <a:fillRef idx="3">
-            <a:schemeClr val="accent1"/>
-          </a:fillRef>
-          <a:effectRef idx="2">
-            <a:schemeClr val="accent1"/>
-          </a:effectRef>
-          <a:fontRef idx="minor">
-            <a:schemeClr val="lt1"/>
-          </a:fontRef>
-        </p:style>
-        <p:txBody>
-          <a:bodyPr rtlCol="0" anchor="ctr"/>
-          <a:lstStyle/>
-          <a:p>
-            <a:pPr algn="ctr"/>
-          </a:p>
-        </p:txBody>
-      </p:sp>
-      <p:sp>
-        <p:nvSpPr>
-          <p:cNvPr id="8" name="TextBox 7"/>
-          <p:cNvSpPr txBox="1"/>
-          <p:nvPr/>
-        </p:nvSpPr>
-        <p:spPr>
-          <a:xfrm>
-            <a:off x="548640" y="1627632"/>
-            <a:ext cx="11094415" cy="365760"/>
-          </a:xfrm>
-          <a:prstGeom prst="rect">
-            <a:avLst/>
-          </a:prstGeom>
-          <a:noFill/>
-        </p:spPr>
-        <p:txBody>
-          <a:bodyPr wrap="square" anchor="t">
-            <a:spAutoFit/>
-          </a:bodyPr>
-          <a:lstStyle/>
-          <a:p>
-            <a:pPr algn="l">
-              <a:lnSpc>
-                <a:spcPct val="100000"/>
-              </a:lnSpc>
-            </a:pPr>
-            <a:r>
-              <a:rPr sz="1350" b="1">
-                <a:solidFill>
-                  <a:srgbClr val="0D9488"/>
-                </a:solidFill>
-                <a:latin typeface="Malgun Gothic"/>
-              </a:rPr>
-              <a:t>Q. 어디서 접속하나요?</a:t>
-            </a:r>
-          </a:p>
-        </p:txBody>
-      </p:sp>
-      <p:sp>
-        <p:nvSpPr>
-          <p:cNvPr id="9" name="TextBox 8"/>
-          <p:cNvSpPr txBox="1"/>
-          <p:nvPr/>
-        </p:nvSpPr>
-        <p:spPr>
-          <a:xfrm>
-            <a:off x="548640" y="1965960"/>
-            <a:ext cx="11094415" cy="411480"/>
-          </a:xfrm>
-          <a:prstGeom prst="rect">
-            <a:avLst/>
-          </a:prstGeom>
-          <a:noFill/>
-        </p:spPr>
-        <p:txBody>
-          <a:bodyPr wrap="square" anchor="t">
-            <a:spAutoFit/>
-          </a:bodyPr>
-          <a:lstStyle/>
-          <a:p>
-            <a:pPr algn="l">
-              <a:lnSpc>
-                <a:spcPct val="105000"/>
-              </a:lnSpc>
-            </a:pPr>
-            <a:r>
-              <a:rPr sz="1150" b="0">
-                <a:solidFill>
-                  <a:srgbClr val="475569"/>
-                </a:solidFill>
-                <a:latin typeface="Malgun Gothic"/>
-              </a:rPr>
-              <a:t>A. admin.mangoi.co.kr 에서 로그인해요. 권한(지사)에 따라 우리 지사 데이터만 자동으로 보여요.</a:t>
-            </a:r>
-          </a:p>
-        </p:txBody>
-      </p:sp>
-      <p:sp>
-        <p:nvSpPr>
-          <p:cNvPr id="10" name="Rounded Rectangle 9"/>
-          <p:cNvSpPr/>
-          <p:nvPr/>
-        </p:nvSpPr>
-        <p:spPr>
-          <a:xfrm>
-            <a:off x="365760" y="2542032"/>
-            <a:ext cx="11460175" cy="868680"/>
-          </a:xfrm>
-          <a:prstGeom prst="roundRect">
-            <a:avLst/>
-          </a:prstGeom>
-          <a:solidFill>
-            <a:srgbClr val="F8FAFC"/>
-          </a:solidFill>
-          <a:ln w="12700">
-            <a:solidFill>
-              <a:srgbClr val="E2E8F0"/>
-            </a:solidFill>
-          </a:ln>
-          <a:effectLst/>
-        </p:spPr>
-        <p:style>
-          <a:lnRef idx="1">
-            <a:schemeClr val="accent1"/>
-          </a:lnRef>
-          <a:fillRef idx="3">
-            <a:schemeClr val="accent1"/>
-          </a:fillRef>
-          <a:effectRef idx="2">
-            <a:schemeClr val="accent1"/>
-          </a:effectRef>
-          <a:fontRef idx="minor">
-            <a:schemeClr val="lt1"/>
-          </a:fontRef>
-        </p:style>
-        <p:txBody>
-          <a:bodyPr rtlCol="0" anchor="ctr"/>
-          <a:lstStyle/>
-          <a:p>
-            <a:pPr algn="ctr"/>
-          </a:p>
-        </p:txBody>
-      </p:sp>
-      <p:sp>
-        <p:nvSpPr>
-          <p:cNvPr id="11" name="TextBox 10"/>
-          <p:cNvSpPr txBox="1"/>
-          <p:nvPr/>
-        </p:nvSpPr>
-        <p:spPr>
-          <a:xfrm>
-            <a:off x="548640" y="2615184"/>
-            <a:ext cx="11094415" cy="365760"/>
-          </a:xfrm>
-          <a:prstGeom prst="rect">
-            <a:avLst/>
-          </a:prstGeom>
-          <a:noFill/>
-        </p:spPr>
-        <p:txBody>
-          <a:bodyPr wrap="square" anchor="t">
-            <a:spAutoFit/>
-          </a:bodyPr>
-          <a:lstStyle/>
-          <a:p>
-            <a:pPr algn="l">
-              <a:lnSpc>
-                <a:spcPct val="100000"/>
-              </a:lnSpc>
-            </a:pPr>
-            <a:r>
-              <a:rPr sz="1350" b="1">
-                <a:solidFill>
-                  <a:srgbClr val="0D9488"/>
-                </a:solidFill>
-                <a:latin typeface="Malgun Gothic"/>
-              </a:rPr>
-              <a:t>Q. 다른 지사 데이터도 보이나요?</a:t>
-            </a:r>
-          </a:p>
-        </p:txBody>
-      </p:sp>
-      <p:sp>
-        <p:nvSpPr>
-          <p:cNvPr id="12" name="TextBox 11"/>
-          <p:cNvSpPr txBox="1"/>
-          <p:nvPr/>
-        </p:nvSpPr>
-        <p:spPr>
-          <a:xfrm>
-            <a:off x="548640" y="2953512"/>
-            <a:ext cx="11094415" cy="411480"/>
-          </a:xfrm>
-          <a:prstGeom prst="rect">
-            <a:avLst/>
-          </a:prstGeom>
-          <a:noFill/>
-        </p:spPr>
-        <p:txBody>
-          <a:bodyPr wrap="square" anchor="t">
-            <a:spAutoFit/>
-          </a:bodyPr>
-          <a:lstStyle/>
-          <a:p>
-            <a:pPr algn="l">
-              <a:lnSpc>
-                <a:spcPct val="105000"/>
-              </a:lnSpc>
-            </a:pPr>
-            <a:r>
-              <a:rPr sz="1150" b="0">
-                <a:solidFill>
-                  <a:srgbClr val="475569"/>
-                </a:solidFill>
-                <a:latin typeface="Malgun Gothic"/>
-              </a:rPr>
-              <a:t>A. 아니요. 권한 범위상 우리 지사와 산하 대리점 데이터만 보입니다.</a:t>
-            </a:r>
-          </a:p>
-        </p:txBody>
-      </p:sp>
-      <p:sp>
-        <p:nvSpPr>
-          <p:cNvPr id="13" name="Rounded Rectangle 12"/>
-          <p:cNvSpPr/>
-          <p:nvPr/>
-        </p:nvSpPr>
-        <p:spPr>
-          <a:xfrm>
-            <a:off x="365760" y="3529584"/>
-            <a:ext cx="11460175" cy="868680"/>
-          </a:xfrm>
-          <a:prstGeom prst="roundRect">
-            <a:avLst/>
-          </a:prstGeom>
-          <a:solidFill>
-            <a:srgbClr val="F8FAFC"/>
-          </a:solidFill>
-          <a:ln w="12700">
-            <a:solidFill>
-              <a:srgbClr val="E2E8F0"/>
-            </a:solidFill>
-          </a:ln>
-          <a:effectLst/>
-        </p:spPr>
-        <p:style>
-          <a:lnRef idx="1">
-            <a:schemeClr val="accent1"/>
-          </a:lnRef>
-          <a:fillRef idx="3">
-            <a:schemeClr val="accent1"/>
-          </a:fillRef>
-          <a:effectRef idx="2">
-            <a:schemeClr val="accent1"/>
-          </a:effectRef>
-          <a:fontRef idx="minor">
-            <a:schemeClr val="lt1"/>
-          </a:fontRef>
-        </p:style>
-        <p:txBody>
-          <a:bodyPr rtlCol="0" anchor="ctr"/>
-          <a:lstStyle/>
-          <a:p>
-            <a:pPr algn="ctr"/>
-          </a:p>
-        </p:txBody>
-      </p:sp>
-      <p:sp>
-        <p:nvSpPr>
-          <p:cNvPr id="14" name="TextBox 13"/>
-          <p:cNvSpPr txBox="1"/>
-          <p:nvPr/>
-        </p:nvSpPr>
-        <p:spPr>
-          <a:xfrm>
-            <a:off x="548640" y="3602736"/>
-            <a:ext cx="11094415" cy="365760"/>
-          </a:xfrm>
-          <a:prstGeom prst="rect">
-            <a:avLst/>
-          </a:prstGeom>
-          <a:noFill/>
-        </p:spPr>
-        <p:txBody>
-          <a:bodyPr wrap="square" anchor="t">
-            <a:spAutoFit/>
-          </a:bodyPr>
-          <a:lstStyle/>
-          <a:p>
-            <a:pPr algn="l">
-              <a:lnSpc>
-                <a:spcPct val="100000"/>
-              </a:lnSpc>
-            </a:pPr>
-            <a:r>
-              <a:rPr sz="1350" b="1">
-                <a:solidFill>
-                  <a:srgbClr val="0D9488"/>
-                </a:solidFill>
-                <a:latin typeface="Malgun Gothic"/>
-              </a:rPr>
-              <a:t>Q. 정산은 어떻게 계산되나요?</a:t>
-            </a:r>
-          </a:p>
-        </p:txBody>
-      </p:sp>
-      <p:sp>
-        <p:nvSpPr>
-          <p:cNvPr id="15" name="TextBox 14"/>
-          <p:cNvSpPr txBox="1"/>
-          <p:nvPr/>
-        </p:nvSpPr>
-        <p:spPr>
-          <a:xfrm>
-            <a:off x="548640" y="3941064"/>
-            <a:ext cx="11094415" cy="411480"/>
-          </a:xfrm>
-          <a:prstGeom prst="rect">
-            <a:avLst/>
-          </a:prstGeom>
-          <a:noFill/>
-        </p:spPr>
-        <p:txBody>
-          <a:bodyPr wrap="square" anchor="t">
-            <a:spAutoFit/>
-          </a:bodyPr>
-          <a:lstStyle/>
-          <a:p>
-            <a:pPr algn="l">
-              <a:lnSpc>
-                <a:spcPct val="105000"/>
-              </a:lnSpc>
-            </a:pPr>
-            <a:r>
-              <a:rPr sz="1150" b="0">
-                <a:solidFill>
-                  <a:srgbClr val="475569"/>
-                </a:solidFill>
-                <a:latin typeface="Malgun Gothic"/>
-              </a:rPr>
-              <a:t>A. 조직 트리(본사→지사→대리점)를 따라 매출·수수료가 자동 계산됩니다. 월간 리포트에서 확인하세요.</a:t>
-            </a:r>
-          </a:p>
-        </p:txBody>
-      </p:sp>
-      <p:sp>
-        <p:nvSpPr>
-          <p:cNvPr id="16" name="Rounded Rectangle 15"/>
-          <p:cNvSpPr/>
-          <p:nvPr/>
-        </p:nvSpPr>
-        <p:spPr>
-          <a:xfrm>
-            <a:off x="365760" y="4517136"/>
-            <a:ext cx="11460175" cy="868680"/>
-          </a:xfrm>
-          <a:prstGeom prst="roundRect">
-            <a:avLst/>
-          </a:prstGeom>
-          <a:solidFill>
-            <a:srgbClr val="F8FAFC"/>
-          </a:solidFill>
-          <a:ln w="12700">
-            <a:solidFill>
-              <a:srgbClr val="E2E8F0"/>
-            </a:solidFill>
-          </a:ln>
-          <a:effectLst/>
-        </p:spPr>
-        <p:style>
-          <a:lnRef idx="1">
-            <a:schemeClr val="accent1"/>
-          </a:lnRef>
-          <a:fillRef idx="3">
-            <a:schemeClr val="accent1"/>
-          </a:fillRef>
-          <a:effectRef idx="2">
-            <a:schemeClr val="accent1"/>
-          </a:effectRef>
-          <a:fontRef idx="minor">
-            <a:schemeClr val="lt1"/>
-          </a:fontRef>
-        </p:style>
-        <p:txBody>
-          <a:bodyPr rtlCol="0" anchor="ctr"/>
-          <a:lstStyle/>
-          <a:p>
-            <a:pPr algn="ctr"/>
-          </a:p>
-        </p:txBody>
-      </p:sp>
-      <p:sp>
-        <p:nvSpPr>
-          <p:cNvPr id="17" name="TextBox 16"/>
-          <p:cNvSpPr txBox="1"/>
-          <p:nvPr/>
-        </p:nvSpPr>
-        <p:spPr>
-          <a:xfrm>
-            <a:off x="548640" y="4590288"/>
-            <a:ext cx="11094415" cy="365760"/>
-          </a:xfrm>
-          <a:prstGeom prst="rect">
-            <a:avLst/>
-          </a:prstGeom>
-          <a:noFill/>
-        </p:spPr>
-        <p:txBody>
-          <a:bodyPr wrap="square" anchor="t">
-            <a:spAutoFit/>
-          </a:bodyPr>
-          <a:lstStyle/>
-          <a:p>
-            <a:pPr algn="l">
-              <a:lnSpc>
-                <a:spcPct val="100000"/>
-              </a:lnSpc>
-            </a:pPr>
-            <a:r>
-              <a:rPr sz="1350" b="1">
-                <a:solidFill>
-                  <a:srgbClr val="0D9488"/>
-                </a:solidFill>
-                <a:latin typeface="Malgun Gothic"/>
-              </a:rPr>
-              <a:t>Q. 대리점 성과가 부진해요.</a:t>
-            </a:r>
-          </a:p>
-        </p:txBody>
-      </p:sp>
-      <p:sp>
-        <p:nvSpPr>
-          <p:cNvPr id="18" name="TextBox 17"/>
-          <p:cNvSpPr txBox="1"/>
-          <p:nvPr/>
-        </p:nvSpPr>
-        <p:spPr>
-          <a:xfrm>
-            <a:off x="548640" y="4928616"/>
-            <a:ext cx="11094415" cy="411480"/>
-          </a:xfrm>
-          <a:prstGeom prst="rect">
-            <a:avLst/>
-          </a:prstGeom>
-          <a:noFill/>
-        </p:spPr>
-        <p:txBody>
-          <a:bodyPr wrap="square" anchor="t">
-            <a:spAutoFit/>
-          </a:bodyPr>
-          <a:lstStyle/>
-          <a:p>
-            <a:pPr algn="l">
-              <a:lnSpc>
-                <a:spcPct val="105000"/>
-              </a:lnSpc>
-            </a:pPr>
-            <a:r>
-              <a:rPr sz="1150" b="0">
-                <a:solidFill>
-                  <a:srgbClr val="475569"/>
-                </a:solidFill>
-                <a:latin typeface="Malgun Gothic"/>
-              </a:rPr>
-              <a:t>A. 리텐션·회계·리포트로 원인을 찾고, 온보딩·코칭·인센티브로 지원하세요. 우수 사례 공유도 효과적입니다.</a:t>
-            </a:r>
-          </a:p>
-        </p:txBody>
-      </p:sp>
-      <p:sp>
-        <p:nvSpPr>
-          <p:cNvPr id="19" name="Rounded Rectangle 18"/>
-          <p:cNvSpPr/>
-          <p:nvPr/>
-        </p:nvSpPr>
-        <p:spPr>
-          <a:xfrm>
-            <a:off x="365760" y="5504688"/>
-            <a:ext cx="11460175" cy="868680"/>
-          </a:xfrm>
-          <a:prstGeom prst="roundRect">
-            <a:avLst/>
-          </a:prstGeom>
-          <a:solidFill>
-            <a:srgbClr val="F8FAFC"/>
-          </a:solidFill>
-          <a:ln w="12700">
-            <a:solidFill>
-              <a:srgbClr val="E2E8F0"/>
-            </a:solidFill>
-          </a:ln>
-          <a:effectLst/>
-        </p:spPr>
-        <p:style>
-          <a:lnRef idx="1">
-            <a:schemeClr val="accent1"/>
-          </a:lnRef>
-          <a:fillRef idx="3">
-            <a:schemeClr val="accent1"/>
-          </a:fillRef>
-          <a:effectRef idx="2">
-            <a:schemeClr val="accent1"/>
-          </a:effectRef>
-          <a:fontRef idx="minor">
-            <a:schemeClr val="lt1"/>
-          </a:fontRef>
-        </p:style>
-        <p:txBody>
-          <a:bodyPr rtlCol="0" anchor="ctr"/>
-          <a:lstStyle/>
-          <a:p>
-            <a:pPr algn="ctr"/>
-          </a:p>
-        </p:txBody>
-      </p:sp>
-      <p:sp>
-        <p:nvSpPr>
-          <p:cNvPr id="20" name="TextBox 19"/>
-          <p:cNvSpPr txBox="1"/>
-          <p:nvPr/>
-        </p:nvSpPr>
-        <p:spPr>
-          <a:xfrm>
-            <a:off x="548640" y="5577840"/>
-            <a:ext cx="11094415" cy="365760"/>
-          </a:xfrm>
-          <a:prstGeom prst="rect">
-            <a:avLst/>
-          </a:prstGeom>
-          <a:noFill/>
-        </p:spPr>
-        <p:txBody>
-          <a:bodyPr wrap="square" anchor="t">
-            <a:spAutoFit/>
-          </a:bodyPr>
-          <a:lstStyle/>
-          <a:p>
-            <a:pPr algn="l">
-              <a:lnSpc>
-                <a:spcPct val="100000"/>
-              </a:lnSpc>
-            </a:pPr>
-            <a:r>
-              <a:rPr sz="1350" b="1">
-                <a:solidFill>
-                  <a:srgbClr val="0D9488"/>
-                </a:solidFill>
-                <a:latin typeface="Malgun Gothic"/>
-              </a:rPr>
-              <a:t>Q. 시스템 문제가 생겼어요.</a:t>
-            </a:r>
-          </a:p>
-        </p:txBody>
-      </p:sp>
-      <p:sp>
-        <p:nvSpPr>
-          <p:cNvPr id="21" name="TextBox 20"/>
-          <p:cNvSpPr txBox="1"/>
-          <p:nvPr/>
-        </p:nvSpPr>
-        <p:spPr>
-          <a:xfrm>
-            <a:off x="548640" y="5916168"/>
-            <a:ext cx="11094415" cy="411480"/>
-          </a:xfrm>
-          <a:prstGeom prst="rect">
-            <a:avLst/>
-          </a:prstGeom>
-          <a:noFill/>
-        </p:spPr>
-        <p:txBody>
-          <a:bodyPr wrap="square" anchor="t">
-            <a:spAutoFit/>
-          </a:bodyPr>
-          <a:lstStyle/>
-          <a:p>
-            <a:pPr algn="l">
-              <a:lnSpc>
-                <a:spcPct val="105000"/>
-              </a:lnSpc>
-            </a:pPr>
-            <a:r>
-              <a:rPr sz="1150" b="0">
-                <a:solidFill>
-                  <a:srgbClr val="475569"/>
-                </a:solidFill>
-                <a:latin typeface="Malgun Gothic"/>
-              </a:rPr>
-              <a:t>A. 본사 고객센터(전화·이메일·카카오·원격지원)로 문의하면 빠르게 해결됩니다.</a:t>
-            </a:r>
-          </a:p>
-        </p:txBody>
-      </p:sp>
-    </p:spTree>
-  </p:cSld>
-  <p:clrMapOvr>
-    <a:masterClrMapping/>
-  </p:clrMapOvr>
-</p:sld>
-</file>
-
-<file path=ppt/slides/slide21.xml><?xml version="1.0" encoding="utf-8"?>
-<p:sld xmlns:a="http://schemas.openxmlformats.org/drawingml/2006/main" xmlns:p="http://schemas.openxmlformats.org/presentationml/2006/main" xmlns:r="http://schemas.openxmlformats.org/officeDocument/2006/relationships">
-  <p:cSld>
-    <p:bg>
-      <p:bgPr>
-        <a:solidFill>
-          <a:srgbClr val="ECFDF5"/>
-        </a:solidFill>
-        <a:effectLst/>
-      </p:bgPr>
-    </p:bg>
-    <p:spTree>
-      <p:nvGrpSpPr>
-        <p:cNvPr id="1" name=""/>
-        <p:cNvGrpSpPr/>
-        <p:nvPr/>
-      </p:nvGrpSpPr>
-      <p:grpSpPr/>
-      <p:sp>
-        <p:nvSpPr>
-          <p:cNvPr id="2" name="Rectangle 1"/>
-          <p:cNvSpPr/>
-          <p:nvPr/>
-        </p:nvSpPr>
-        <p:spPr>
-          <a:xfrm>
-            <a:off x="0" y="0"/>
-            <a:ext cx="12191695" cy="566928"/>
-          </a:xfrm>
-          <a:prstGeom prst="rect">
-            <a:avLst/>
-          </a:prstGeom>
-          <a:solidFill>
-            <a:srgbClr val="0D9488"/>
-          </a:solidFill>
-          <a:ln>
-            <a:noFill/>
-          </a:ln>
-          <a:effectLst/>
-        </p:spPr>
-        <p:style>
-          <a:lnRef idx="1">
-            <a:schemeClr val="accent1"/>
-          </a:lnRef>
-          <a:fillRef idx="3">
-            <a:schemeClr val="accent1"/>
-          </a:fillRef>
-          <a:effectRef idx="2">
-            <a:schemeClr val="accent1"/>
-          </a:effectRef>
-          <a:fontRef idx="minor">
-            <a:schemeClr val="lt1"/>
-          </a:fontRef>
-        </p:style>
-        <p:txBody>
-          <a:bodyPr rtlCol="0" anchor="ctr"/>
-          <a:lstStyle/>
-          <a:p>
-            <a:pPr algn="ctr"/>
-          </a:p>
-        </p:txBody>
-      </p:sp>
-      <p:sp>
-        <p:nvSpPr>
-          <p:cNvPr id="3" name="Rectangle 2"/>
-          <p:cNvSpPr/>
-          <p:nvPr/>
-        </p:nvSpPr>
-        <p:spPr>
-          <a:xfrm>
-            <a:off x="0" y="566928"/>
-            <a:ext cx="12191695" cy="54864"/>
-          </a:xfrm>
-          <a:prstGeom prst="rect">
-            <a:avLst/>
-          </a:prstGeom>
-          <a:solidFill>
-            <a:srgbClr val="F59E0B"/>
-          </a:solidFill>
-          <a:ln>
-            <a:noFill/>
-          </a:ln>
-          <a:effectLst/>
-        </p:spPr>
-        <p:style>
-          <a:lnRef idx="1">
-            <a:schemeClr val="accent1"/>
-          </a:lnRef>
-          <a:fillRef idx="3">
-            <a:schemeClr val="accent1"/>
-          </a:fillRef>
-          <a:effectRef idx="2">
-            <a:schemeClr val="accent1"/>
-          </a:effectRef>
-          <a:fontRef idx="minor">
-            <a:schemeClr val="lt1"/>
-          </a:fontRef>
-        </p:style>
-        <p:txBody>
-          <a:bodyPr rtlCol="0" anchor="ctr"/>
-          <a:lstStyle/>
-          <a:p>
-            <a:pPr algn="ctr"/>
-          </a:p>
-        </p:txBody>
-      </p:sp>
-      <p:sp>
-        <p:nvSpPr>
-          <p:cNvPr id="4" name="TextBox 3"/>
-          <p:cNvSpPr txBox="1"/>
-          <p:nvPr/>
-        </p:nvSpPr>
-        <p:spPr>
-          <a:xfrm>
-            <a:off x="365760" y="27432"/>
-            <a:ext cx="7315200" cy="502920"/>
-          </a:xfrm>
-          <a:prstGeom prst="rect">
-            <a:avLst/>
-          </a:prstGeom>
-          <a:noFill/>
-        </p:spPr>
-        <p:txBody>
-          <a:bodyPr wrap="square" anchor="ctr">
-            <a:spAutoFit/>
-          </a:bodyPr>
-          <a:lstStyle/>
-          <a:p>
-            <a:pPr algn="l">
-              <a:lnSpc>
-                <a:spcPct val="100000"/>
-              </a:lnSpc>
-            </a:pPr>
-            <a:r>
-              <a:rPr sz="1500" b="1">
-                <a:solidFill>
-                  <a:srgbClr val="FFFFFF"/>
-                </a:solidFill>
-                <a:latin typeface="Malgun Gothic"/>
-              </a:rPr>
-              <a:t>🏢 망고아이 지사용 사용설명서</a:t>
-            </a:r>
-          </a:p>
-        </p:txBody>
-      </p:sp>
-      <p:sp>
-        <p:nvSpPr>
-          <p:cNvPr id="5" name="TextBox 4"/>
-          <p:cNvSpPr txBox="1"/>
-          <p:nvPr/>
-        </p:nvSpPr>
-        <p:spPr>
-          <a:xfrm>
-            <a:off x="8168335" y="27432"/>
-            <a:ext cx="3657600" cy="502920"/>
-          </a:xfrm>
-          <a:prstGeom prst="rect">
-            <a:avLst/>
-          </a:prstGeom>
-          <a:noFill/>
-        </p:spPr>
-        <p:txBody>
-          <a:bodyPr wrap="square" anchor="ctr">
-            <a:spAutoFit/>
-          </a:bodyPr>
-          <a:lstStyle/>
-          <a:p>
-            <a:pPr algn="r">
-              <a:lnSpc>
-                <a:spcPct val="100000"/>
-              </a:lnSpc>
-            </a:pPr>
-            <a:r>
-              <a:rPr sz="1300" b="1">
-                <a:solidFill>
-                  <a:srgbClr val="F1F5F9"/>
-                </a:solidFill>
-                <a:latin typeface="Malgun Gothic"/>
-              </a:rPr>
-              <a:t>체크리스트</a:t>
-            </a:r>
-          </a:p>
-        </p:txBody>
-      </p:sp>
-      <p:sp>
-        <p:nvSpPr>
-          <p:cNvPr id="6" name="TextBox 5"/>
-          <p:cNvSpPr txBox="1"/>
-          <p:nvPr/>
-        </p:nvSpPr>
-        <p:spPr>
-          <a:xfrm>
-            <a:off x="365760" y="868680"/>
-            <a:ext cx="9144000" cy="457200"/>
-          </a:xfrm>
-          <a:prstGeom prst="rect">
-            <a:avLst/>
-          </a:prstGeom>
-          <a:noFill/>
-        </p:spPr>
-        <p:txBody>
-          <a:bodyPr wrap="square" anchor="t">
-            <a:spAutoFit/>
-          </a:bodyPr>
-          <a:lstStyle/>
-          <a:p>
-            <a:pPr algn="l">
-              <a:lnSpc>
-                <a:spcPct val="100000"/>
-              </a:lnSpc>
-            </a:pPr>
-            <a:r>
-              <a:rPr sz="2200" b="1">
-                <a:solidFill>
-                  <a:srgbClr val="0D9488"/>
-                </a:solidFill>
-                <a:latin typeface="Malgun Gothic"/>
-              </a:rPr>
-              <a:t>✅ 지사 운영 체크리스트</a:t>
-            </a:r>
-          </a:p>
-        </p:txBody>
-      </p:sp>
-      <p:sp>
-        <p:nvSpPr>
-          <p:cNvPr id="7" name="Rounded Rectangle 6"/>
-          <p:cNvSpPr/>
-          <p:nvPr/>
-        </p:nvSpPr>
-        <p:spPr>
-          <a:xfrm>
-            <a:off x="457200" y="1645920"/>
-            <a:ext cx="292608" cy="292608"/>
-          </a:xfrm>
-          <a:prstGeom prst="roundRect">
-            <a:avLst/>
-          </a:prstGeom>
-          <a:solidFill>
-            <a:srgbClr val="FFFFFF"/>
-          </a:solidFill>
-          <a:ln w="12700">
-            <a:solidFill>
-              <a:srgbClr val="0D9488"/>
-            </a:solidFill>
-          </a:ln>
-          <a:effectLst/>
-        </p:spPr>
-        <p:style>
-          <a:lnRef idx="1">
-            <a:schemeClr val="accent1"/>
-          </a:lnRef>
-          <a:fillRef idx="3">
-            <a:schemeClr val="accent1"/>
-          </a:fillRef>
-          <a:effectRef idx="2">
-            <a:schemeClr val="accent1"/>
-          </a:effectRef>
-          <a:fontRef idx="minor">
-            <a:schemeClr val="lt1"/>
-          </a:fontRef>
-        </p:style>
-        <p:txBody>
-          <a:bodyPr rtlCol="0" anchor="ctr"/>
-          <a:lstStyle/>
-          <a:p>
-            <a:pPr algn="ctr"/>
-          </a:p>
-        </p:txBody>
-      </p:sp>
-      <p:sp>
-        <p:nvSpPr>
-          <p:cNvPr id="8" name="TextBox 7"/>
-          <p:cNvSpPr txBox="1"/>
-          <p:nvPr/>
-        </p:nvSpPr>
-        <p:spPr>
-          <a:xfrm>
-            <a:off x="914400" y="1581912"/>
-            <a:ext cx="10058400" cy="411480"/>
-          </a:xfrm>
-          <a:prstGeom prst="rect">
-            <a:avLst/>
-          </a:prstGeom>
-          <a:noFill/>
-        </p:spPr>
-        <p:txBody>
-          <a:bodyPr wrap="square" anchor="t">
-            <a:spAutoFit/>
-          </a:bodyPr>
-          <a:lstStyle/>
-          <a:p>
-            <a:pPr algn="l">
-              <a:lnSpc>
-                <a:spcPct val="100000"/>
-              </a:lnSpc>
-            </a:pPr>
-            <a:r>
-              <a:rPr sz="1500" b="1">
-                <a:solidFill>
-                  <a:srgbClr val="334155"/>
-                </a:solidFill>
-                <a:latin typeface="Malgun Gothic"/>
-              </a:rPr>
-              <a:t>오늘 지사 매출·재원·출석 지표를 확인했나요?</a:t>
-            </a:r>
-          </a:p>
-        </p:txBody>
-      </p:sp>
-      <p:sp>
-        <p:nvSpPr>
-          <p:cNvPr id="9" name="Rounded Rectangle 8"/>
-          <p:cNvSpPr/>
-          <p:nvPr/>
-        </p:nvSpPr>
-        <p:spPr>
-          <a:xfrm>
-            <a:off x="457200" y="2212848"/>
-            <a:ext cx="292608" cy="292608"/>
-          </a:xfrm>
-          <a:prstGeom prst="roundRect">
-            <a:avLst/>
-          </a:prstGeom>
-          <a:solidFill>
-            <a:srgbClr val="FFFFFF"/>
-          </a:solidFill>
-          <a:ln w="12700">
-            <a:solidFill>
-              <a:srgbClr val="0D9488"/>
-            </a:solidFill>
-          </a:ln>
-          <a:effectLst/>
-        </p:spPr>
-        <p:style>
-          <a:lnRef idx="1">
-            <a:schemeClr val="accent1"/>
-          </a:lnRef>
-          <a:fillRef idx="3">
-            <a:schemeClr val="accent1"/>
-          </a:fillRef>
-          <a:effectRef idx="2">
-            <a:schemeClr val="accent1"/>
-          </a:effectRef>
-          <a:fontRef idx="minor">
-            <a:schemeClr val="lt1"/>
-          </a:fontRef>
-        </p:style>
-        <p:txBody>
-          <a:bodyPr rtlCol="0" anchor="ctr"/>
-          <a:lstStyle/>
-          <a:p>
-            <a:pPr algn="ctr"/>
-          </a:p>
-        </p:txBody>
-      </p:sp>
-      <p:sp>
-        <p:nvSpPr>
-          <p:cNvPr id="10" name="TextBox 9"/>
-          <p:cNvSpPr txBox="1"/>
-          <p:nvPr/>
-        </p:nvSpPr>
-        <p:spPr>
-          <a:xfrm>
-            <a:off x="914400" y="2148840"/>
-            <a:ext cx="10058400" cy="411480"/>
-          </a:xfrm>
-          <a:prstGeom prst="rect">
-            <a:avLst/>
-          </a:prstGeom>
-          <a:noFill/>
-        </p:spPr>
-        <p:txBody>
-          <a:bodyPr wrap="square" anchor="t">
-            <a:spAutoFit/>
-          </a:bodyPr>
-          <a:lstStyle/>
-          <a:p>
-            <a:pPr algn="l">
-              <a:lnSpc>
-                <a:spcPct val="100000"/>
-              </a:lnSpc>
-            </a:pPr>
-            <a:r>
-              <a:rPr sz="1500" b="1">
-                <a:solidFill>
-                  <a:srgbClr val="334155"/>
-                </a:solidFill>
-                <a:latin typeface="Malgun Gothic"/>
-              </a:rPr>
-              <a:t>부진한 대리점을 파악하고 지원했나요?</a:t>
-            </a:r>
-          </a:p>
-        </p:txBody>
-      </p:sp>
-      <p:sp>
-        <p:nvSpPr>
-          <p:cNvPr id="11" name="Rounded Rectangle 10"/>
-          <p:cNvSpPr/>
-          <p:nvPr/>
-        </p:nvSpPr>
-        <p:spPr>
-          <a:xfrm>
-            <a:off x="457200" y="2779776"/>
-            <a:ext cx="292608" cy="292608"/>
-          </a:xfrm>
-          <a:prstGeom prst="roundRect">
-            <a:avLst/>
-          </a:prstGeom>
-          <a:solidFill>
-            <a:srgbClr val="FFFFFF"/>
-          </a:solidFill>
-          <a:ln w="12700">
-            <a:solidFill>
-              <a:srgbClr val="0D9488"/>
-            </a:solidFill>
-          </a:ln>
-          <a:effectLst/>
-        </p:spPr>
-        <p:style>
-          <a:lnRef idx="1">
-            <a:schemeClr val="accent1"/>
-          </a:lnRef>
-          <a:fillRef idx="3">
-            <a:schemeClr val="accent1"/>
-          </a:fillRef>
-          <a:effectRef idx="2">
-            <a:schemeClr val="accent1"/>
-          </a:effectRef>
-          <a:fontRef idx="minor">
-            <a:schemeClr val="lt1"/>
-          </a:fontRef>
-        </p:style>
-        <p:txBody>
-          <a:bodyPr rtlCol="0" anchor="ctr"/>
-          <a:lstStyle/>
-          <a:p>
-            <a:pPr algn="ctr"/>
-          </a:p>
-        </p:txBody>
-      </p:sp>
-      <p:sp>
-        <p:nvSpPr>
-          <p:cNvPr id="12" name="TextBox 11"/>
-          <p:cNvSpPr txBox="1"/>
-          <p:nvPr/>
-        </p:nvSpPr>
-        <p:spPr>
-          <a:xfrm>
-            <a:off x="914400" y="2715768"/>
-            <a:ext cx="10058400" cy="411480"/>
-          </a:xfrm>
-          <a:prstGeom prst="rect">
-            <a:avLst/>
-          </a:prstGeom>
-          <a:noFill/>
-        </p:spPr>
-        <p:txBody>
-          <a:bodyPr wrap="square" anchor="t">
-            <a:spAutoFit/>
-          </a:bodyPr>
-          <a:lstStyle/>
-          <a:p>
-            <a:pPr algn="l">
-              <a:lnSpc>
-                <a:spcPct val="100000"/>
-              </a:lnSpc>
-            </a:pPr>
-            <a:r>
-              <a:rPr sz="1500" b="1">
-                <a:solidFill>
-                  <a:srgbClr val="334155"/>
-                </a:solidFill>
-                <a:latin typeface="Malgun Gothic"/>
-              </a:rPr>
-              <a:t>이번 달 정산(수령·배분)을 점검했나요?</a:t>
-            </a:r>
-          </a:p>
-        </p:txBody>
-      </p:sp>
-      <p:sp>
-        <p:nvSpPr>
-          <p:cNvPr id="13" name="Rounded Rectangle 12"/>
-          <p:cNvSpPr/>
-          <p:nvPr/>
-        </p:nvSpPr>
-        <p:spPr>
-          <a:xfrm>
-            <a:off x="457200" y="3346704"/>
-            <a:ext cx="292608" cy="292608"/>
-          </a:xfrm>
-          <a:prstGeom prst="roundRect">
-            <a:avLst/>
-          </a:prstGeom>
-          <a:solidFill>
-            <a:srgbClr val="FFFFFF"/>
-          </a:solidFill>
-          <a:ln w="12700">
-            <a:solidFill>
-              <a:srgbClr val="0D9488"/>
-            </a:solidFill>
-          </a:ln>
-          <a:effectLst/>
-        </p:spPr>
-        <p:style>
-          <a:lnRef idx="1">
-            <a:schemeClr val="accent1"/>
-          </a:lnRef>
-          <a:fillRef idx="3">
-            <a:schemeClr val="accent1"/>
-          </a:fillRef>
-          <a:effectRef idx="2">
-            <a:schemeClr val="accent1"/>
-          </a:effectRef>
-          <a:fontRef idx="minor">
-            <a:schemeClr val="lt1"/>
-          </a:fontRef>
-        </p:style>
-        <p:txBody>
-          <a:bodyPr rtlCol="0" anchor="ctr"/>
-          <a:lstStyle/>
-          <a:p>
-            <a:pPr algn="ctr"/>
-          </a:p>
-        </p:txBody>
-      </p:sp>
-      <p:sp>
-        <p:nvSpPr>
-          <p:cNvPr id="14" name="TextBox 13"/>
-          <p:cNvSpPr txBox="1"/>
-          <p:nvPr/>
-        </p:nvSpPr>
-        <p:spPr>
-          <a:xfrm>
-            <a:off x="914400" y="3282696"/>
-            <a:ext cx="10058400" cy="411480"/>
-          </a:xfrm>
-          <a:prstGeom prst="rect">
-            <a:avLst/>
-          </a:prstGeom>
-          <a:noFill/>
-        </p:spPr>
-        <p:txBody>
-          <a:bodyPr wrap="square" anchor="t">
-            <a:spAutoFit/>
-          </a:bodyPr>
-          <a:lstStyle/>
-          <a:p>
-            <a:pPr algn="l">
-              <a:lnSpc>
-                <a:spcPct val="100000"/>
-              </a:lnSpc>
-            </a:pPr>
-            <a:r>
-              <a:rPr sz="1500" b="1">
-                <a:solidFill>
-                  <a:srgbClr val="334155"/>
-                </a:solidFill>
-                <a:latin typeface="Malgun Gothic"/>
-              </a:rPr>
-              <a:t>미납·환불 건을 확인했나요?</a:t>
-            </a:r>
-          </a:p>
-        </p:txBody>
-      </p:sp>
-      <p:sp>
-        <p:nvSpPr>
-          <p:cNvPr id="15" name="Rounded Rectangle 14"/>
-          <p:cNvSpPr/>
-          <p:nvPr/>
-        </p:nvSpPr>
-        <p:spPr>
-          <a:xfrm>
-            <a:off x="457200" y="3913632"/>
-            <a:ext cx="292608" cy="292608"/>
-          </a:xfrm>
-          <a:prstGeom prst="roundRect">
-            <a:avLst/>
-          </a:prstGeom>
-          <a:solidFill>
-            <a:srgbClr val="FFFFFF"/>
-          </a:solidFill>
-          <a:ln w="12700">
-            <a:solidFill>
-              <a:srgbClr val="0D9488"/>
-            </a:solidFill>
-          </a:ln>
-          <a:effectLst/>
-        </p:spPr>
-        <p:style>
-          <a:lnRef idx="1">
-            <a:schemeClr val="accent1"/>
-          </a:lnRef>
-          <a:fillRef idx="3">
-            <a:schemeClr val="accent1"/>
-          </a:fillRef>
-          <a:effectRef idx="2">
-            <a:schemeClr val="accent1"/>
-          </a:effectRef>
-          <a:fontRef idx="minor">
-            <a:schemeClr val="lt1"/>
-          </a:fontRef>
-        </p:style>
-        <p:txBody>
-          <a:bodyPr rtlCol="0" anchor="ctr"/>
-          <a:lstStyle/>
-          <a:p>
-            <a:pPr algn="ctr"/>
-          </a:p>
-        </p:txBody>
-      </p:sp>
-      <p:sp>
-        <p:nvSpPr>
-          <p:cNvPr id="16" name="TextBox 15"/>
-          <p:cNvSpPr txBox="1"/>
-          <p:nvPr/>
-        </p:nvSpPr>
-        <p:spPr>
-          <a:xfrm>
-            <a:off x="914400" y="3849624"/>
-            <a:ext cx="10058400" cy="411480"/>
-          </a:xfrm>
-          <a:prstGeom prst="rect">
-            <a:avLst/>
-          </a:prstGeom>
-          <a:noFill/>
-        </p:spPr>
-        <p:txBody>
-          <a:bodyPr wrap="square" anchor="t">
-            <a:spAutoFit/>
-          </a:bodyPr>
-          <a:lstStyle/>
-          <a:p>
-            <a:pPr algn="l">
-              <a:lnSpc>
-                <a:spcPct val="100000"/>
-              </a:lnSpc>
-            </a:pPr>
-            <a:r>
-              <a:rPr sz="1500" b="1">
-                <a:solidFill>
-                  <a:srgbClr val="334155"/>
-                </a:solidFill>
-                <a:latin typeface="Malgun Gothic"/>
-              </a:rPr>
-              <a:t>이탈위험 학생·대리점을 챙겼나요?</a:t>
-            </a:r>
-          </a:p>
-        </p:txBody>
-      </p:sp>
-      <p:sp>
-        <p:nvSpPr>
-          <p:cNvPr id="17" name="Rounded Rectangle 16"/>
-          <p:cNvSpPr/>
-          <p:nvPr/>
-        </p:nvSpPr>
-        <p:spPr>
-          <a:xfrm>
-            <a:off x="457200" y="4480560"/>
-            <a:ext cx="292608" cy="292608"/>
-          </a:xfrm>
-          <a:prstGeom prst="roundRect">
-            <a:avLst/>
-          </a:prstGeom>
-          <a:solidFill>
-            <a:srgbClr val="FFFFFF"/>
-          </a:solidFill>
-          <a:ln w="12700">
-            <a:solidFill>
-              <a:srgbClr val="0D9488"/>
-            </a:solidFill>
-          </a:ln>
-          <a:effectLst/>
-        </p:spPr>
-        <p:style>
-          <a:lnRef idx="1">
-            <a:schemeClr val="accent1"/>
-          </a:lnRef>
-          <a:fillRef idx="3">
-            <a:schemeClr val="accent1"/>
-          </a:fillRef>
-          <a:effectRef idx="2">
-            <a:schemeClr val="accent1"/>
-          </a:effectRef>
-          <a:fontRef idx="minor">
-            <a:schemeClr val="lt1"/>
-          </a:fontRef>
-        </p:style>
-        <p:txBody>
-          <a:bodyPr rtlCol="0" anchor="ctr"/>
-          <a:lstStyle/>
-          <a:p>
-            <a:pPr algn="ctr"/>
-          </a:p>
-        </p:txBody>
-      </p:sp>
-      <p:sp>
-        <p:nvSpPr>
-          <p:cNvPr id="18" name="TextBox 17"/>
-          <p:cNvSpPr txBox="1"/>
-          <p:nvPr/>
-        </p:nvSpPr>
-        <p:spPr>
-          <a:xfrm>
-            <a:off x="914400" y="4416552"/>
-            <a:ext cx="10058400" cy="411480"/>
-          </a:xfrm>
-          <a:prstGeom prst="rect">
-            <a:avLst/>
-          </a:prstGeom>
-          <a:noFill/>
-        </p:spPr>
-        <p:txBody>
-          <a:bodyPr wrap="square" anchor="t">
-            <a:spAutoFit/>
-          </a:bodyPr>
-          <a:lstStyle/>
-          <a:p>
-            <a:pPr algn="l">
-              <a:lnSpc>
-                <a:spcPct val="100000"/>
-              </a:lnSpc>
-            </a:pPr>
-            <a:r>
-              <a:rPr sz="1500" b="1">
-                <a:solidFill>
-                  <a:srgbClr val="334155"/>
-                </a:solidFill>
-                <a:latin typeface="Malgun Gothic"/>
-              </a:rPr>
-              <a:t>신규 대리점 온보딩을 진행했나요?</a:t>
-            </a:r>
-          </a:p>
-        </p:txBody>
-      </p:sp>
-      <p:sp>
-        <p:nvSpPr>
-          <p:cNvPr id="19" name="Rounded Rectangle 18"/>
-          <p:cNvSpPr/>
-          <p:nvPr/>
-        </p:nvSpPr>
-        <p:spPr>
-          <a:xfrm>
-            <a:off x="457200" y="5047488"/>
-            <a:ext cx="292608" cy="292608"/>
-          </a:xfrm>
-          <a:prstGeom prst="roundRect">
-            <a:avLst/>
-          </a:prstGeom>
-          <a:solidFill>
-            <a:srgbClr val="FFFFFF"/>
-          </a:solidFill>
-          <a:ln w="12700">
-            <a:solidFill>
-              <a:srgbClr val="0D9488"/>
-            </a:solidFill>
-          </a:ln>
-          <a:effectLst/>
-        </p:spPr>
-        <p:style>
-          <a:lnRef idx="1">
-            <a:schemeClr val="accent1"/>
-          </a:lnRef>
-          <a:fillRef idx="3">
-            <a:schemeClr val="accent1"/>
-          </a:fillRef>
-          <a:effectRef idx="2">
-            <a:schemeClr val="accent1"/>
-          </a:effectRef>
-          <a:fontRef idx="minor">
-            <a:schemeClr val="lt1"/>
-          </a:fontRef>
-        </p:style>
-        <p:txBody>
-          <a:bodyPr rtlCol="0" anchor="ctr"/>
-          <a:lstStyle/>
-          <a:p>
-            <a:pPr algn="ctr"/>
-          </a:p>
-        </p:txBody>
-      </p:sp>
-      <p:sp>
-        <p:nvSpPr>
-          <p:cNvPr id="20" name="TextBox 19"/>
-          <p:cNvSpPr txBox="1"/>
-          <p:nvPr/>
-        </p:nvSpPr>
-        <p:spPr>
-          <a:xfrm>
-            <a:off x="914400" y="4983480"/>
-            <a:ext cx="10058400" cy="411480"/>
-          </a:xfrm>
-          <a:prstGeom prst="rect">
-            <a:avLst/>
-          </a:prstGeom>
-          <a:noFill/>
-        </p:spPr>
-        <p:txBody>
-          <a:bodyPr wrap="square" anchor="t">
-            <a:spAutoFit/>
-          </a:bodyPr>
-          <a:lstStyle/>
-          <a:p>
-            <a:pPr algn="l">
-              <a:lnSpc>
-                <a:spcPct val="100000"/>
-              </a:lnSpc>
-            </a:pPr>
-            <a:r>
-              <a:rPr sz="1500" b="1">
-                <a:solidFill>
-                  <a:srgbClr val="334155"/>
-                </a:solidFill>
-                <a:latin typeface="Malgun Gothic"/>
-              </a:rPr>
-              <a:t>월간 리포트를 공유했나요?</a:t>
-            </a:r>
-          </a:p>
-        </p:txBody>
-      </p:sp>
-      <p:pic>
-        <p:nvPicPr>
-          <p:cNvPr id="21" name="Picture 20" descr="mango_char.png"/>
-          <p:cNvPicPr>
-            <a:picLocks noChangeAspect="1"/>
-          </p:cNvPicPr>
-          <p:nvPr/>
-        </p:nvPicPr>
-        <p:blipFill>
-          <a:blip r:embed="rId2"/>
-          <a:stretch>
-            <a:fillRect/>
-          </a:stretch>
-        </p:blipFill>
-        <p:spPr>
-          <a:xfrm>
-            <a:off x="9153162" y="4480559"/>
-            <a:ext cx="2489892" cy="2011680"/>
-          </a:xfrm>
-          <a:prstGeom prst="rect">
-            <a:avLst/>
-          </a:prstGeom>
-        </p:spPr>
-      </p:pic>
     </p:spTree>
   </p:cSld>
   <p:clrMapOvr>
@@ -15971,6 +16356,1707 @@
                 </a:solidFill>
                 <a:latin typeface="Malgun Gothic"/>
               </a:rPr>
+              <a:t>자주 묻는 질문 (FAQ)</a:t>
+            </a:r>
+          </a:p>
+        </p:txBody>
+      </p:sp>
+      <p:sp>
+        <p:nvSpPr>
+          <p:cNvPr id="6" name="TextBox 5"/>
+          <p:cNvSpPr txBox="1"/>
+          <p:nvPr/>
+        </p:nvSpPr>
+        <p:spPr>
+          <a:xfrm>
+            <a:off x="365760" y="868680"/>
+            <a:ext cx="9144000" cy="457200"/>
+          </a:xfrm>
+          <a:prstGeom prst="rect">
+            <a:avLst/>
+          </a:prstGeom>
+          <a:noFill/>
+        </p:spPr>
+        <p:txBody>
+          <a:bodyPr wrap="square" anchor="t">
+            <a:spAutoFit/>
+          </a:bodyPr>
+          <a:lstStyle/>
+          <a:p>
+            <a:pPr algn="l">
+              <a:lnSpc>
+                <a:spcPct val="100000"/>
+              </a:lnSpc>
+            </a:pPr>
+            <a:r>
+              <a:rPr sz="2200" b="1">
+                <a:solidFill>
+                  <a:srgbClr val="0D9488"/>
+                </a:solidFill>
+                <a:latin typeface="Malgun Gothic"/>
+              </a:rPr>
+              <a:t>❓ 자주 묻는 질문 (FAQ)</a:t>
+            </a:r>
+          </a:p>
+        </p:txBody>
+      </p:sp>
+      <p:sp>
+        <p:nvSpPr>
+          <p:cNvPr id="7" name="Rounded Rectangle 6"/>
+          <p:cNvSpPr/>
+          <p:nvPr/>
+        </p:nvSpPr>
+        <p:spPr>
+          <a:xfrm>
+            <a:off x="365760" y="1554480"/>
+            <a:ext cx="11460175" cy="868680"/>
+          </a:xfrm>
+          <a:prstGeom prst="roundRect">
+            <a:avLst/>
+          </a:prstGeom>
+          <a:solidFill>
+            <a:srgbClr val="F8FAFC"/>
+          </a:solidFill>
+          <a:ln w="12700">
+            <a:solidFill>
+              <a:srgbClr val="E2E8F0"/>
+            </a:solidFill>
+          </a:ln>
+          <a:effectLst/>
+        </p:spPr>
+        <p:style>
+          <a:lnRef idx="1">
+            <a:schemeClr val="accent1"/>
+          </a:lnRef>
+          <a:fillRef idx="3">
+            <a:schemeClr val="accent1"/>
+          </a:fillRef>
+          <a:effectRef idx="2">
+            <a:schemeClr val="accent1"/>
+          </a:effectRef>
+          <a:fontRef idx="minor">
+            <a:schemeClr val="lt1"/>
+          </a:fontRef>
+        </p:style>
+        <p:txBody>
+          <a:bodyPr rtlCol="0" anchor="ctr"/>
+          <a:lstStyle/>
+          <a:p>
+            <a:pPr algn="ctr"/>
+          </a:p>
+        </p:txBody>
+      </p:sp>
+      <p:sp>
+        <p:nvSpPr>
+          <p:cNvPr id="8" name="TextBox 7"/>
+          <p:cNvSpPr txBox="1"/>
+          <p:nvPr/>
+        </p:nvSpPr>
+        <p:spPr>
+          <a:xfrm>
+            <a:off x="548640" y="1627632"/>
+            <a:ext cx="11094415" cy="365760"/>
+          </a:xfrm>
+          <a:prstGeom prst="rect">
+            <a:avLst/>
+          </a:prstGeom>
+          <a:noFill/>
+        </p:spPr>
+        <p:txBody>
+          <a:bodyPr wrap="square" anchor="t">
+            <a:spAutoFit/>
+          </a:bodyPr>
+          <a:lstStyle/>
+          <a:p>
+            <a:pPr algn="l">
+              <a:lnSpc>
+                <a:spcPct val="100000"/>
+              </a:lnSpc>
+            </a:pPr>
+            <a:r>
+              <a:rPr sz="1350" b="1">
+                <a:solidFill>
+                  <a:srgbClr val="0D9488"/>
+                </a:solidFill>
+                <a:latin typeface="Malgun Gothic"/>
+              </a:rPr>
+              <a:t>Q. 어디서 접속하나요?</a:t>
+            </a:r>
+          </a:p>
+        </p:txBody>
+      </p:sp>
+      <p:sp>
+        <p:nvSpPr>
+          <p:cNvPr id="9" name="TextBox 8"/>
+          <p:cNvSpPr txBox="1"/>
+          <p:nvPr/>
+        </p:nvSpPr>
+        <p:spPr>
+          <a:xfrm>
+            <a:off x="548640" y="1965960"/>
+            <a:ext cx="11094415" cy="411480"/>
+          </a:xfrm>
+          <a:prstGeom prst="rect">
+            <a:avLst/>
+          </a:prstGeom>
+          <a:noFill/>
+        </p:spPr>
+        <p:txBody>
+          <a:bodyPr wrap="square" anchor="t">
+            <a:spAutoFit/>
+          </a:bodyPr>
+          <a:lstStyle/>
+          <a:p>
+            <a:pPr algn="l">
+              <a:lnSpc>
+                <a:spcPct val="105000"/>
+              </a:lnSpc>
+            </a:pPr>
+            <a:r>
+              <a:rPr sz="1150" b="0">
+                <a:solidFill>
+                  <a:srgbClr val="475569"/>
+                </a:solidFill>
+                <a:latin typeface="Malgun Gothic"/>
+              </a:rPr>
+              <a:t>A. admin.mangoi.co.kr 에서 로그인해요. 권한(지사)에 따라 우리 지사 데이터만 자동으로 보여요.</a:t>
+            </a:r>
+          </a:p>
+        </p:txBody>
+      </p:sp>
+      <p:sp>
+        <p:nvSpPr>
+          <p:cNvPr id="10" name="Rounded Rectangle 9"/>
+          <p:cNvSpPr/>
+          <p:nvPr/>
+        </p:nvSpPr>
+        <p:spPr>
+          <a:xfrm>
+            <a:off x="365760" y="2542032"/>
+            <a:ext cx="11460175" cy="868680"/>
+          </a:xfrm>
+          <a:prstGeom prst="roundRect">
+            <a:avLst/>
+          </a:prstGeom>
+          <a:solidFill>
+            <a:srgbClr val="F8FAFC"/>
+          </a:solidFill>
+          <a:ln w="12700">
+            <a:solidFill>
+              <a:srgbClr val="E2E8F0"/>
+            </a:solidFill>
+          </a:ln>
+          <a:effectLst/>
+        </p:spPr>
+        <p:style>
+          <a:lnRef idx="1">
+            <a:schemeClr val="accent1"/>
+          </a:lnRef>
+          <a:fillRef idx="3">
+            <a:schemeClr val="accent1"/>
+          </a:fillRef>
+          <a:effectRef idx="2">
+            <a:schemeClr val="accent1"/>
+          </a:effectRef>
+          <a:fontRef idx="minor">
+            <a:schemeClr val="lt1"/>
+          </a:fontRef>
+        </p:style>
+        <p:txBody>
+          <a:bodyPr rtlCol="0" anchor="ctr"/>
+          <a:lstStyle/>
+          <a:p>
+            <a:pPr algn="ctr"/>
+          </a:p>
+        </p:txBody>
+      </p:sp>
+      <p:sp>
+        <p:nvSpPr>
+          <p:cNvPr id="11" name="TextBox 10"/>
+          <p:cNvSpPr txBox="1"/>
+          <p:nvPr/>
+        </p:nvSpPr>
+        <p:spPr>
+          <a:xfrm>
+            <a:off x="548640" y="2615184"/>
+            <a:ext cx="11094415" cy="365760"/>
+          </a:xfrm>
+          <a:prstGeom prst="rect">
+            <a:avLst/>
+          </a:prstGeom>
+          <a:noFill/>
+        </p:spPr>
+        <p:txBody>
+          <a:bodyPr wrap="square" anchor="t">
+            <a:spAutoFit/>
+          </a:bodyPr>
+          <a:lstStyle/>
+          <a:p>
+            <a:pPr algn="l">
+              <a:lnSpc>
+                <a:spcPct val="100000"/>
+              </a:lnSpc>
+            </a:pPr>
+            <a:r>
+              <a:rPr sz="1350" b="1">
+                <a:solidFill>
+                  <a:srgbClr val="0D9488"/>
+                </a:solidFill>
+                <a:latin typeface="Malgun Gothic"/>
+              </a:rPr>
+              <a:t>Q. 다른 지사 데이터도 보이나요?</a:t>
+            </a:r>
+          </a:p>
+        </p:txBody>
+      </p:sp>
+      <p:sp>
+        <p:nvSpPr>
+          <p:cNvPr id="12" name="TextBox 11"/>
+          <p:cNvSpPr txBox="1"/>
+          <p:nvPr/>
+        </p:nvSpPr>
+        <p:spPr>
+          <a:xfrm>
+            <a:off x="548640" y="2953512"/>
+            <a:ext cx="11094415" cy="411480"/>
+          </a:xfrm>
+          <a:prstGeom prst="rect">
+            <a:avLst/>
+          </a:prstGeom>
+          <a:noFill/>
+        </p:spPr>
+        <p:txBody>
+          <a:bodyPr wrap="square" anchor="t">
+            <a:spAutoFit/>
+          </a:bodyPr>
+          <a:lstStyle/>
+          <a:p>
+            <a:pPr algn="l">
+              <a:lnSpc>
+                <a:spcPct val="105000"/>
+              </a:lnSpc>
+            </a:pPr>
+            <a:r>
+              <a:rPr sz="1150" b="0">
+                <a:solidFill>
+                  <a:srgbClr val="475569"/>
+                </a:solidFill>
+                <a:latin typeface="Malgun Gothic"/>
+              </a:rPr>
+              <a:t>A. 아니요. 권한 범위상 우리 지사와 산하 대리점 데이터만 보입니다.</a:t>
+            </a:r>
+          </a:p>
+        </p:txBody>
+      </p:sp>
+      <p:sp>
+        <p:nvSpPr>
+          <p:cNvPr id="13" name="Rounded Rectangle 12"/>
+          <p:cNvSpPr/>
+          <p:nvPr/>
+        </p:nvSpPr>
+        <p:spPr>
+          <a:xfrm>
+            <a:off x="365760" y="3529584"/>
+            <a:ext cx="11460175" cy="868680"/>
+          </a:xfrm>
+          <a:prstGeom prst="roundRect">
+            <a:avLst/>
+          </a:prstGeom>
+          <a:solidFill>
+            <a:srgbClr val="F8FAFC"/>
+          </a:solidFill>
+          <a:ln w="12700">
+            <a:solidFill>
+              <a:srgbClr val="E2E8F0"/>
+            </a:solidFill>
+          </a:ln>
+          <a:effectLst/>
+        </p:spPr>
+        <p:style>
+          <a:lnRef idx="1">
+            <a:schemeClr val="accent1"/>
+          </a:lnRef>
+          <a:fillRef idx="3">
+            <a:schemeClr val="accent1"/>
+          </a:fillRef>
+          <a:effectRef idx="2">
+            <a:schemeClr val="accent1"/>
+          </a:effectRef>
+          <a:fontRef idx="minor">
+            <a:schemeClr val="lt1"/>
+          </a:fontRef>
+        </p:style>
+        <p:txBody>
+          <a:bodyPr rtlCol="0" anchor="ctr"/>
+          <a:lstStyle/>
+          <a:p>
+            <a:pPr algn="ctr"/>
+          </a:p>
+        </p:txBody>
+      </p:sp>
+      <p:sp>
+        <p:nvSpPr>
+          <p:cNvPr id="14" name="TextBox 13"/>
+          <p:cNvSpPr txBox="1"/>
+          <p:nvPr/>
+        </p:nvSpPr>
+        <p:spPr>
+          <a:xfrm>
+            <a:off x="548640" y="3602736"/>
+            <a:ext cx="11094415" cy="365760"/>
+          </a:xfrm>
+          <a:prstGeom prst="rect">
+            <a:avLst/>
+          </a:prstGeom>
+          <a:noFill/>
+        </p:spPr>
+        <p:txBody>
+          <a:bodyPr wrap="square" anchor="t">
+            <a:spAutoFit/>
+          </a:bodyPr>
+          <a:lstStyle/>
+          <a:p>
+            <a:pPr algn="l">
+              <a:lnSpc>
+                <a:spcPct val="100000"/>
+              </a:lnSpc>
+            </a:pPr>
+            <a:r>
+              <a:rPr sz="1350" b="1">
+                <a:solidFill>
+                  <a:srgbClr val="0D9488"/>
+                </a:solidFill>
+                <a:latin typeface="Malgun Gothic"/>
+              </a:rPr>
+              <a:t>Q. 정산은 어떻게 계산되나요?</a:t>
+            </a:r>
+          </a:p>
+        </p:txBody>
+      </p:sp>
+      <p:sp>
+        <p:nvSpPr>
+          <p:cNvPr id="15" name="TextBox 14"/>
+          <p:cNvSpPr txBox="1"/>
+          <p:nvPr/>
+        </p:nvSpPr>
+        <p:spPr>
+          <a:xfrm>
+            <a:off x="548640" y="3941064"/>
+            <a:ext cx="11094415" cy="411480"/>
+          </a:xfrm>
+          <a:prstGeom prst="rect">
+            <a:avLst/>
+          </a:prstGeom>
+          <a:noFill/>
+        </p:spPr>
+        <p:txBody>
+          <a:bodyPr wrap="square" anchor="t">
+            <a:spAutoFit/>
+          </a:bodyPr>
+          <a:lstStyle/>
+          <a:p>
+            <a:pPr algn="l">
+              <a:lnSpc>
+                <a:spcPct val="105000"/>
+              </a:lnSpc>
+            </a:pPr>
+            <a:r>
+              <a:rPr sz="1150" b="0">
+                <a:solidFill>
+                  <a:srgbClr val="475569"/>
+                </a:solidFill>
+                <a:latin typeface="Malgun Gothic"/>
+              </a:rPr>
+              <a:t>A. 조직 트리(본사→지사→대리점)를 따라 매출·수수료가 자동 계산됩니다. 월간 리포트에서 확인하세요.</a:t>
+            </a:r>
+          </a:p>
+        </p:txBody>
+      </p:sp>
+      <p:sp>
+        <p:nvSpPr>
+          <p:cNvPr id="16" name="Rounded Rectangle 15"/>
+          <p:cNvSpPr/>
+          <p:nvPr/>
+        </p:nvSpPr>
+        <p:spPr>
+          <a:xfrm>
+            <a:off x="365760" y="4517136"/>
+            <a:ext cx="11460175" cy="868680"/>
+          </a:xfrm>
+          <a:prstGeom prst="roundRect">
+            <a:avLst/>
+          </a:prstGeom>
+          <a:solidFill>
+            <a:srgbClr val="F8FAFC"/>
+          </a:solidFill>
+          <a:ln w="12700">
+            <a:solidFill>
+              <a:srgbClr val="E2E8F0"/>
+            </a:solidFill>
+          </a:ln>
+          <a:effectLst/>
+        </p:spPr>
+        <p:style>
+          <a:lnRef idx="1">
+            <a:schemeClr val="accent1"/>
+          </a:lnRef>
+          <a:fillRef idx="3">
+            <a:schemeClr val="accent1"/>
+          </a:fillRef>
+          <a:effectRef idx="2">
+            <a:schemeClr val="accent1"/>
+          </a:effectRef>
+          <a:fontRef idx="minor">
+            <a:schemeClr val="lt1"/>
+          </a:fontRef>
+        </p:style>
+        <p:txBody>
+          <a:bodyPr rtlCol="0" anchor="ctr"/>
+          <a:lstStyle/>
+          <a:p>
+            <a:pPr algn="ctr"/>
+          </a:p>
+        </p:txBody>
+      </p:sp>
+      <p:sp>
+        <p:nvSpPr>
+          <p:cNvPr id="17" name="TextBox 16"/>
+          <p:cNvSpPr txBox="1"/>
+          <p:nvPr/>
+        </p:nvSpPr>
+        <p:spPr>
+          <a:xfrm>
+            <a:off x="548640" y="4590288"/>
+            <a:ext cx="11094415" cy="365760"/>
+          </a:xfrm>
+          <a:prstGeom prst="rect">
+            <a:avLst/>
+          </a:prstGeom>
+          <a:noFill/>
+        </p:spPr>
+        <p:txBody>
+          <a:bodyPr wrap="square" anchor="t">
+            <a:spAutoFit/>
+          </a:bodyPr>
+          <a:lstStyle/>
+          <a:p>
+            <a:pPr algn="l">
+              <a:lnSpc>
+                <a:spcPct val="100000"/>
+              </a:lnSpc>
+            </a:pPr>
+            <a:r>
+              <a:rPr sz="1350" b="1">
+                <a:solidFill>
+                  <a:srgbClr val="0D9488"/>
+                </a:solidFill>
+                <a:latin typeface="Malgun Gothic"/>
+              </a:rPr>
+              <a:t>Q. 대리점 성과가 부진해요.</a:t>
+            </a:r>
+          </a:p>
+        </p:txBody>
+      </p:sp>
+      <p:sp>
+        <p:nvSpPr>
+          <p:cNvPr id="18" name="TextBox 17"/>
+          <p:cNvSpPr txBox="1"/>
+          <p:nvPr/>
+        </p:nvSpPr>
+        <p:spPr>
+          <a:xfrm>
+            <a:off x="548640" y="4928616"/>
+            <a:ext cx="11094415" cy="411480"/>
+          </a:xfrm>
+          <a:prstGeom prst="rect">
+            <a:avLst/>
+          </a:prstGeom>
+          <a:noFill/>
+        </p:spPr>
+        <p:txBody>
+          <a:bodyPr wrap="square" anchor="t">
+            <a:spAutoFit/>
+          </a:bodyPr>
+          <a:lstStyle/>
+          <a:p>
+            <a:pPr algn="l">
+              <a:lnSpc>
+                <a:spcPct val="105000"/>
+              </a:lnSpc>
+            </a:pPr>
+            <a:r>
+              <a:rPr sz="1150" b="0">
+                <a:solidFill>
+                  <a:srgbClr val="475569"/>
+                </a:solidFill>
+                <a:latin typeface="Malgun Gothic"/>
+              </a:rPr>
+              <a:t>A. 리텐션·회계·리포트로 원인을 찾고, 온보딩·코칭·인센티브로 지원하세요. 우수 사례 공유도 효과적입니다.</a:t>
+            </a:r>
+          </a:p>
+        </p:txBody>
+      </p:sp>
+      <p:sp>
+        <p:nvSpPr>
+          <p:cNvPr id="19" name="Rounded Rectangle 18"/>
+          <p:cNvSpPr/>
+          <p:nvPr/>
+        </p:nvSpPr>
+        <p:spPr>
+          <a:xfrm>
+            <a:off x="365760" y="5504688"/>
+            <a:ext cx="11460175" cy="868680"/>
+          </a:xfrm>
+          <a:prstGeom prst="roundRect">
+            <a:avLst/>
+          </a:prstGeom>
+          <a:solidFill>
+            <a:srgbClr val="F8FAFC"/>
+          </a:solidFill>
+          <a:ln w="12700">
+            <a:solidFill>
+              <a:srgbClr val="E2E8F0"/>
+            </a:solidFill>
+          </a:ln>
+          <a:effectLst/>
+        </p:spPr>
+        <p:style>
+          <a:lnRef idx="1">
+            <a:schemeClr val="accent1"/>
+          </a:lnRef>
+          <a:fillRef idx="3">
+            <a:schemeClr val="accent1"/>
+          </a:fillRef>
+          <a:effectRef idx="2">
+            <a:schemeClr val="accent1"/>
+          </a:effectRef>
+          <a:fontRef idx="minor">
+            <a:schemeClr val="lt1"/>
+          </a:fontRef>
+        </p:style>
+        <p:txBody>
+          <a:bodyPr rtlCol="0" anchor="ctr"/>
+          <a:lstStyle/>
+          <a:p>
+            <a:pPr algn="ctr"/>
+          </a:p>
+        </p:txBody>
+      </p:sp>
+      <p:sp>
+        <p:nvSpPr>
+          <p:cNvPr id="20" name="TextBox 19"/>
+          <p:cNvSpPr txBox="1"/>
+          <p:nvPr/>
+        </p:nvSpPr>
+        <p:spPr>
+          <a:xfrm>
+            <a:off x="548640" y="5577840"/>
+            <a:ext cx="11094415" cy="365760"/>
+          </a:xfrm>
+          <a:prstGeom prst="rect">
+            <a:avLst/>
+          </a:prstGeom>
+          <a:noFill/>
+        </p:spPr>
+        <p:txBody>
+          <a:bodyPr wrap="square" anchor="t">
+            <a:spAutoFit/>
+          </a:bodyPr>
+          <a:lstStyle/>
+          <a:p>
+            <a:pPr algn="l">
+              <a:lnSpc>
+                <a:spcPct val="100000"/>
+              </a:lnSpc>
+            </a:pPr>
+            <a:r>
+              <a:rPr sz="1350" b="1">
+                <a:solidFill>
+                  <a:srgbClr val="0D9488"/>
+                </a:solidFill>
+                <a:latin typeface="Malgun Gothic"/>
+              </a:rPr>
+              <a:t>Q. 시스템 문제가 생겼어요.</a:t>
+            </a:r>
+          </a:p>
+        </p:txBody>
+      </p:sp>
+      <p:sp>
+        <p:nvSpPr>
+          <p:cNvPr id="21" name="TextBox 20"/>
+          <p:cNvSpPr txBox="1"/>
+          <p:nvPr/>
+        </p:nvSpPr>
+        <p:spPr>
+          <a:xfrm>
+            <a:off x="548640" y="5916168"/>
+            <a:ext cx="11094415" cy="411480"/>
+          </a:xfrm>
+          <a:prstGeom prst="rect">
+            <a:avLst/>
+          </a:prstGeom>
+          <a:noFill/>
+        </p:spPr>
+        <p:txBody>
+          <a:bodyPr wrap="square" anchor="t">
+            <a:spAutoFit/>
+          </a:bodyPr>
+          <a:lstStyle/>
+          <a:p>
+            <a:pPr algn="l">
+              <a:lnSpc>
+                <a:spcPct val="105000"/>
+              </a:lnSpc>
+            </a:pPr>
+            <a:r>
+              <a:rPr sz="1150" b="0">
+                <a:solidFill>
+                  <a:srgbClr val="475569"/>
+                </a:solidFill>
+                <a:latin typeface="Malgun Gothic"/>
+              </a:rPr>
+              <a:t>A. 본사 고객센터(전화·이메일·카카오·원격지원)로 문의하면 빠르게 해결됩니다.</a:t>
+            </a:r>
+          </a:p>
+        </p:txBody>
+      </p:sp>
+    </p:spTree>
+  </p:cSld>
+  <p:clrMapOvr>
+    <a:masterClrMapping/>
+  </p:clrMapOvr>
+</p:sld>
+</file>
+
+<file path=ppt/slides/slide23.xml><?xml version="1.0" encoding="utf-8"?>
+<p:sld xmlns:a="http://schemas.openxmlformats.org/drawingml/2006/main" xmlns:p="http://schemas.openxmlformats.org/presentationml/2006/main" xmlns:r="http://schemas.openxmlformats.org/officeDocument/2006/relationships">
+  <p:cSld>
+    <p:bg>
+      <p:bgPr>
+        <a:solidFill>
+          <a:srgbClr val="ECFDF5"/>
+        </a:solidFill>
+        <a:effectLst/>
+      </p:bgPr>
+    </p:bg>
+    <p:spTree>
+      <p:nvGrpSpPr>
+        <p:cNvPr id="1" name=""/>
+        <p:cNvGrpSpPr/>
+        <p:nvPr/>
+      </p:nvGrpSpPr>
+      <p:grpSpPr/>
+      <p:sp>
+        <p:nvSpPr>
+          <p:cNvPr id="2" name="Rectangle 1"/>
+          <p:cNvSpPr/>
+          <p:nvPr/>
+        </p:nvSpPr>
+        <p:spPr>
+          <a:xfrm>
+            <a:off x="0" y="0"/>
+            <a:ext cx="12191695" cy="566928"/>
+          </a:xfrm>
+          <a:prstGeom prst="rect">
+            <a:avLst/>
+          </a:prstGeom>
+          <a:solidFill>
+            <a:srgbClr val="0D9488"/>
+          </a:solidFill>
+          <a:ln>
+            <a:noFill/>
+          </a:ln>
+          <a:effectLst/>
+        </p:spPr>
+        <p:style>
+          <a:lnRef idx="1">
+            <a:schemeClr val="accent1"/>
+          </a:lnRef>
+          <a:fillRef idx="3">
+            <a:schemeClr val="accent1"/>
+          </a:fillRef>
+          <a:effectRef idx="2">
+            <a:schemeClr val="accent1"/>
+          </a:effectRef>
+          <a:fontRef idx="minor">
+            <a:schemeClr val="lt1"/>
+          </a:fontRef>
+        </p:style>
+        <p:txBody>
+          <a:bodyPr rtlCol="0" anchor="ctr"/>
+          <a:lstStyle/>
+          <a:p>
+            <a:pPr algn="ctr"/>
+          </a:p>
+        </p:txBody>
+      </p:sp>
+      <p:sp>
+        <p:nvSpPr>
+          <p:cNvPr id="3" name="Rectangle 2"/>
+          <p:cNvSpPr/>
+          <p:nvPr/>
+        </p:nvSpPr>
+        <p:spPr>
+          <a:xfrm>
+            <a:off x="0" y="566928"/>
+            <a:ext cx="12191695" cy="54864"/>
+          </a:xfrm>
+          <a:prstGeom prst="rect">
+            <a:avLst/>
+          </a:prstGeom>
+          <a:solidFill>
+            <a:srgbClr val="F59E0B"/>
+          </a:solidFill>
+          <a:ln>
+            <a:noFill/>
+          </a:ln>
+          <a:effectLst/>
+        </p:spPr>
+        <p:style>
+          <a:lnRef idx="1">
+            <a:schemeClr val="accent1"/>
+          </a:lnRef>
+          <a:fillRef idx="3">
+            <a:schemeClr val="accent1"/>
+          </a:fillRef>
+          <a:effectRef idx="2">
+            <a:schemeClr val="accent1"/>
+          </a:effectRef>
+          <a:fontRef idx="minor">
+            <a:schemeClr val="lt1"/>
+          </a:fontRef>
+        </p:style>
+        <p:txBody>
+          <a:bodyPr rtlCol="0" anchor="ctr"/>
+          <a:lstStyle/>
+          <a:p>
+            <a:pPr algn="ctr"/>
+          </a:p>
+        </p:txBody>
+      </p:sp>
+      <p:sp>
+        <p:nvSpPr>
+          <p:cNvPr id="4" name="TextBox 3"/>
+          <p:cNvSpPr txBox="1"/>
+          <p:nvPr/>
+        </p:nvSpPr>
+        <p:spPr>
+          <a:xfrm>
+            <a:off x="365760" y="27432"/>
+            <a:ext cx="7315200" cy="502920"/>
+          </a:xfrm>
+          <a:prstGeom prst="rect">
+            <a:avLst/>
+          </a:prstGeom>
+          <a:noFill/>
+        </p:spPr>
+        <p:txBody>
+          <a:bodyPr wrap="square" anchor="ctr">
+            <a:spAutoFit/>
+          </a:bodyPr>
+          <a:lstStyle/>
+          <a:p>
+            <a:pPr algn="l">
+              <a:lnSpc>
+                <a:spcPct val="100000"/>
+              </a:lnSpc>
+            </a:pPr>
+            <a:r>
+              <a:rPr sz="1500" b="1">
+                <a:solidFill>
+                  <a:srgbClr val="FFFFFF"/>
+                </a:solidFill>
+                <a:latin typeface="Malgun Gothic"/>
+              </a:rPr>
+              <a:t>🏢 망고아이 지사용 사용설명서</a:t>
+            </a:r>
+          </a:p>
+        </p:txBody>
+      </p:sp>
+      <p:sp>
+        <p:nvSpPr>
+          <p:cNvPr id="5" name="TextBox 4"/>
+          <p:cNvSpPr txBox="1"/>
+          <p:nvPr/>
+        </p:nvSpPr>
+        <p:spPr>
+          <a:xfrm>
+            <a:off x="8168335" y="27432"/>
+            <a:ext cx="3657600" cy="502920"/>
+          </a:xfrm>
+          <a:prstGeom prst="rect">
+            <a:avLst/>
+          </a:prstGeom>
+          <a:noFill/>
+        </p:spPr>
+        <p:txBody>
+          <a:bodyPr wrap="square" anchor="ctr">
+            <a:spAutoFit/>
+          </a:bodyPr>
+          <a:lstStyle/>
+          <a:p>
+            <a:pPr algn="r">
+              <a:lnSpc>
+                <a:spcPct val="100000"/>
+              </a:lnSpc>
+            </a:pPr>
+            <a:r>
+              <a:rPr sz="1300" b="1">
+                <a:solidFill>
+                  <a:srgbClr val="F1F5F9"/>
+                </a:solidFill>
+                <a:latin typeface="Malgun Gothic"/>
+              </a:rPr>
+              <a:t>체크리스트</a:t>
+            </a:r>
+          </a:p>
+        </p:txBody>
+      </p:sp>
+      <p:sp>
+        <p:nvSpPr>
+          <p:cNvPr id="6" name="TextBox 5"/>
+          <p:cNvSpPr txBox="1"/>
+          <p:nvPr/>
+        </p:nvSpPr>
+        <p:spPr>
+          <a:xfrm>
+            <a:off x="365760" y="868680"/>
+            <a:ext cx="9144000" cy="457200"/>
+          </a:xfrm>
+          <a:prstGeom prst="rect">
+            <a:avLst/>
+          </a:prstGeom>
+          <a:noFill/>
+        </p:spPr>
+        <p:txBody>
+          <a:bodyPr wrap="square" anchor="t">
+            <a:spAutoFit/>
+          </a:bodyPr>
+          <a:lstStyle/>
+          <a:p>
+            <a:pPr algn="l">
+              <a:lnSpc>
+                <a:spcPct val="100000"/>
+              </a:lnSpc>
+            </a:pPr>
+            <a:r>
+              <a:rPr sz="2200" b="1">
+                <a:solidFill>
+                  <a:srgbClr val="0D9488"/>
+                </a:solidFill>
+                <a:latin typeface="Malgun Gothic"/>
+              </a:rPr>
+              <a:t>✅ 지사 운영 체크리스트</a:t>
+            </a:r>
+          </a:p>
+        </p:txBody>
+      </p:sp>
+      <p:sp>
+        <p:nvSpPr>
+          <p:cNvPr id="7" name="Rounded Rectangle 6"/>
+          <p:cNvSpPr/>
+          <p:nvPr/>
+        </p:nvSpPr>
+        <p:spPr>
+          <a:xfrm>
+            <a:off x="457200" y="1645920"/>
+            <a:ext cx="292608" cy="292608"/>
+          </a:xfrm>
+          <a:prstGeom prst="roundRect">
+            <a:avLst/>
+          </a:prstGeom>
+          <a:solidFill>
+            <a:srgbClr val="FFFFFF"/>
+          </a:solidFill>
+          <a:ln w="12700">
+            <a:solidFill>
+              <a:srgbClr val="0D9488"/>
+            </a:solidFill>
+          </a:ln>
+          <a:effectLst/>
+        </p:spPr>
+        <p:style>
+          <a:lnRef idx="1">
+            <a:schemeClr val="accent1"/>
+          </a:lnRef>
+          <a:fillRef idx="3">
+            <a:schemeClr val="accent1"/>
+          </a:fillRef>
+          <a:effectRef idx="2">
+            <a:schemeClr val="accent1"/>
+          </a:effectRef>
+          <a:fontRef idx="minor">
+            <a:schemeClr val="lt1"/>
+          </a:fontRef>
+        </p:style>
+        <p:txBody>
+          <a:bodyPr rtlCol="0" anchor="ctr"/>
+          <a:lstStyle/>
+          <a:p>
+            <a:pPr algn="ctr"/>
+          </a:p>
+        </p:txBody>
+      </p:sp>
+      <p:sp>
+        <p:nvSpPr>
+          <p:cNvPr id="8" name="TextBox 7"/>
+          <p:cNvSpPr txBox="1"/>
+          <p:nvPr/>
+        </p:nvSpPr>
+        <p:spPr>
+          <a:xfrm>
+            <a:off x="914400" y="1581912"/>
+            <a:ext cx="10058400" cy="411480"/>
+          </a:xfrm>
+          <a:prstGeom prst="rect">
+            <a:avLst/>
+          </a:prstGeom>
+          <a:noFill/>
+        </p:spPr>
+        <p:txBody>
+          <a:bodyPr wrap="square" anchor="t">
+            <a:spAutoFit/>
+          </a:bodyPr>
+          <a:lstStyle/>
+          <a:p>
+            <a:pPr algn="l">
+              <a:lnSpc>
+                <a:spcPct val="100000"/>
+              </a:lnSpc>
+            </a:pPr>
+            <a:r>
+              <a:rPr sz="1500" b="1">
+                <a:solidFill>
+                  <a:srgbClr val="334155"/>
+                </a:solidFill>
+                <a:latin typeface="Malgun Gothic"/>
+              </a:rPr>
+              <a:t>오늘 지사 매출·재원·출석 지표를 확인했나요?</a:t>
+            </a:r>
+          </a:p>
+        </p:txBody>
+      </p:sp>
+      <p:sp>
+        <p:nvSpPr>
+          <p:cNvPr id="9" name="Rounded Rectangle 8"/>
+          <p:cNvSpPr/>
+          <p:nvPr/>
+        </p:nvSpPr>
+        <p:spPr>
+          <a:xfrm>
+            <a:off x="457200" y="2212848"/>
+            <a:ext cx="292608" cy="292608"/>
+          </a:xfrm>
+          <a:prstGeom prst="roundRect">
+            <a:avLst/>
+          </a:prstGeom>
+          <a:solidFill>
+            <a:srgbClr val="FFFFFF"/>
+          </a:solidFill>
+          <a:ln w="12700">
+            <a:solidFill>
+              <a:srgbClr val="0D9488"/>
+            </a:solidFill>
+          </a:ln>
+          <a:effectLst/>
+        </p:spPr>
+        <p:style>
+          <a:lnRef idx="1">
+            <a:schemeClr val="accent1"/>
+          </a:lnRef>
+          <a:fillRef idx="3">
+            <a:schemeClr val="accent1"/>
+          </a:fillRef>
+          <a:effectRef idx="2">
+            <a:schemeClr val="accent1"/>
+          </a:effectRef>
+          <a:fontRef idx="minor">
+            <a:schemeClr val="lt1"/>
+          </a:fontRef>
+        </p:style>
+        <p:txBody>
+          <a:bodyPr rtlCol="0" anchor="ctr"/>
+          <a:lstStyle/>
+          <a:p>
+            <a:pPr algn="ctr"/>
+          </a:p>
+        </p:txBody>
+      </p:sp>
+      <p:sp>
+        <p:nvSpPr>
+          <p:cNvPr id="10" name="TextBox 9"/>
+          <p:cNvSpPr txBox="1"/>
+          <p:nvPr/>
+        </p:nvSpPr>
+        <p:spPr>
+          <a:xfrm>
+            <a:off x="914400" y="2148840"/>
+            <a:ext cx="10058400" cy="411480"/>
+          </a:xfrm>
+          <a:prstGeom prst="rect">
+            <a:avLst/>
+          </a:prstGeom>
+          <a:noFill/>
+        </p:spPr>
+        <p:txBody>
+          <a:bodyPr wrap="square" anchor="t">
+            <a:spAutoFit/>
+          </a:bodyPr>
+          <a:lstStyle/>
+          <a:p>
+            <a:pPr algn="l">
+              <a:lnSpc>
+                <a:spcPct val="100000"/>
+              </a:lnSpc>
+            </a:pPr>
+            <a:r>
+              <a:rPr sz="1500" b="1">
+                <a:solidFill>
+                  <a:srgbClr val="334155"/>
+                </a:solidFill>
+                <a:latin typeface="Malgun Gothic"/>
+              </a:rPr>
+              <a:t>부진한 대리점을 파악하고 지원했나요?</a:t>
+            </a:r>
+          </a:p>
+        </p:txBody>
+      </p:sp>
+      <p:sp>
+        <p:nvSpPr>
+          <p:cNvPr id="11" name="Rounded Rectangle 10"/>
+          <p:cNvSpPr/>
+          <p:nvPr/>
+        </p:nvSpPr>
+        <p:spPr>
+          <a:xfrm>
+            <a:off x="457200" y="2779776"/>
+            <a:ext cx="292608" cy="292608"/>
+          </a:xfrm>
+          <a:prstGeom prst="roundRect">
+            <a:avLst/>
+          </a:prstGeom>
+          <a:solidFill>
+            <a:srgbClr val="FFFFFF"/>
+          </a:solidFill>
+          <a:ln w="12700">
+            <a:solidFill>
+              <a:srgbClr val="0D9488"/>
+            </a:solidFill>
+          </a:ln>
+          <a:effectLst/>
+        </p:spPr>
+        <p:style>
+          <a:lnRef idx="1">
+            <a:schemeClr val="accent1"/>
+          </a:lnRef>
+          <a:fillRef idx="3">
+            <a:schemeClr val="accent1"/>
+          </a:fillRef>
+          <a:effectRef idx="2">
+            <a:schemeClr val="accent1"/>
+          </a:effectRef>
+          <a:fontRef idx="minor">
+            <a:schemeClr val="lt1"/>
+          </a:fontRef>
+        </p:style>
+        <p:txBody>
+          <a:bodyPr rtlCol="0" anchor="ctr"/>
+          <a:lstStyle/>
+          <a:p>
+            <a:pPr algn="ctr"/>
+          </a:p>
+        </p:txBody>
+      </p:sp>
+      <p:sp>
+        <p:nvSpPr>
+          <p:cNvPr id="12" name="TextBox 11"/>
+          <p:cNvSpPr txBox="1"/>
+          <p:nvPr/>
+        </p:nvSpPr>
+        <p:spPr>
+          <a:xfrm>
+            <a:off x="914400" y="2715768"/>
+            <a:ext cx="10058400" cy="411480"/>
+          </a:xfrm>
+          <a:prstGeom prst="rect">
+            <a:avLst/>
+          </a:prstGeom>
+          <a:noFill/>
+        </p:spPr>
+        <p:txBody>
+          <a:bodyPr wrap="square" anchor="t">
+            <a:spAutoFit/>
+          </a:bodyPr>
+          <a:lstStyle/>
+          <a:p>
+            <a:pPr algn="l">
+              <a:lnSpc>
+                <a:spcPct val="100000"/>
+              </a:lnSpc>
+            </a:pPr>
+            <a:r>
+              <a:rPr sz="1500" b="1">
+                <a:solidFill>
+                  <a:srgbClr val="334155"/>
+                </a:solidFill>
+                <a:latin typeface="Malgun Gothic"/>
+              </a:rPr>
+              <a:t>이번 달 정산(수령·배분)을 점검했나요?</a:t>
+            </a:r>
+          </a:p>
+        </p:txBody>
+      </p:sp>
+      <p:sp>
+        <p:nvSpPr>
+          <p:cNvPr id="13" name="Rounded Rectangle 12"/>
+          <p:cNvSpPr/>
+          <p:nvPr/>
+        </p:nvSpPr>
+        <p:spPr>
+          <a:xfrm>
+            <a:off x="457200" y="3346704"/>
+            <a:ext cx="292608" cy="292608"/>
+          </a:xfrm>
+          <a:prstGeom prst="roundRect">
+            <a:avLst/>
+          </a:prstGeom>
+          <a:solidFill>
+            <a:srgbClr val="FFFFFF"/>
+          </a:solidFill>
+          <a:ln w="12700">
+            <a:solidFill>
+              <a:srgbClr val="0D9488"/>
+            </a:solidFill>
+          </a:ln>
+          <a:effectLst/>
+        </p:spPr>
+        <p:style>
+          <a:lnRef idx="1">
+            <a:schemeClr val="accent1"/>
+          </a:lnRef>
+          <a:fillRef idx="3">
+            <a:schemeClr val="accent1"/>
+          </a:fillRef>
+          <a:effectRef idx="2">
+            <a:schemeClr val="accent1"/>
+          </a:effectRef>
+          <a:fontRef idx="minor">
+            <a:schemeClr val="lt1"/>
+          </a:fontRef>
+        </p:style>
+        <p:txBody>
+          <a:bodyPr rtlCol="0" anchor="ctr"/>
+          <a:lstStyle/>
+          <a:p>
+            <a:pPr algn="ctr"/>
+          </a:p>
+        </p:txBody>
+      </p:sp>
+      <p:sp>
+        <p:nvSpPr>
+          <p:cNvPr id="14" name="TextBox 13"/>
+          <p:cNvSpPr txBox="1"/>
+          <p:nvPr/>
+        </p:nvSpPr>
+        <p:spPr>
+          <a:xfrm>
+            <a:off x="914400" y="3282696"/>
+            <a:ext cx="10058400" cy="411480"/>
+          </a:xfrm>
+          <a:prstGeom prst="rect">
+            <a:avLst/>
+          </a:prstGeom>
+          <a:noFill/>
+        </p:spPr>
+        <p:txBody>
+          <a:bodyPr wrap="square" anchor="t">
+            <a:spAutoFit/>
+          </a:bodyPr>
+          <a:lstStyle/>
+          <a:p>
+            <a:pPr algn="l">
+              <a:lnSpc>
+                <a:spcPct val="100000"/>
+              </a:lnSpc>
+            </a:pPr>
+            <a:r>
+              <a:rPr sz="1500" b="1">
+                <a:solidFill>
+                  <a:srgbClr val="334155"/>
+                </a:solidFill>
+                <a:latin typeface="Malgun Gothic"/>
+              </a:rPr>
+              <a:t>미납·환불 건을 확인했나요?</a:t>
+            </a:r>
+          </a:p>
+        </p:txBody>
+      </p:sp>
+      <p:sp>
+        <p:nvSpPr>
+          <p:cNvPr id="15" name="Rounded Rectangle 14"/>
+          <p:cNvSpPr/>
+          <p:nvPr/>
+        </p:nvSpPr>
+        <p:spPr>
+          <a:xfrm>
+            <a:off x="457200" y="3913632"/>
+            <a:ext cx="292608" cy="292608"/>
+          </a:xfrm>
+          <a:prstGeom prst="roundRect">
+            <a:avLst/>
+          </a:prstGeom>
+          <a:solidFill>
+            <a:srgbClr val="FFFFFF"/>
+          </a:solidFill>
+          <a:ln w="12700">
+            <a:solidFill>
+              <a:srgbClr val="0D9488"/>
+            </a:solidFill>
+          </a:ln>
+          <a:effectLst/>
+        </p:spPr>
+        <p:style>
+          <a:lnRef idx="1">
+            <a:schemeClr val="accent1"/>
+          </a:lnRef>
+          <a:fillRef idx="3">
+            <a:schemeClr val="accent1"/>
+          </a:fillRef>
+          <a:effectRef idx="2">
+            <a:schemeClr val="accent1"/>
+          </a:effectRef>
+          <a:fontRef idx="minor">
+            <a:schemeClr val="lt1"/>
+          </a:fontRef>
+        </p:style>
+        <p:txBody>
+          <a:bodyPr rtlCol="0" anchor="ctr"/>
+          <a:lstStyle/>
+          <a:p>
+            <a:pPr algn="ctr"/>
+          </a:p>
+        </p:txBody>
+      </p:sp>
+      <p:sp>
+        <p:nvSpPr>
+          <p:cNvPr id="16" name="TextBox 15"/>
+          <p:cNvSpPr txBox="1"/>
+          <p:nvPr/>
+        </p:nvSpPr>
+        <p:spPr>
+          <a:xfrm>
+            <a:off x="914400" y="3849624"/>
+            <a:ext cx="10058400" cy="411480"/>
+          </a:xfrm>
+          <a:prstGeom prst="rect">
+            <a:avLst/>
+          </a:prstGeom>
+          <a:noFill/>
+        </p:spPr>
+        <p:txBody>
+          <a:bodyPr wrap="square" anchor="t">
+            <a:spAutoFit/>
+          </a:bodyPr>
+          <a:lstStyle/>
+          <a:p>
+            <a:pPr algn="l">
+              <a:lnSpc>
+                <a:spcPct val="100000"/>
+              </a:lnSpc>
+            </a:pPr>
+            <a:r>
+              <a:rPr sz="1500" b="1">
+                <a:solidFill>
+                  <a:srgbClr val="334155"/>
+                </a:solidFill>
+                <a:latin typeface="Malgun Gothic"/>
+              </a:rPr>
+              <a:t>이탈위험 학생·대리점을 챙겼나요?</a:t>
+            </a:r>
+          </a:p>
+        </p:txBody>
+      </p:sp>
+      <p:sp>
+        <p:nvSpPr>
+          <p:cNvPr id="17" name="Rounded Rectangle 16"/>
+          <p:cNvSpPr/>
+          <p:nvPr/>
+        </p:nvSpPr>
+        <p:spPr>
+          <a:xfrm>
+            <a:off x="457200" y="4480560"/>
+            <a:ext cx="292608" cy="292608"/>
+          </a:xfrm>
+          <a:prstGeom prst="roundRect">
+            <a:avLst/>
+          </a:prstGeom>
+          <a:solidFill>
+            <a:srgbClr val="FFFFFF"/>
+          </a:solidFill>
+          <a:ln w="12700">
+            <a:solidFill>
+              <a:srgbClr val="0D9488"/>
+            </a:solidFill>
+          </a:ln>
+          <a:effectLst/>
+        </p:spPr>
+        <p:style>
+          <a:lnRef idx="1">
+            <a:schemeClr val="accent1"/>
+          </a:lnRef>
+          <a:fillRef idx="3">
+            <a:schemeClr val="accent1"/>
+          </a:fillRef>
+          <a:effectRef idx="2">
+            <a:schemeClr val="accent1"/>
+          </a:effectRef>
+          <a:fontRef idx="minor">
+            <a:schemeClr val="lt1"/>
+          </a:fontRef>
+        </p:style>
+        <p:txBody>
+          <a:bodyPr rtlCol="0" anchor="ctr"/>
+          <a:lstStyle/>
+          <a:p>
+            <a:pPr algn="ctr"/>
+          </a:p>
+        </p:txBody>
+      </p:sp>
+      <p:sp>
+        <p:nvSpPr>
+          <p:cNvPr id="18" name="TextBox 17"/>
+          <p:cNvSpPr txBox="1"/>
+          <p:nvPr/>
+        </p:nvSpPr>
+        <p:spPr>
+          <a:xfrm>
+            <a:off x="914400" y="4416552"/>
+            <a:ext cx="10058400" cy="411480"/>
+          </a:xfrm>
+          <a:prstGeom prst="rect">
+            <a:avLst/>
+          </a:prstGeom>
+          <a:noFill/>
+        </p:spPr>
+        <p:txBody>
+          <a:bodyPr wrap="square" anchor="t">
+            <a:spAutoFit/>
+          </a:bodyPr>
+          <a:lstStyle/>
+          <a:p>
+            <a:pPr algn="l">
+              <a:lnSpc>
+                <a:spcPct val="100000"/>
+              </a:lnSpc>
+            </a:pPr>
+            <a:r>
+              <a:rPr sz="1500" b="1">
+                <a:solidFill>
+                  <a:srgbClr val="334155"/>
+                </a:solidFill>
+                <a:latin typeface="Malgun Gothic"/>
+              </a:rPr>
+              <a:t>신규 대리점 온보딩을 진행했나요?</a:t>
+            </a:r>
+          </a:p>
+        </p:txBody>
+      </p:sp>
+      <p:sp>
+        <p:nvSpPr>
+          <p:cNvPr id="19" name="Rounded Rectangle 18"/>
+          <p:cNvSpPr/>
+          <p:nvPr/>
+        </p:nvSpPr>
+        <p:spPr>
+          <a:xfrm>
+            <a:off x="457200" y="5047488"/>
+            <a:ext cx="292608" cy="292608"/>
+          </a:xfrm>
+          <a:prstGeom prst="roundRect">
+            <a:avLst/>
+          </a:prstGeom>
+          <a:solidFill>
+            <a:srgbClr val="FFFFFF"/>
+          </a:solidFill>
+          <a:ln w="12700">
+            <a:solidFill>
+              <a:srgbClr val="0D9488"/>
+            </a:solidFill>
+          </a:ln>
+          <a:effectLst/>
+        </p:spPr>
+        <p:style>
+          <a:lnRef idx="1">
+            <a:schemeClr val="accent1"/>
+          </a:lnRef>
+          <a:fillRef idx="3">
+            <a:schemeClr val="accent1"/>
+          </a:fillRef>
+          <a:effectRef idx="2">
+            <a:schemeClr val="accent1"/>
+          </a:effectRef>
+          <a:fontRef idx="minor">
+            <a:schemeClr val="lt1"/>
+          </a:fontRef>
+        </p:style>
+        <p:txBody>
+          <a:bodyPr rtlCol="0" anchor="ctr"/>
+          <a:lstStyle/>
+          <a:p>
+            <a:pPr algn="ctr"/>
+          </a:p>
+        </p:txBody>
+      </p:sp>
+      <p:sp>
+        <p:nvSpPr>
+          <p:cNvPr id="20" name="TextBox 19"/>
+          <p:cNvSpPr txBox="1"/>
+          <p:nvPr/>
+        </p:nvSpPr>
+        <p:spPr>
+          <a:xfrm>
+            <a:off x="914400" y="4983480"/>
+            <a:ext cx="10058400" cy="411480"/>
+          </a:xfrm>
+          <a:prstGeom prst="rect">
+            <a:avLst/>
+          </a:prstGeom>
+          <a:noFill/>
+        </p:spPr>
+        <p:txBody>
+          <a:bodyPr wrap="square" anchor="t">
+            <a:spAutoFit/>
+          </a:bodyPr>
+          <a:lstStyle/>
+          <a:p>
+            <a:pPr algn="l">
+              <a:lnSpc>
+                <a:spcPct val="100000"/>
+              </a:lnSpc>
+            </a:pPr>
+            <a:r>
+              <a:rPr sz="1500" b="1">
+                <a:solidFill>
+                  <a:srgbClr val="334155"/>
+                </a:solidFill>
+                <a:latin typeface="Malgun Gothic"/>
+              </a:rPr>
+              <a:t>월간 리포트를 공유했나요?</a:t>
+            </a:r>
+          </a:p>
+        </p:txBody>
+      </p:sp>
+      <p:pic>
+        <p:nvPicPr>
+          <p:cNvPr id="21" name="Picture 20" descr="mango_char.png"/>
+          <p:cNvPicPr>
+            <a:picLocks noChangeAspect="1"/>
+          </p:cNvPicPr>
+          <p:nvPr/>
+        </p:nvPicPr>
+        <p:blipFill>
+          <a:blip r:embed="rId2"/>
+          <a:stretch>
+            <a:fillRect/>
+          </a:stretch>
+        </p:blipFill>
+        <p:spPr>
+          <a:xfrm>
+            <a:off x="9153162" y="4480559"/>
+            <a:ext cx="2489892" cy="2011680"/>
+          </a:xfrm>
+          <a:prstGeom prst="rect">
+            <a:avLst/>
+          </a:prstGeom>
+        </p:spPr>
+      </p:pic>
+    </p:spTree>
+  </p:cSld>
+  <p:clrMapOvr>
+    <a:masterClrMapping/>
+  </p:clrMapOvr>
+</p:sld>
+</file>
+
+<file path=ppt/slides/slide24.xml><?xml version="1.0" encoding="utf-8"?>
+<p:sld xmlns:a="http://schemas.openxmlformats.org/drawingml/2006/main" xmlns:p="http://schemas.openxmlformats.org/presentationml/2006/main" xmlns:r="http://schemas.openxmlformats.org/officeDocument/2006/relationships">
+  <p:cSld>
+    <p:bg>
+      <p:bgPr>
+        <a:solidFill>
+          <a:srgbClr val="FFFFFF"/>
+        </a:solidFill>
+        <a:effectLst/>
+      </p:bgPr>
+    </p:bg>
+    <p:spTree>
+      <p:nvGrpSpPr>
+        <p:cNvPr id="1" name=""/>
+        <p:cNvGrpSpPr/>
+        <p:nvPr/>
+      </p:nvGrpSpPr>
+      <p:grpSpPr/>
+      <p:sp>
+        <p:nvSpPr>
+          <p:cNvPr id="2" name="Rectangle 1"/>
+          <p:cNvSpPr/>
+          <p:nvPr/>
+        </p:nvSpPr>
+        <p:spPr>
+          <a:xfrm>
+            <a:off x="0" y="0"/>
+            <a:ext cx="12191695" cy="566928"/>
+          </a:xfrm>
+          <a:prstGeom prst="rect">
+            <a:avLst/>
+          </a:prstGeom>
+          <a:solidFill>
+            <a:srgbClr val="0D9488"/>
+          </a:solidFill>
+          <a:ln>
+            <a:noFill/>
+          </a:ln>
+          <a:effectLst/>
+        </p:spPr>
+        <p:style>
+          <a:lnRef idx="1">
+            <a:schemeClr val="accent1"/>
+          </a:lnRef>
+          <a:fillRef idx="3">
+            <a:schemeClr val="accent1"/>
+          </a:fillRef>
+          <a:effectRef idx="2">
+            <a:schemeClr val="accent1"/>
+          </a:effectRef>
+          <a:fontRef idx="minor">
+            <a:schemeClr val="lt1"/>
+          </a:fontRef>
+        </p:style>
+        <p:txBody>
+          <a:bodyPr rtlCol="0" anchor="ctr"/>
+          <a:lstStyle/>
+          <a:p>
+            <a:pPr algn="ctr"/>
+          </a:p>
+        </p:txBody>
+      </p:sp>
+      <p:sp>
+        <p:nvSpPr>
+          <p:cNvPr id="3" name="Rectangle 2"/>
+          <p:cNvSpPr/>
+          <p:nvPr/>
+        </p:nvSpPr>
+        <p:spPr>
+          <a:xfrm>
+            <a:off x="0" y="566928"/>
+            <a:ext cx="12191695" cy="54864"/>
+          </a:xfrm>
+          <a:prstGeom prst="rect">
+            <a:avLst/>
+          </a:prstGeom>
+          <a:solidFill>
+            <a:srgbClr val="F59E0B"/>
+          </a:solidFill>
+          <a:ln>
+            <a:noFill/>
+          </a:ln>
+          <a:effectLst/>
+        </p:spPr>
+        <p:style>
+          <a:lnRef idx="1">
+            <a:schemeClr val="accent1"/>
+          </a:lnRef>
+          <a:fillRef idx="3">
+            <a:schemeClr val="accent1"/>
+          </a:fillRef>
+          <a:effectRef idx="2">
+            <a:schemeClr val="accent1"/>
+          </a:effectRef>
+          <a:fontRef idx="minor">
+            <a:schemeClr val="lt1"/>
+          </a:fontRef>
+        </p:style>
+        <p:txBody>
+          <a:bodyPr rtlCol="0" anchor="ctr"/>
+          <a:lstStyle/>
+          <a:p>
+            <a:pPr algn="ctr"/>
+          </a:p>
+        </p:txBody>
+      </p:sp>
+      <p:sp>
+        <p:nvSpPr>
+          <p:cNvPr id="4" name="TextBox 3"/>
+          <p:cNvSpPr txBox="1"/>
+          <p:nvPr/>
+        </p:nvSpPr>
+        <p:spPr>
+          <a:xfrm>
+            <a:off x="365760" y="27432"/>
+            <a:ext cx="7315200" cy="502920"/>
+          </a:xfrm>
+          <a:prstGeom prst="rect">
+            <a:avLst/>
+          </a:prstGeom>
+          <a:noFill/>
+        </p:spPr>
+        <p:txBody>
+          <a:bodyPr wrap="square" anchor="ctr">
+            <a:spAutoFit/>
+          </a:bodyPr>
+          <a:lstStyle/>
+          <a:p>
+            <a:pPr algn="l">
+              <a:lnSpc>
+                <a:spcPct val="100000"/>
+              </a:lnSpc>
+            </a:pPr>
+            <a:r>
+              <a:rPr sz="1500" b="1">
+                <a:solidFill>
+                  <a:srgbClr val="FFFFFF"/>
+                </a:solidFill>
+                <a:latin typeface="Malgun Gothic"/>
+              </a:rPr>
+              <a:t>🏢 망고아이 지사용 사용설명서</a:t>
+            </a:r>
+          </a:p>
+        </p:txBody>
+      </p:sp>
+      <p:sp>
+        <p:nvSpPr>
+          <p:cNvPr id="5" name="TextBox 4"/>
+          <p:cNvSpPr txBox="1"/>
+          <p:nvPr/>
+        </p:nvSpPr>
+        <p:spPr>
+          <a:xfrm>
+            <a:off x="8168335" y="27432"/>
+            <a:ext cx="3657600" cy="502920"/>
+          </a:xfrm>
+          <a:prstGeom prst="rect">
+            <a:avLst/>
+          </a:prstGeom>
+          <a:noFill/>
+        </p:spPr>
+        <p:txBody>
+          <a:bodyPr wrap="square" anchor="ctr">
+            <a:spAutoFit/>
+          </a:bodyPr>
+          <a:lstStyle/>
+          <a:p>
+            <a:pPr algn="r">
+              <a:lnSpc>
+                <a:spcPct val="100000"/>
+              </a:lnSpc>
+            </a:pPr>
+            <a:r>
+              <a:rPr sz="1300" b="1">
+                <a:solidFill>
+                  <a:srgbClr val="F1F5F9"/>
+                </a:solidFill>
+                <a:latin typeface="Malgun Gothic"/>
+              </a:rPr>
               <a:t>마무리</a:t>
             </a:r>
           </a:p>
@@ -17216,7 +19302,7 @@
 </p:sld>
 </file>
 
-<file path=ppt/slides/slide23.xml><?xml version="1.0" encoding="utf-8"?>
+<file path=ppt/slides/slide25.xml><?xml version="1.0" encoding="utf-8"?>
 <p:sld xmlns:a="http://schemas.openxmlformats.org/drawingml/2006/main" xmlns:p="http://schemas.openxmlformats.org/presentationml/2006/main" xmlns:r="http://schemas.openxmlformats.org/officeDocument/2006/relationships">
   <p:cSld>
     <p:bg>

--- a/cloudflare-deploy/public/library/branch/hq-kr.pptx
+++ b/cloudflare-deploy/public/library/branch/hq-kr.pptx
@@ -4054,7 +4054,7 @@
                 </a:solidFill>
                 <a:latin typeface="Malgun Gothic"/>
               </a:rPr>
-              <a:t>대상 · 지역 지사 운영·관리자   |   test.mangoi.co.kr</a:t>
+              <a:t>대상 · 지역 지사 운영·관리자   |   www.mangoi.co.kr</a:t>
             </a:r>
           </a:p>
         </p:txBody>
@@ -19564,7 +19564,7 @@
                 </a:solidFill>
                 <a:latin typeface="Malgun Gothic"/>
               </a:rPr>
-              <a:t>🌐 test.mangoi.co.kr    📞 1588-0000    ✉ support@mangoi.co.kr</a:t>
+              <a:t>🌐 www.mangoi.co.kr    📞 1644-0561    ✉ support@mangoi.co.kr</a:t>
             </a:r>
           </a:p>
         </p:txBody>

--- a/cloudflare-deploy/public/library/branch/hq-kr.pptx
+++ b/cloudflare-deploy/public/library/branch/hq-kr.pptx
@@ -6,6 +6,7 @@
   </p:sldMasterIdLst>
   <p:sldIdLst>
     <p:sldId id="256" r:id="rId7"/>
+    <p:sldId id="281" r:id="rId32"/>
     <p:sldId id="257" r:id="rId8"/>
     <p:sldId id="258" r:id="rId9"/>
     <p:sldId id="259" r:id="rId10"/>
@@ -15013,7 +15014,7 @@
         </p:nvSpPr>
         <p:spPr>
           <a:xfrm>
-            <a:off x="365760" y="868680"/>
+            <a:off x="987552" y="868680"/>
             <a:ext cx="9144000" cy="457200"/>
           </a:xfrm>
           <a:prstGeom prst="rect">
@@ -15824,6 +15825,89 @@
           </a:graphicData>
         </a:graphic>
       </p:graphicFrame>
+      <p:sp>
+        <p:nvSpPr>
+          <p:cNvPr id="6" name="Rounded Rectangle 5"/>
+          <p:cNvSpPr/>
+          <p:nvPr/>
+        </p:nvSpPr>
+        <p:spPr>
+          <a:xfrm>
+            <a:off x="365760" y="841247"/>
+            <a:ext cx="475488" cy="475488"/>
+          </a:xfrm>
+          <a:prstGeom prst="roundRect">
+            <a:avLst/>
+          </a:prstGeom>
+          <a:solidFill>
+            <a:srgbClr val="0D9488"/>
+          </a:solidFill>
+          <a:ln>
+            <a:noFill/>
+          </a:ln>
+          <a:effectLst/>
+        </p:spPr>
+        <p:style>
+          <a:lnRef idx="1">
+            <a:schemeClr val="accent1"/>
+          </a:lnRef>
+          <a:fillRef idx="3">
+            <a:schemeClr val="accent1"/>
+          </a:fillRef>
+          <a:effectRef idx="2">
+            <a:schemeClr val="accent1"/>
+          </a:effectRef>
+          <a:fontRef idx="minor">
+            <a:schemeClr val="lt1"/>
+          </a:fontRef>
+        </p:style>
+        <p:txBody>
+          <a:bodyPr rtlCol="0" anchor="ctr"/>
+          <a:lstStyle/>
+          <a:p>
+            <a:pPr algn="ctr"/>
+          </a:p>
+        </p:txBody>
+      </p:sp>
+      <p:sp>
+        <p:nvSpPr>
+          <p:cNvPr id="7" name="TextBox 6"/>
+          <p:cNvSpPr txBox="1"/>
+          <p:nvPr/>
+        </p:nvSpPr>
+        <p:spPr>
+          <a:xfrm>
+            <a:off x="365760" y="841247"/>
+            <a:ext cx="475488" cy="475488"/>
+          </a:xfrm>
+          <a:prstGeom prst="rect">
+            <a:avLst/>
+          </a:prstGeom>
+          <a:noFill/>
+        </p:spPr>
+        <p:txBody>
+          <a:bodyPr wrap="square" anchor="ctr">
+            <a:spAutoFit/>
+          </a:bodyPr>
+          <a:lstStyle/>
+          <a:p>
+            <a:pPr algn="ctr">
+              <a:lnSpc>
+                <a:spcPct val="100000"/>
+              </a:lnSpc>
+            </a:pPr>
+            <a:r>
+              <a:rPr sz="1500" b="1">
+                <a:solidFill>
+                  <a:srgbClr val="FFFFFF"/>
+                </a:solidFill>
+                <a:latin typeface="Malgun Gothic"/>
+              </a:rPr>
+              <a:t>18</a:t>
+            </a:r>
+          </a:p>
+        </p:txBody>
+      </p:sp>
     </p:spTree>
   </p:cSld>
   <p:clrMapOvr>
@@ -16024,7 +16108,7 @@
         </p:nvSpPr>
         <p:spPr>
           <a:xfrm>
-            <a:off x="365760" y="868680"/>
+            <a:off x="987552" y="868680"/>
             <a:ext cx="9144000" cy="457200"/>
           </a:xfrm>
           <a:prstGeom prst="rect">
@@ -16169,6 +16253,89 @@
           </a:graphicData>
         </a:graphic>
       </p:graphicFrame>
+      <p:sp>
+        <p:nvSpPr>
+          <p:cNvPr id="6" name="Rounded Rectangle 5"/>
+          <p:cNvSpPr/>
+          <p:nvPr/>
+        </p:nvSpPr>
+        <p:spPr>
+          <a:xfrm>
+            <a:off x="365760" y="841247"/>
+            <a:ext cx="475488" cy="475488"/>
+          </a:xfrm>
+          <a:prstGeom prst="roundRect">
+            <a:avLst/>
+          </a:prstGeom>
+          <a:solidFill>
+            <a:srgbClr val="0D9488"/>
+          </a:solidFill>
+          <a:ln>
+            <a:noFill/>
+          </a:ln>
+          <a:effectLst/>
+        </p:spPr>
+        <p:style>
+          <a:lnRef idx="1">
+            <a:schemeClr val="accent1"/>
+          </a:lnRef>
+          <a:fillRef idx="3">
+            <a:schemeClr val="accent1"/>
+          </a:fillRef>
+          <a:effectRef idx="2">
+            <a:schemeClr val="accent1"/>
+          </a:effectRef>
+          <a:fontRef idx="minor">
+            <a:schemeClr val="lt1"/>
+          </a:fontRef>
+        </p:style>
+        <p:txBody>
+          <a:bodyPr rtlCol="0" anchor="ctr"/>
+          <a:lstStyle/>
+          <a:p>
+            <a:pPr algn="ctr"/>
+          </a:p>
+        </p:txBody>
+      </p:sp>
+      <p:sp>
+        <p:nvSpPr>
+          <p:cNvPr id="7" name="TextBox 6"/>
+          <p:cNvSpPr txBox="1"/>
+          <p:nvPr/>
+        </p:nvSpPr>
+        <p:spPr>
+          <a:xfrm>
+            <a:off x="365760" y="841247"/>
+            <a:ext cx="475488" cy="475488"/>
+          </a:xfrm>
+          <a:prstGeom prst="rect">
+            <a:avLst/>
+          </a:prstGeom>
+          <a:noFill/>
+        </p:spPr>
+        <p:txBody>
+          <a:bodyPr wrap="square" anchor="ctr">
+            <a:spAutoFit/>
+          </a:bodyPr>
+          <a:lstStyle/>
+          <a:p>
+            <a:pPr algn="ctr">
+              <a:lnSpc>
+                <a:spcPct val="100000"/>
+              </a:lnSpc>
+            </a:pPr>
+            <a:r>
+              <a:rPr sz="1500" b="1">
+                <a:solidFill>
+                  <a:srgbClr val="FFFFFF"/>
+                </a:solidFill>
+                <a:latin typeface="Malgun Gothic"/>
+              </a:rPr>
+              <a:t>19</a:t>
+            </a:r>
+          </a:p>
+        </p:txBody>
+      </p:sp>
     </p:spTree>
   </p:cSld>
   <p:clrMapOvr>
@@ -16369,7 +16536,7 @@
         </p:nvSpPr>
         <p:spPr>
           <a:xfrm>
-            <a:off x="365760" y="868680"/>
+            <a:off x="987552" y="868680"/>
             <a:ext cx="9144000" cy="457200"/>
           </a:xfrm>
           <a:prstGeom prst="rect">
@@ -17016,6 +17183,89 @@
                 <a:latin typeface="Malgun Gothic"/>
               </a:rPr>
               <a:t>A. 본사 고객센터(전화·이메일·카카오·원격지원)로 문의하면 빠르게 해결됩니다.</a:t>
+            </a:r>
+          </a:p>
+        </p:txBody>
+      </p:sp>
+      <p:sp>
+        <p:nvSpPr>
+          <p:cNvPr id="6" name="Rounded Rectangle 5"/>
+          <p:cNvSpPr/>
+          <p:nvPr/>
+        </p:nvSpPr>
+        <p:spPr>
+          <a:xfrm>
+            <a:off x="365760" y="841247"/>
+            <a:ext cx="475488" cy="475488"/>
+          </a:xfrm>
+          <a:prstGeom prst="roundRect">
+            <a:avLst/>
+          </a:prstGeom>
+          <a:solidFill>
+            <a:srgbClr val="0D9488"/>
+          </a:solidFill>
+          <a:ln>
+            <a:noFill/>
+          </a:ln>
+          <a:effectLst/>
+        </p:spPr>
+        <p:style>
+          <a:lnRef idx="1">
+            <a:schemeClr val="accent1"/>
+          </a:lnRef>
+          <a:fillRef idx="3">
+            <a:schemeClr val="accent1"/>
+          </a:fillRef>
+          <a:effectRef idx="2">
+            <a:schemeClr val="accent1"/>
+          </a:effectRef>
+          <a:fontRef idx="minor">
+            <a:schemeClr val="lt1"/>
+          </a:fontRef>
+        </p:style>
+        <p:txBody>
+          <a:bodyPr rtlCol="0" anchor="ctr"/>
+          <a:lstStyle/>
+          <a:p>
+            <a:pPr algn="ctr"/>
+          </a:p>
+        </p:txBody>
+      </p:sp>
+      <p:sp>
+        <p:nvSpPr>
+          <p:cNvPr id="7" name="TextBox 6"/>
+          <p:cNvSpPr txBox="1"/>
+          <p:nvPr/>
+        </p:nvSpPr>
+        <p:spPr>
+          <a:xfrm>
+            <a:off x="365760" y="841247"/>
+            <a:ext cx="475488" cy="475488"/>
+          </a:xfrm>
+          <a:prstGeom prst="rect">
+            <a:avLst/>
+          </a:prstGeom>
+          <a:noFill/>
+        </p:spPr>
+        <p:txBody>
+          <a:bodyPr wrap="square" anchor="ctr">
+            <a:spAutoFit/>
+          </a:bodyPr>
+          <a:lstStyle/>
+          <a:p>
+            <a:pPr algn="ctr">
+              <a:lnSpc>
+                <a:spcPct val="100000"/>
+              </a:lnSpc>
+            </a:pPr>
+            <a:r>
+              <a:rPr sz="1500" b="1">
+                <a:solidFill>
+                  <a:srgbClr val="FFFFFF"/>
+                </a:solidFill>
+                <a:latin typeface="Malgun Gothic"/>
+              </a:rPr>
+              <a:t>20</a:t>
             </a:r>
           </a:p>
         </p:txBody>
@@ -17220,7 +17470,7 @@
         </p:nvSpPr>
         <p:spPr>
           <a:xfrm>
-            <a:off x="365760" y="868680"/>
+            <a:off x="987552" y="868680"/>
             <a:ext cx="9144000" cy="457200"/>
           </a:xfrm>
           <a:prstGeom prst="rect">
@@ -17870,6 +18120,89 @@
           </a:prstGeom>
         </p:spPr>
       </p:pic>
+      <p:sp>
+        <p:nvSpPr>
+          <p:cNvPr id="6" name="Rounded Rectangle 5"/>
+          <p:cNvSpPr/>
+          <p:nvPr/>
+        </p:nvSpPr>
+        <p:spPr>
+          <a:xfrm>
+            <a:off x="365760" y="841247"/>
+            <a:ext cx="475488" cy="475488"/>
+          </a:xfrm>
+          <a:prstGeom prst="roundRect">
+            <a:avLst/>
+          </a:prstGeom>
+          <a:solidFill>
+            <a:srgbClr val="0D9488"/>
+          </a:solidFill>
+          <a:ln>
+            <a:noFill/>
+          </a:ln>
+          <a:effectLst/>
+        </p:spPr>
+        <p:style>
+          <a:lnRef idx="1">
+            <a:schemeClr val="accent1"/>
+          </a:lnRef>
+          <a:fillRef idx="3">
+            <a:schemeClr val="accent1"/>
+          </a:fillRef>
+          <a:effectRef idx="2">
+            <a:schemeClr val="accent1"/>
+          </a:effectRef>
+          <a:fontRef idx="minor">
+            <a:schemeClr val="lt1"/>
+          </a:fontRef>
+        </p:style>
+        <p:txBody>
+          <a:bodyPr rtlCol="0" anchor="ctr"/>
+          <a:lstStyle/>
+          <a:p>
+            <a:pPr algn="ctr"/>
+          </a:p>
+        </p:txBody>
+      </p:sp>
+      <p:sp>
+        <p:nvSpPr>
+          <p:cNvPr id="7" name="TextBox 6"/>
+          <p:cNvSpPr txBox="1"/>
+          <p:nvPr/>
+        </p:nvSpPr>
+        <p:spPr>
+          <a:xfrm>
+            <a:off x="365760" y="841247"/>
+            <a:ext cx="475488" cy="475488"/>
+          </a:xfrm>
+          <a:prstGeom prst="rect">
+            <a:avLst/>
+          </a:prstGeom>
+          <a:noFill/>
+        </p:spPr>
+        <p:txBody>
+          <a:bodyPr wrap="square" anchor="ctr">
+            <a:spAutoFit/>
+          </a:bodyPr>
+          <a:lstStyle/>
+          <a:p>
+            <a:pPr algn="ctr">
+              <a:lnSpc>
+                <a:spcPct val="100000"/>
+              </a:lnSpc>
+            </a:pPr>
+            <a:r>
+              <a:rPr sz="1500" b="1">
+                <a:solidFill>
+                  <a:srgbClr val="FFFFFF"/>
+                </a:solidFill>
+                <a:latin typeface="Malgun Gothic"/>
+              </a:rPr>
+              <a:t>21</a:t>
+            </a:r>
+          </a:p>
+        </p:txBody>
+      </p:sp>
     </p:spTree>
   </p:cSld>
   <p:clrMapOvr>
@@ -18070,7 +18403,7 @@
         </p:nvSpPr>
         <p:spPr>
           <a:xfrm>
-            <a:off x="365760" y="822960"/>
+            <a:off x="987552" y="822960"/>
             <a:ext cx="11430000" cy="457200"/>
           </a:xfrm>
           <a:prstGeom prst="rect">
@@ -19290,6 +19623,89 @@
                 <a:latin typeface="Malgun Gothic"/>
               </a:rPr>
               <a:t>🍊 좋은 지사는 대리점이 잘되게 돕는 지사예요. 지표로 상황을 읽고, 파트너를 지원하고, 정산을 투명하게 하면 지사와 대리점이 함께 성장합니다. 궁금한 점은 언제든 본사 고객센터로 — 든든한 지사 운영을 응원합니다! 🍊</a:t>
+            </a:r>
+          </a:p>
+        </p:txBody>
+      </p:sp>
+      <p:sp>
+        <p:nvSpPr>
+          <p:cNvPr id="6" name="Rounded Rectangle 5"/>
+          <p:cNvSpPr/>
+          <p:nvPr/>
+        </p:nvSpPr>
+        <p:spPr>
+          <a:xfrm>
+            <a:off x="365760" y="795528"/>
+            <a:ext cx="475488" cy="475488"/>
+          </a:xfrm>
+          <a:prstGeom prst="roundRect">
+            <a:avLst/>
+          </a:prstGeom>
+          <a:solidFill>
+            <a:srgbClr val="0D9488"/>
+          </a:solidFill>
+          <a:ln>
+            <a:noFill/>
+          </a:ln>
+          <a:effectLst/>
+        </p:spPr>
+        <p:style>
+          <a:lnRef idx="1">
+            <a:schemeClr val="accent1"/>
+          </a:lnRef>
+          <a:fillRef idx="3">
+            <a:schemeClr val="accent1"/>
+          </a:fillRef>
+          <a:effectRef idx="2">
+            <a:schemeClr val="accent1"/>
+          </a:effectRef>
+          <a:fontRef idx="minor">
+            <a:schemeClr val="lt1"/>
+          </a:fontRef>
+        </p:style>
+        <p:txBody>
+          <a:bodyPr rtlCol="0" anchor="ctr"/>
+          <a:lstStyle/>
+          <a:p>
+            <a:pPr algn="ctr"/>
+          </a:p>
+        </p:txBody>
+      </p:sp>
+      <p:sp>
+        <p:nvSpPr>
+          <p:cNvPr id="7" name="TextBox 6"/>
+          <p:cNvSpPr txBox="1"/>
+          <p:nvPr/>
+        </p:nvSpPr>
+        <p:spPr>
+          <a:xfrm>
+            <a:off x="365760" y="795528"/>
+            <a:ext cx="475488" cy="475488"/>
+          </a:xfrm>
+          <a:prstGeom prst="rect">
+            <a:avLst/>
+          </a:prstGeom>
+          <a:noFill/>
+        </p:spPr>
+        <p:txBody>
+          <a:bodyPr wrap="square" anchor="ctr">
+            <a:spAutoFit/>
+          </a:bodyPr>
+          <a:lstStyle/>
+          <a:p>
+            <a:pPr algn="ctr">
+              <a:lnSpc>
+                <a:spcPct val="100000"/>
+              </a:lnSpc>
+            </a:pPr>
+            <a:r>
+              <a:rPr sz="1500" b="1">
+                <a:solidFill>
+                  <a:srgbClr val="FFFFFF"/>
+                </a:solidFill>
+                <a:latin typeface="Malgun Gothic"/>
+              </a:rPr>
+              <a:t>22</a:t>
             </a:r>
           </a:p>
         </p:txBody>
@@ -19565,6 +19981,1052 @@
                 <a:latin typeface="Malgun Gothic"/>
               </a:rPr>
               <a:t>🌐 www.mangoi.co.kr    📞 1644-0561    ✉ support@mangoi.co.kr</a:t>
+            </a:r>
+          </a:p>
+        </p:txBody>
+      </p:sp>
+    </p:spTree>
+  </p:cSld>
+  <p:clrMapOvr>
+    <a:masterClrMapping/>
+  </p:clrMapOvr>
+</p:sld>
+</file>
+
+<file path=ppt/slides/slide26.xml><?xml version="1.0" encoding="utf-8"?>
+<p:sld xmlns:a="http://schemas.openxmlformats.org/drawingml/2006/main" xmlns:p="http://schemas.openxmlformats.org/presentationml/2006/main" xmlns:r="http://schemas.openxmlformats.org/officeDocument/2006/relationships">
+  <p:cSld>
+    <p:spTree>
+      <p:nvGrpSpPr>
+        <p:cNvPr id="1" name=""/>
+        <p:cNvGrpSpPr/>
+        <p:nvPr/>
+      </p:nvGrpSpPr>
+      <p:grpSpPr/>
+      <p:sp>
+        <p:nvSpPr>
+          <p:cNvPr id="2" name="Rectangle 1"/>
+          <p:cNvSpPr/>
+          <p:nvPr/>
+        </p:nvSpPr>
+        <p:spPr>
+          <a:xfrm>
+            <a:off x="0" y="0"/>
+            <a:ext cx="12191695" cy="566928"/>
+          </a:xfrm>
+          <a:prstGeom prst="rect">
+            <a:avLst/>
+          </a:prstGeom>
+          <a:solidFill>
+            <a:srgbClr val="0D9488"/>
+          </a:solidFill>
+          <a:ln>
+            <a:noFill/>
+          </a:ln>
+          <a:effectLst/>
+        </p:spPr>
+        <p:style>
+          <a:lnRef idx="1">
+            <a:schemeClr val="accent1"/>
+          </a:lnRef>
+          <a:fillRef idx="3">
+            <a:schemeClr val="accent1"/>
+          </a:fillRef>
+          <a:effectRef idx="2">
+            <a:schemeClr val="accent1"/>
+          </a:effectRef>
+          <a:fontRef idx="minor">
+            <a:schemeClr val="lt1"/>
+          </a:fontRef>
+        </p:style>
+        <p:txBody>
+          <a:bodyPr rtlCol="0" anchor="ctr"/>
+          <a:lstStyle/>
+          <a:p>
+            <a:pPr algn="ctr"/>
+          </a:p>
+        </p:txBody>
+      </p:sp>
+      <p:sp>
+        <p:nvSpPr>
+          <p:cNvPr id="3" name="Rectangle 2"/>
+          <p:cNvSpPr/>
+          <p:nvPr/>
+        </p:nvSpPr>
+        <p:spPr>
+          <a:xfrm>
+            <a:off x="0" y="566928"/>
+            <a:ext cx="12191695" cy="54864"/>
+          </a:xfrm>
+          <a:prstGeom prst="rect">
+            <a:avLst/>
+          </a:prstGeom>
+          <a:solidFill>
+            <a:srgbClr val="F59E0B"/>
+          </a:solidFill>
+          <a:ln>
+            <a:noFill/>
+          </a:ln>
+          <a:effectLst/>
+        </p:spPr>
+        <p:style>
+          <a:lnRef idx="1">
+            <a:schemeClr val="accent1"/>
+          </a:lnRef>
+          <a:fillRef idx="3">
+            <a:schemeClr val="accent1"/>
+          </a:fillRef>
+          <a:effectRef idx="2">
+            <a:schemeClr val="accent1"/>
+          </a:effectRef>
+          <a:fontRef idx="minor">
+            <a:schemeClr val="lt1"/>
+          </a:fontRef>
+        </p:style>
+        <p:txBody>
+          <a:bodyPr rtlCol="0" anchor="ctr"/>
+          <a:lstStyle/>
+          <a:p>
+            <a:pPr algn="ctr"/>
+          </a:p>
+        </p:txBody>
+      </p:sp>
+      <p:sp>
+        <p:nvSpPr>
+          <p:cNvPr id="4" name="TextBox 3"/>
+          <p:cNvSpPr txBox="1"/>
+          <p:nvPr/>
+        </p:nvSpPr>
+        <p:spPr>
+          <a:xfrm>
+            <a:off x="365760" y="27432"/>
+            <a:ext cx="7315200" cy="502920"/>
+          </a:xfrm>
+          <a:prstGeom prst="rect">
+            <a:avLst/>
+          </a:prstGeom>
+          <a:noFill/>
+        </p:spPr>
+        <p:txBody>
+          <a:bodyPr wrap="square" anchor="ctr">
+            <a:spAutoFit/>
+          </a:bodyPr>
+          <a:lstStyle/>
+          <a:p>
+            <a:pPr algn="l">
+              <a:lnSpc>
+                <a:spcPct val="100000"/>
+              </a:lnSpc>
+            </a:pPr>
+            <a:r>
+              <a:rPr sz="1500" b="1">
+                <a:solidFill>
+                  <a:srgbClr val="FFFFFF"/>
+                </a:solidFill>
+                <a:latin typeface="Malgun Gothic"/>
+              </a:rPr>
+              <a:t>🏢 망고아이 지사용 사용설명서</a:t>
+            </a:r>
+          </a:p>
+        </p:txBody>
+      </p:sp>
+      <p:sp>
+        <p:nvSpPr>
+          <p:cNvPr id="5" name="TextBox 4"/>
+          <p:cNvSpPr txBox="1"/>
+          <p:nvPr/>
+        </p:nvSpPr>
+        <p:spPr>
+          <a:xfrm>
+            <a:off x="8168335" y="27432"/>
+            <a:ext cx="3657600" cy="502920"/>
+          </a:xfrm>
+          <a:prstGeom prst="rect">
+            <a:avLst/>
+          </a:prstGeom>
+          <a:noFill/>
+        </p:spPr>
+        <p:txBody>
+          <a:bodyPr wrap="square" anchor="ctr">
+            <a:spAutoFit/>
+          </a:bodyPr>
+          <a:lstStyle/>
+          <a:p>
+            <a:pPr algn="r">
+              <a:lnSpc>
+                <a:spcPct val="100000"/>
+              </a:lnSpc>
+            </a:pPr>
+            <a:r>
+              <a:rPr sz="1300" b="1">
+                <a:solidFill>
+                  <a:srgbClr val="F1F5F9"/>
+                </a:solidFill>
+                <a:latin typeface="Malgun Gothic"/>
+              </a:rPr>
+              <a:t>차례</a:t>
+            </a:r>
+          </a:p>
+        </p:txBody>
+      </p:sp>
+      <p:sp>
+        <p:nvSpPr>
+          <p:cNvPr id="6" name="TextBox 5"/>
+          <p:cNvSpPr txBox="1"/>
+          <p:nvPr/>
+        </p:nvSpPr>
+        <p:spPr>
+          <a:xfrm>
+            <a:off x="365760" y="749808"/>
+            <a:ext cx="7315200" cy="502920"/>
+          </a:xfrm>
+          <a:prstGeom prst="rect">
+            <a:avLst/>
+          </a:prstGeom>
+          <a:noFill/>
+        </p:spPr>
+        <p:txBody>
+          <a:bodyPr wrap="none">
+            <a:spAutoFit/>
+          </a:bodyPr>
+          <a:lstStyle/>
+          <a:p>
+            <a:r>
+              <a:rPr sz="2200" b="1">
+                <a:solidFill>
+                  <a:srgbClr val="1E2340"/>
+                </a:solidFill>
+                <a:latin typeface="Malgun Gothic"/>
+              </a:rPr>
+              <a:t>📑 차례</a:t>
+            </a:r>
+          </a:p>
+        </p:txBody>
+      </p:sp>
+      <p:sp>
+        <p:nvSpPr>
+          <p:cNvPr id="7" name="TextBox 6"/>
+          <p:cNvSpPr txBox="1"/>
+          <p:nvPr/>
+        </p:nvSpPr>
+        <p:spPr>
+          <a:xfrm>
+            <a:off x="365760" y="1417320"/>
+            <a:ext cx="5500116" cy="5212080"/>
+          </a:xfrm>
+          <a:prstGeom prst="rect">
+            <a:avLst/>
+          </a:prstGeom>
+          <a:noFill/>
+        </p:spPr>
+        <p:txBody>
+          <a:bodyPr wrap="none">
+            <a:spAutoFit/>
+          </a:bodyPr>
+          <a:lstStyle/>
+          <a:p>
+            <a:pPr>
+              <a:spcAft>
+                <a:spcPts val="1935"/>
+              </a:spcAft>
+            </a:pPr>
+            <a:r>
+              <a:rPr sz="1100" b="1">
+                <a:solidFill>
+                  <a:srgbClr val="4F46E5"/>
+                </a:solidFill>
+                <a:latin typeface="Malgun Gothic"/>
+              </a:rPr>
+              <a:t>·   </a:t>
+            </a:r>
+            <a:r>
+              <a:rPr sz="1100">
+                <a:solidFill>
+                  <a:srgbClr val="334155"/>
+                </a:solidFill>
+                <a:latin typeface="Malgun Gothic"/>
+              </a:rPr>
+              <a:t>소개</a:t>
+            </a:r>
+            <a:r>
+              <a:rPr sz="950">
+                <a:solidFill>
+                  <a:srgbClr val="94A3B8"/>
+                </a:solidFill>
+                <a:latin typeface="Malgun Gothic"/>
+              </a:rPr>
+              <a:t>   ·  p.3</a:t>
+            </a:r>
+          </a:p>
+          <a:p>
+            <a:pPr>
+              <a:spcAft>
+                <a:spcPts val="1935"/>
+              </a:spcAft>
+            </a:pPr>
+            <a:r>
+              <a:rPr sz="1100" b="1">
+                <a:solidFill>
+                  <a:srgbClr val="4F46E5"/>
+                </a:solidFill>
+                <a:latin typeface="Malgun Gothic"/>
+              </a:rPr>
+              <a:t>01  </a:t>
+            </a:r>
+            <a:r>
+              <a:rPr sz="1100">
+                <a:solidFill>
+                  <a:srgbClr val="334155"/>
+                </a:solidFill>
+                <a:latin typeface="Malgun Gothic"/>
+              </a:rPr>
+              <a:t>🔐 지사 로그인 &amp; 권한</a:t>
+            </a:r>
+            <a:r>
+              <a:rPr sz="950">
+                <a:solidFill>
+                  <a:srgbClr val="94A3B8"/>
+                </a:solidFill>
+                <a:latin typeface="Malgun Gothic"/>
+              </a:rPr>
+              <a:t>   ·  p.4</a:t>
+            </a:r>
+          </a:p>
+          <a:p>
+            <a:pPr>
+              <a:spcAft>
+                <a:spcPts val="1935"/>
+              </a:spcAft>
+            </a:pPr>
+            <a:r>
+              <a:rPr sz="1100" b="1">
+                <a:solidFill>
+                  <a:srgbClr val="4F46E5"/>
+                </a:solidFill>
+                <a:latin typeface="Malgun Gothic"/>
+              </a:rPr>
+              <a:t>02  </a:t>
+            </a:r>
+            <a:r>
+              <a:rPr sz="1100">
+                <a:solidFill>
+                  <a:srgbClr val="334155"/>
+                </a:solidFill>
+                <a:latin typeface="Malgun Gothic"/>
+              </a:rPr>
+              <a:t>👤 마이페이지 &amp; 관리자 대시보드</a:t>
+            </a:r>
+            <a:r>
+              <a:rPr sz="950">
+                <a:solidFill>
+                  <a:srgbClr val="94A3B8"/>
+                </a:solidFill>
+                <a:latin typeface="Malgun Gothic"/>
+              </a:rPr>
+              <a:t>   ·  p.5</a:t>
+            </a:r>
+          </a:p>
+          <a:p>
+            <a:pPr>
+              <a:spcAft>
+                <a:spcPts val="1935"/>
+              </a:spcAft>
+            </a:pPr>
+            <a:r>
+              <a:rPr sz="1100" b="1">
+                <a:solidFill>
+                  <a:srgbClr val="4F46E5"/>
+                </a:solidFill>
+                <a:latin typeface="Malgun Gothic"/>
+              </a:rPr>
+              <a:t>03  </a:t>
+            </a:r>
+            <a:r>
+              <a:rPr sz="1100">
+                <a:solidFill>
+                  <a:srgbClr val="334155"/>
+                </a:solidFill>
+                <a:latin typeface="Malgun Gothic"/>
+              </a:rPr>
+              <a:t>🏠 지사 대시보드</a:t>
+            </a:r>
+            <a:r>
+              <a:rPr sz="950">
+                <a:solidFill>
+                  <a:srgbClr val="94A3B8"/>
+                </a:solidFill>
+                <a:latin typeface="Malgun Gothic"/>
+              </a:rPr>
+              <a:t>   ·  p.6</a:t>
+            </a:r>
+          </a:p>
+          <a:p>
+            <a:pPr>
+              <a:spcAft>
+                <a:spcPts val="1935"/>
+              </a:spcAft>
+            </a:pPr>
+            <a:r>
+              <a:rPr sz="1100" b="1">
+                <a:solidFill>
+                  <a:srgbClr val="4F46E5"/>
+                </a:solidFill>
+                <a:latin typeface="Malgun Gothic"/>
+              </a:rPr>
+              <a:t>04  </a:t>
+            </a:r>
+            <a:r>
+              <a:rPr sz="1100">
+                <a:solidFill>
+                  <a:srgbClr val="334155"/>
+                </a:solidFill>
+                <a:latin typeface="Malgun Gothic"/>
+              </a:rPr>
+              <a:t>🤖 AI 운영비서 활용</a:t>
+            </a:r>
+            <a:r>
+              <a:rPr sz="950">
+                <a:solidFill>
+                  <a:srgbClr val="94A3B8"/>
+                </a:solidFill>
+                <a:latin typeface="Malgun Gothic"/>
+              </a:rPr>
+              <a:t>   ·  p.7</a:t>
+            </a:r>
+          </a:p>
+          <a:p>
+            <a:pPr>
+              <a:spcAft>
+                <a:spcPts val="1935"/>
+              </a:spcAft>
+            </a:pPr>
+            <a:r>
+              <a:rPr sz="1100" b="1">
+                <a:solidFill>
+                  <a:srgbClr val="4F46E5"/>
+                </a:solidFill>
+                <a:latin typeface="Malgun Gothic"/>
+              </a:rPr>
+              <a:t>05  </a:t>
+            </a:r>
+            <a:r>
+              <a:rPr sz="1100">
+                <a:solidFill>
+                  <a:srgbClr val="334155"/>
+                </a:solidFill>
+                <a:latin typeface="Malgun Gothic"/>
+              </a:rPr>
+              <a:t>🏬 산하 대리점 관리</a:t>
+            </a:r>
+            <a:r>
+              <a:rPr sz="950">
+                <a:solidFill>
+                  <a:srgbClr val="94A3B8"/>
+                </a:solidFill>
+                <a:latin typeface="Malgun Gothic"/>
+              </a:rPr>
+              <a:t>   ·  p.8</a:t>
+            </a:r>
+          </a:p>
+          <a:p>
+            <a:pPr>
+              <a:spcAft>
+                <a:spcPts val="1935"/>
+              </a:spcAft>
+            </a:pPr>
+            <a:r>
+              <a:rPr sz="1100" b="1">
+                <a:solidFill>
+                  <a:srgbClr val="4F46E5"/>
+                </a:solidFill>
+                <a:latin typeface="Malgun Gothic"/>
+              </a:rPr>
+              <a:t>06  </a:t>
+            </a:r>
+            <a:r>
+              <a:rPr sz="1100">
+                <a:solidFill>
+                  <a:srgbClr val="334155"/>
+                </a:solidFill>
+                <a:latin typeface="Malgun Gothic"/>
+              </a:rPr>
+              <a:t>🌳 지사 정산 (수령·배분)</a:t>
+            </a:r>
+            <a:r>
+              <a:rPr sz="950">
+                <a:solidFill>
+                  <a:srgbClr val="94A3B8"/>
+                </a:solidFill>
+                <a:latin typeface="Malgun Gothic"/>
+              </a:rPr>
+              <a:t>   ·  p.9</a:t>
+            </a:r>
+          </a:p>
+          <a:p>
+            <a:pPr>
+              <a:spcAft>
+                <a:spcPts val="1935"/>
+              </a:spcAft>
+            </a:pPr>
+            <a:r>
+              <a:rPr sz="1100" b="1">
+                <a:solidFill>
+                  <a:srgbClr val="4F46E5"/>
+                </a:solidFill>
+                <a:latin typeface="Malgun Gothic"/>
+              </a:rPr>
+              <a:t>07  </a:t>
+            </a:r>
+            <a:r>
+              <a:rPr sz="1100">
+                <a:solidFill>
+                  <a:srgbClr val="334155"/>
+                </a:solidFill>
+                <a:latin typeface="Malgun Gothic"/>
+              </a:rPr>
+              <a:t>🧑‍🎓 학생·학부모 현황</a:t>
+            </a:r>
+            <a:r>
+              <a:rPr sz="950">
+                <a:solidFill>
+                  <a:srgbClr val="94A3B8"/>
+                </a:solidFill>
+                <a:latin typeface="Malgun Gothic"/>
+              </a:rPr>
+              <a:t>   ·  p.10</a:t>
+            </a:r>
+          </a:p>
+          <a:p>
+            <a:pPr>
+              <a:spcAft>
+                <a:spcPts val="1935"/>
+              </a:spcAft>
+            </a:pPr>
+            <a:r>
+              <a:rPr sz="1100" b="1">
+                <a:solidFill>
+                  <a:srgbClr val="4F46E5"/>
+                </a:solidFill>
+                <a:latin typeface="Malgun Gothic"/>
+              </a:rPr>
+              <a:t>08  </a:t>
+            </a:r>
+            <a:r>
+              <a:rPr sz="1100">
+                <a:solidFill>
+                  <a:srgbClr val="334155"/>
+                </a:solidFill>
+                <a:latin typeface="Malgun Gothic"/>
+              </a:rPr>
+              <a:t>💳 결제·미납·환불 (지사)</a:t>
+            </a:r>
+            <a:r>
+              <a:rPr sz="950">
+                <a:solidFill>
+                  <a:srgbClr val="94A3B8"/>
+                </a:solidFill>
+                <a:latin typeface="Malgun Gothic"/>
+              </a:rPr>
+              <a:t>   ·  p.11</a:t>
+            </a:r>
+          </a:p>
+          <a:p>
+            <a:pPr>
+              <a:spcAft>
+                <a:spcPts val="1935"/>
+              </a:spcAft>
+            </a:pPr>
+            <a:r>
+              <a:rPr sz="1100" b="1">
+                <a:solidFill>
+                  <a:srgbClr val="4F46E5"/>
+                </a:solidFill>
+                <a:latin typeface="Malgun Gothic"/>
+              </a:rPr>
+              <a:t>09  </a:t>
+            </a:r>
+            <a:r>
+              <a:rPr sz="1100">
+                <a:solidFill>
+                  <a:srgbClr val="334155"/>
+                </a:solidFill>
+                <a:latin typeface="Malgun Gothic"/>
+              </a:rPr>
+              <a:t>🧲 지사 리텐션 관리</a:t>
+            </a:r>
+            <a:r>
+              <a:rPr sz="950">
+                <a:solidFill>
+                  <a:srgbClr val="94A3B8"/>
+                </a:solidFill>
+                <a:latin typeface="Malgun Gothic"/>
+              </a:rPr>
+              <a:t>   ·  p.12</a:t>
+            </a:r>
+          </a:p>
+          <a:p>
+            <a:pPr>
+              <a:spcAft>
+                <a:spcPts val="1935"/>
+              </a:spcAft>
+            </a:pPr>
+            <a:r>
+              <a:rPr sz="1100" b="1">
+                <a:solidFill>
+                  <a:srgbClr val="4F46E5"/>
+                </a:solidFill>
+                <a:latin typeface="Malgun Gothic"/>
+              </a:rPr>
+              <a:t>10  </a:t>
+            </a:r>
+            <a:r>
+              <a:rPr sz="1100">
+                <a:solidFill>
+                  <a:srgbClr val="334155"/>
+                </a:solidFill>
+                <a:latin typeface="Malgun Gothic"/>
+              </a:rPr>
+              <a:t>📊 월간 리포트·성과 분석</a:t>
+            </a:r>
+            <a:r>
+              <a:rPr sz="950">
+                <a:solidFill>
+                  <a:srgbClr val="94A3B8"/>
+                </a:solidFill>
+                <a:latin typeface="Malgun Gothic"/>
+              </a:rPr>
+              <a:t>   ·  p.13</a:t>
+            </a:r>
+          </a:p>
+          <a:p>
+            <a:pPr>
+              <a:spcAft>
+                <a:spcPts val="1935"/>
+              </a:spcAft>
+            </a:pPr>
+            <a:r>
+              <a:rPr sz="1100" b="1">
+                <a:solidFill>
+                  <a:srgbClr val="4F46E5"/>
+                </a:solidFill>
+                <a:latin typeface="Malgun Gothic"/>
+              </a:rPr>
+              <a:t>11  </a:t>
+            </a:r>
+            <a:r>
+              <a:rPr sz="1100">
+                <a:solidFill>
+                  <a:srgbClr val="334155"/>
+                </a:solidFill>
+                <a:latin typeface="Malgun Gothic"/>
+              </a:rPr>
+              <a:t>🎓 대리점 지원·교육</a:t>
+            </a:r>
+            <a:r>
+              <a:rPr sz="950">
+                <a:solidFill>
+                  <a:srgbClr val="94A3B8"/>
+                </a:solidFill>
+                <a:latin typeface="Malgun Gothic"/>
+              </a:rPr>
+              <a:t>   ·  p.14</a:t>
+            </a:r>
+          </a:p>
+        </p:txBody>
+      </p:sp>
+      <p:sp>
+        <p:nvSpPr>
+          <p:cNvPr id="8" name="TextBox 7"/>
+          <p:cNvSpPr txBox="1"/>
+          <p:nvPr/>
+        </p:nvSpPr>
+        <p:spPr>
+          <a:xfrm>
+            <a:off x="6094476" y="1417320"/>
+            <a:ext cx="5500116" cy="5212080"/>
+          </a:xfrm>
+          <a:prstGeom prst="rect">
+            <a:avLst/>
+          </a:prstGeom>
+          <a:noFill/>
+        </p:spPr>
+        <p:txBody>
+          <a:bodyPr wrap="none">
+            <a:spAutoFit/>
+          </a:bodyPr>
+          <a:lstStyle/>
+          <a:p>
+            <a:pPr>
+              <a:spcAft>
+                <a:spcPts val="1935"/>
+              </a:spcAft>
+            </a:pPr>
+            <a:r>
+              <a:rPr sz="1100" b="1">
+                <a:solidFill>
+                  <a:srgbClr val="4F46E5"/>
+                </a:solidFill>
+                <a:latin typeface="Malgun Gothic"/>
+              </a:rPr>
+              <a:t>12  </a:t>
+            </a:r>
+            <a:r>
+              <a:rPr sz="1100">
+                <a:solidFill>
+                  <a:srgbClr val="334155"/>
+                </a:solidFill>
+                <a:latin typeface="Malgun Gothic"/>
+              </a:rPr>
+              <a:t>🎧 고객센터·문의</a:t>
+            </a:r>
+            <a:r>
+              <a:rPr sz="950">
+                <a:solidFill>
+                  <a:srgbClr val="94A3B8"/>
+                </a:solidFill>
+                <a:latin typeface="Malgun Gothic"/>
+              </a:rPr>
+              <a:t>   ·  p.15</a:t>
+            </a:r>
+          </a:p>
+          <a:p>
+            <a:pPr>
+              <a:spcAft>
+                <a:spcPts val="1935"/>
+              </a:spcAft>
+            </a:pPr>
+            <a:r>
+              <a:rPr sz="1100" b="1">
+                <a:solidFill>
+                  <a:srgbClr val="4F46E5"/>
+                </a:solidFill>
+                <a:latin typeface="Malgun Gothic"/>
+              </a:rPr>
+              <a:t>13  </a:t>
+            </a:r>
+            <a:r>
+              <a:rPr sz="1100">
+                <a:solidFill>
+                  <a:srgbClr val="334155"/>
+                </a:solidFill>
+                <a:latin typeface="Malgun Gothic"/>
+              </a:rPr>
+              <a:t>🕐 한국·필리핀 듀얼 시계</a:t>
+            </a:r>
+            <a:r>
+              <a:rPr sz="950">
+                <a:solidFill>
+                  <a:srgbClr val="94A3B8"/>
+                </a:solidFill>
+                <a:latin typeface="Malgun Gothic"/>
+              </a:rPr>
+              <a:t>   ·  p.16</a:t>
+            </a:r>
+          </a:p>
+          <a:p>
+            <a:pPr>
+              <a:spcAft>
+                <a:spcPts val="1935"/>
+              </a:spcAft>
+            </a:pPr>
+            <a:r>
+              <a:rPr sz="1100" b="1">
+                <a:solidFill>
+                  <a:srgbClr val="4F46E5"/>
+                </a:solidFill>
+                <a:latin typeface="Malgun Gothic"/>
+              </a:rPr>
+              <a:t>14  </a:t>
+            </a:r>
+            <a:r>
+              <a:rPr sz="1100">
+                <a:solidFill>
+                  <a:srgbClr val="334155"/>
+                </a:solidFill>
+                <a:latin typeface="Malgun Gothic"/>
+              </a:rPr>
+              <a:t>🇨🇳 중국어 발음 코치</a:t>
+            </a:r>
+            <a:r>
+              <a:rPr sz="950">
+                <a:solidFill>
+                  <a:srgbClr val="94A3B8"/>
+                </a:solidFill>
+                <a:latin typeface="Malgun Gothic"/>
+              </a:rPr>
+              <a:t>   ·  p.17</a:t>
+            </a:r>
+          </a:p>
+          <a:p>
+            <a:pPr>
+              <a:spcAft>
+                <a:spcPts val="1935"/>
+              </a:spcAft>
+            </a:pPr>
+            <a:r>
+              <a:rPr sz="1100" b="1">
+                <a:solidFill>
+                  <a:srgbClr val="4F46E5"/>
+                </a:solidFill>
+                <a:latin typeface="Malgun Gothic"/>
+              </a:rPr>
+              <a:t>15  </a:t>
+            </a:r>
+            <a:r>
+              <a:rPr sz="1100">
+                <a:solidFill>
+                  <a:srgbClr val="334155"/>
+                </a:solidFill>
+                <a:latin typeface="Malgun Gothic"/>
+              </a:rPr>
+              <a:t>🌟 수업 중 칭찬 포인트 (이해·활용)</a:t>
+            </a:r>
+            <a:r>
+              <a:rPr sz="950">
+                <a:solidFill>
+                  <a:srgbClr val="94A3B8"/>
+                </a:solidFill>
+                <a:latin typeface="Malgun Gothic"/>
+              </a:rPr>
+              <a:t>   ·  p.18</a:t>
+            </a:r>
+          </a:p>
+          <a:p>
+            <a:pPr>
+              <a:spcAft>
+                <a:spcPts val="1935"/>
+              </a:spcAft>
+            </a:pPr>
+            <a:r>
+              <a:rPr sz="1100" b="1">
+                <a:solidFill>
+                  <a:srgbClr val="4F46E5"/>
+                </a:solidFill>
+                <a:latin typeface="Malgun Gothic"/>
+              </a:rPr>
+              <a:t>16  </a:t>
+            </a:r>
+            <a:r>
+              <a:rPr sz="1100">
+                <a:solidFill>
+                  <a:srgbClr val="334155"/>
+                </a:solidFill>
+                <a:latin typeface="Malgun Gothic"/>
+              </a:rPr>
+              <a:t>📢 공지 스튜디오 (포스터 + 팝업)</a:t>
+            </a:r>
+            <a:r>
+              <a:rPr sz="950">
+                <a:solidFill>
+                  <a:srgbClr val="94A3B8"/>
+                </a:solidFill>
+                <a:latin typeface="Malgun Gothic"/>
+              </a:rPr>
+              <a:t>   ·  p.19</a:t>
+            </a:r>
+          </a:p>
+          <a:p>
+            <a:pPr>
+              <a:spcAft>
+                <a:spcPts val="1935"/>
+              </a:spcAft>
+            </a:pPr>
+            <a:r>
+              <a:rPr sz="1100" b="1">
+                <a:solidFill>
+                  <a:srgbClr val="4F46E5"/>
+                </a:solidFill>
+                <a:latin typeface="Malgun Gothic"/>
+              </a:rPr>
+              <a:t>17  </a:t>
+            </a:r>
+            <a:r>
+              <a:rPr sz="1100">
+                <a:solidFill>
+                  <a:srgbClr val="334155"/>
+                </a:solidFill>
+                <a:latin typeface="Malgun Gothic"/>
+              </a:rPr>
+              <a:t>🤖 AI 운영비서에게 시키기</a:t>
+            </a:r>
+            <a:r>
+              <a:rPr sz="950">
+                <a:solidFill>
+                  <a:srgbClr val="94A3B8"/>
+                </a:solidFill>
+                <a:latin typeface="Malgun Gothic"/>
+              </a:rPr>
+              <a:t>   ·  p.20</a:t>
+            </a:r>
+          </a:p>
+          <a:p>
+            <a:pPr>
+              <a:spcAft>
+                <a:spcPts val="1935"/>
+              </a:spcAft>
+            </a:pPr>
+            <a:r>
+              <a:rPr sz="1100" b="1">
+                <a:solidFill>
+                  <a:srgbClr val="4F46E5"/>
+                </a:solidFill>
+                <a:latin typeface="Malgun Gothic"/>
+              </a:rPr>
+              <a:t>18  </a:t>
+            </a:r>
+            <a:r>
+              <a:rPr sz="1100">
+                <a:solidFill>
+                  <a:srgbClr val="334155"/>
+                </a:solidFill>
+                <a:latin typeface="Malgun Gothic"/>
+              </a:rPr>
+              <a:t>지사 기능 한눈에</a:t>
+            </a:r>
+            <a:r>
+              <a:rPr sz="950">
+                <a:solidFill>
+                  <a:srgbClr val="94A3B8"/>
+                </a:solidFill>
+                <a:latin typeface="Malgun Gothic"/>
+              </a:rPr>
+              <a:t>   ·  p.21</a:t>
+            </a:r>
+          </a:p>
+          <a:p>
+            <a:pPr>
+              <a:spcAft>
+                <a:spcPts val="1935"/>
+              </a:spcAft>
+            </a:pPr>
+            <a:r>
+              <a:rPr sz="1100" b="1">
+                <a:solidFill>
+                  <a:srgbClr val="4F46E5"/>
+                </a:solidFill>
+                <a:latin typeface="Malgun Gothic"/>
+              </a:rPr>
+              <a:t>19  </a:t>
+            </a:r>
+            <a:r>
+              <a:rPr sz="1100">
+                <a:solidFill>
+                  <a:srgbClr val="334155"/>
+                </a:solidFill>
+                <a:latin typeface="Malgun Gothic"/>
+              </a:rPr>
+              <a:t>한눈에 보는 데이터</a:t>
+            </a:r>
+            <a:r>
+              <a:rPr sz="950">
+                <a:solidFill>
+                  <a:srgbClr val="94A3B8"/>
+                </a:solidFill>
+                <a:latin typeface="Malgun Gothic"/>
+              </a:rPr>
+              <a:t>   ·  p.22</a:t>
+            </a:r>
+          </a:p>
+          <a:p>
+            <a:pPr>
+              <a:spcAft>
+                <a:spcPts val="1935"/>
+              </a:spcAft>
+            </a:pPr>
+            <a:r>
+              <a:rPr sz="1100" b="1">
+                <a:solidFill>
+                  <a:srgbClr val="4F46E5"/>
+                </a:solidFill>
+                <a:latin typeface="Malgun Gothic"/>
+              </a:rPr>
+              <a:t>20  </a:t>
+            </a:r>
+            <a:r>
+              <a:rPr sz="1100">
+                <a:solidFill>
+                  <a:srgbClr val="334155"/>
+                </a:solidFill>
+                <a:latin typeface="Malgun Gothic"/>
+              </a:rPr>
+              <a:t>자주 묻는 질문 (FAQ)</a:t>
+            </a:r>
+            <a:r>
+              <a:rPr sz="950">
+                <a:solidFill>
+                  <a:srgbClr val="94A3B8"/>
+                </a:solidFill>
+                <a:latin typeface="Malgun Gothic"/>
+              </a:rPr>
+              <a:t>   ·  p.23</a:t>
+            </a:r>
+          </a:p>
+          <a:p>
+            <a:pPr>
+              <a:spcAft>
+                <a:spcPts val="1935"/>
+              </a:spcAft>
+            </a:pPr>
+            <a:r>
+              <a:rPr sz="1100" b="1">
+                <a:solidFill>
+                  <a:srgbClr val="4F46E5"/>
+                </a:solidFill>
+                <a:latin typeface="Malgun Gothic"/>
+              </a:rPr>
+              <a:t>21  </a:t>
+            </a:r>
+            <a:r>
+              <a:rPr sz="1100">
+                <a:solidFill>
+                  <a:srgbClr val="334155"/>
+                </a:solidFill>
+                <a:latin typeface="Malgun Gothic"/>
+              </a:rPr>
+              <a:t>지사 운영 체크리스트</a:t>
+            </a:r>
+            <a:r>
+              <a:rPr sz="950">
+                <a:solidFill>
+                  <a:srgbClr val="94A3B8"/>
+                </a:solidFill>
+                <a:latin typeface="Malgun Gothic"/>
+              </a:rPr>
+              <a:t>   ·  p.24</a:t>
+            </a:r>
+          </a:p>
+          <a:p>
+            <a:pPr>
+              <a:spcAft>
+                <a:spcPts val="1935"/>
+              </a:spcAft>
+            </a:pPr>
+            <a:r>
+              <a:rPr sz="1100" b="1">
+                <a:solidFill>
+                  <a:srgbClr val="4F46E5"/>
+                </a:solidFill>
+                <a:latin typeface="Malgun Gothic"/>
+              </a:rPr>
+              <a:t>22  </a:t>
+            </a:r>
+            <a:r>
+              <a:rPr sz="1100">
+                <a:solidFill>
+                  <a:srgbClr val="334155"/>
+                </a:solidFill>
+                <a:latin typeface="Malgun Gothic"/>
+              </a:rPr>
+              <a:t>마무리 · 지사 성장을 위한 실천 가이드</a:t>
+            </a:r>
+            <a:r>
+              <a:rPr sz="950">
+                <a:solidFill>
+                  <a:srgbClr val="94A3B8"/>
+                </a:solidFill>
+                <a:latin typeface="Malgun Gothic"/>
+              </a:rPr>
+              <a:t>   ·  p.25</a:t>
             </a:r>
           </a:p>
         </p:txBody>

--- a/cloudflare-deploy/public/library/branch/hq-kr.pptx
+++ b/cloudflare-deploy/public/library/branch/hq-kr.pptx
@@ -6,7 +6,7 @@
   </p:sldMasterIdLst>
   <p:sldIdLst>
     <p:sldId id="256" r:id="rId7"/>
-    <p:sldId id="281" r:id="rId32"/>
+    <p:sldId id="282" r:id="rId33"/>
     <p:sldId id="257" r:id="rId8"/>
     <p:sldId id="258" r:id="rId9"/>
     <p:sldId id="259" r:id="rId10"/>
@@ -31,6 +31,7 @@
     <p:sldId id="278" r:id="rId29"/>
     <p:sldId id="279" r:id="rId30"/>
     <p:sldId id="280" r:id="rId31"/>
+    <p:sldId id="281" r:id="rId32"/>
   </p:sldIdLst>
   <p:sldSz cx="12191695" cy="6858000" type="screen4x3"/>
   <p:notesSz cx="6858000" cy="9144000"/>
@@ -14823,6 +14824,992 @@
 </file>
 
 <file path=ppt/slides/slide20.xml><?xml version="1.0" encoding="utf-8"?>
+<p:sld xmlns:a="http://schemas.openxmlformats.org/drawingml/2006/main" xmlns:p="http://schemas.openxmlformats.org/presentationml/2006/main" xmlns:r="http://schemas.openxmlformats.org/officeDocument/2006/relationships">
+  <p:cSld>
+    <p:bg>
+      <p:bgPr>
+        <a:solidFill>
+          <a:srgbClr val="FFFFFF"/>
+        </a:solidFill>
+        <a:effectLst/>
+      </p:bgPr>
+    </p:bg>
+    <p:spTree>
+      <p:nvGrpSpPr>
+        <p:cNvPr id="1" name=""/>
+        <p:cNvGrpSpPr/>
+        <p:nvPr/>
+      </p:nvGrpSpPr>
+      <p:grpSpPr/>
+      <p:sp>
+        <p:nvSpPr>
+          <p:cNvPr id="2" name="Rectangle 1"/>
+          <p:cNvSpPr/>
+          <p:nvPr/>
+        </p:nvSpPr>
+        <p:spPr>
+          <a:xfrm>
+            <a:off x="0" y="0"/>
+            <a:ext cx="12191695" cy="566928"/>
+          </a:xfrm>
+          <a:prstGeom prst="rect">
+            <a:avLst/>
+          </a:prstGeom>
+          <a:solidFill>
+            <a:srgbClr val="0D9488"/>
+          </a:solidFill>
+          <a:ln>
+            <a:noFill/>
+          </a:ln>
+          <a:effectLst/>
+        </p:spPr>
+        <p:style>
+          <a:lnRef idx="1">
+            <a:schemeClr val="accent1"/>
+          </a:lnRef>
+          <a:fillRef idx="3">
+            <a:schemeClr val="accent1"/>
+          </a:fillRef>
+          <a:effectRef idx="2">
+            <a:schemeClr val="accent1"/>
+          </a:effectRef>
+          <a:fontRef idx="minor">
+            <a:schemeClr val="lt1"/>
+          </a:fontRef>
+        </p:style>
+        <p:txBody>
+          <a:bodyPr rtlCol="0" anchor="ctr"/>
+          <a:lstStyle/>
+          <a:p>
+            <a:pPr algn="ctr"/>
+          </a:p>
+        </p:txBody>
+      </p:sp>
+      <p:sp>
+        <p:nvSpPr>
+          <p:cNvPr id="3" name="Rectangle 2"/>
+          <p:cNvSpPr/>
+          <p:nvPr/>
+        </p:nvSpPr>
+        <p:spPr>
+          <a:xfrm>
+            <a:off x="0" y="566928"/>
+            <a:ext cx="12191695" cy="54864"/>
+          </a:xfrm>
+          <a:prstGeom prst="rect">
+            <a:avLst/>
+          </a:prstGeom>
+          <a:solidFill>
+            <a:srgbClr val="F59E0B"/>
+          </a:solidFill>
+          <a:ln>
+            <a:noFill/>
+          </a:ln>
+          <a:effectLst/>
+        </p:spPr>
+        <p:style>
+          <a:lnRef idx="1">
+            <a:schemeClr val="accent1"/>
+          </a:lnRef>
+          <a:fillRef idx="3">
+            <a:schemeClr val="accent1"/>
+          </a:fillRef>
+          <a:effectRef idx="2">
+            <a:schemeClr val="accent1"/>
+          </a:effectRef>
+          <a:fontRef idx="minor">
+            <a:schemeClr val="lt1"/>
+          </a:fontRef>
+        </p:style>
+        <p:txBody>
+          <a:bodyPr rtlCol="0" anchor="ctr"/>
+          <a:lstStyle/>
+          <a:p>
+            <a:pPr algn="ctr"/>
+          </a:p>
+        </p:txBody>
+      </p:sp>
+      <p:sp>
+        <p:nvSpPr>
+          <p:cNvPr id="4" name="TextBox 3"/>
+          <p:cNvSpPr txBox="1"/>
+          <p:nvPr/>
+        </p:nvSpPr>
+        <p:spPr>
+          <a:xfrm>
+            <a:off x="365760" y="27432"/>
+            <a:ext cx="7315200" cy="502920"/>
+          </a:xfrm>
+          <a:prstGeom prst="rect">
+            <a:avLst/>
+          </a:prstGeom>
+          <a:noFill/>
+        </p:spPr>
+        <p:txBody>
+          <a:bodyPr wrap="square" anchor="ctr">
+            <a:spAutoFit/>
+          </a:bodyPr>
+          <a:lstStyle/>
+          <a:p>
+            <a:pPr algn="l">
+              <a:lnSpc>
+                <a:spcPct val="100000"/>
+              </a:lnSpc>
+            </a:pPr>
+            <a:r>
+              <a:rPr sz="1500" b="1">
+                <a:solidFill>
+                  <a:srgbClr val="FFFFFF"/>
+                </a:solidFill>
+                <a:latin typeface="Malgun Gothic"/>
+              </a:rPr>
+              <a:t>🏢 망고아이 지사용 사용설명서</a:t>
+            </a:r>
+          </a:p>
+        </p:txBody>
+      </p:sp>
+      <p:sp>
+        <p:nvSpPr>
+          <p:cNvPr id="5" name="TextBox 4"/>
+          <p:cNvSpPr txBox="1"/>
+          <p:nvPr/>
+        </p:nvSpPr>
+        <p:spPr>
+          <a:xfrm>
+            <a:off x="8168335" y="27432"/>
+            <a:ext cx="3657600" cy="502920"/>
+          </a:xfrm>
+          <a:prstGeom prst="rect">
+            <a:avLst/>
+          </a:prstGeom>
+          <a:noFill/>
+        </p:spPr>
+        <p:txBody>
+          <a:bodyPr wrap="square" anchor="ctr">
+            <a:spAutoFit/>
+          </a:bodyPr>
+          <a:lstStyle/>
+          <a:p>
+            <a:pPr algn="r">
+              <a:lnSpc>
+                <a:spcPct val="100000"/>
+              </a:lnSpc>
+            </a:pPr>
+            <a:r>
+              <a:rPr sz="1300" b="1">
+                <a:solidFill>
+                  <a:srgbClr val="F1F5F9"/>
+                </a:solidFill>
+                <a:latin typeface="Malgun Gothic"/>
+              </a:rPr>
+              <a:t>주요 기능 사용법</a:t>
+            </a:r>
+          </a:p>
+        </p:txBody>
+      </p:sp>
+      <p:sp>
+        <p:nvSpPr>
+          <p:cNvPr id="6" name="Rounded Rectangle 5"/>
+          <p:cNvSpPr/>
+          <p:nvPr/>
+        </p:nvSpPr>
+        <p:spPr>
+          <a:xfrm>
+            <a:off x="365760" y="822960"/>
+            <a:ext cx="868680" cy="868680"/>
+          </a:xfrm>
+          <a:prstGeom prst="roundRect">
+            <a:avLst/>
+          </a:prstGeom>
+          <a:solidFill>
+            <a:srgbClr val="0D9488"/>
+          </a:solidFill>
+          <a:ln>
+            <a:noFill/>
+          </a:ln>
+          <a:effectLst/>
+        </p:spPr>
+        <p:style>
+          <a:lnRef idx="1">
+            <a:schemeClr val="accent1"/>
+          </a:lnRef>
+          <a:fillRef idx="3">
+            <a:schemeClr val="accent1"/>
+          </a:fillRef>
+          <a:effectRef idx="2">
+            <a:schemeClr val="accent1"/>
+          </a:effectRef>
+          <a:fontRef idx="minor">
+            <a:schemeClr val="lt1"/>
+          </a:fontRef>
+        </p:style>
+        <p:txBody>
+          <a:bodyPr rtlCol="0" anchor="ctr"/>
+          <a:lstStyle/>
+          <a:p>
+            <a:pPr algn="ctr"/>
+          </a:p>
+        </p:txBody>
+      </p:sp>
+      <p:sp>
+        <p:nvSpPr>
+          <p:cNvPr id="7" name="TextBox 6"/>
+          <p:cNvSpPr txBox="1"/>
+          <p:nvPr/>
+        </p:nvSpPr>
+        <p:spPr>
+          <a:xfrm>
+            <a:off x="365760" y="822960"/>
+            <a:ext cx="868680" cy="868680"/>
+          </a:xfrm>
+          <a:prstGeom prst="rect">
+            <a:avLst/>
+          </a:prstGeom>
+          <a:noFill/>
+        </p:spPr>
+        <p:txBody>
+          <a:bodyPr wrap="square" anchor="ctr">
+            <a:spAutoFit/>
+          </a:bodyPr>
+          <a:lstStyle/>
+          <a:p>
+            <a:pPr algn="ctr">
+              <a:lnSpc>
+                <a:spcPct val="100000"/>
+              </a:lnSpc>
+            </a:pPr>
+            <a:r>
+              <a:rPr sz="2600" b="1">
+                <a:solidFill>
+                  <a:srgbClr val="FFFFFF"/>
+                </a:solidFill>
+                <a:latin typeface="Malgun Gothic"/>
+              </a:rPr>
+              <a:t>18</a:t>
+            </a:r>
+          </a:p>
+        </p:txBody>
+      </p:sp>
+      <p:sp>
+        <p:nvSpPr>
+          <p:cNvPr id="8" name="TextBox 7"/>
+          <p:cNvSpPr txBox="1"/>
+          <p:nvPr/>
+        </p:nvSpPr>
+        <p:spPr>
+          <a:xfrm>
+            <a:off x="1371600" y="822960"/>
+            <a:ext cx="10424160" cy="502920"/>
+          </a:xfrm>
+          <a:prstGeom prst="rect">
+            <a:avLst/>
+          </a:prstGeom>
+          <a:noFill/>
+        </p:spPr>
+        <p:txBody>
+          <a:bodyPr wrap="square" anchor="t">
+            <a:spAutoFit/>
+          </a:bodyPr>
+          <a:lstStyle/>
+          <a:p>
+            <a:pPr algn="l">
+              <a:lnSpc>
+                <a:spcPct val="100000"/>
+              </a:lnSpc>
+            </a:pPr>
+            <a:r>
+              <a:rPr sz="2300" b="1">
+                <a:solidFill>
+                  <a:srgbClr val="1E2340"/>
+                </a:solidFill>
+                <a:latin typeface="Malgun Gothic"/>
+              </a:rPr>
+              <a:t>💬 자료실 카카오톡 링크 공유</a:t>
+            </a:r>
+          </a:p>
+        </p:txBody>
+      </p:sp>
+      <p:sp>
+        <p:nvSpPr>
+          <p:cNvPr id="9" name="TextBox 8"/>
+          <p:cNvSpPr txBox="1"/>
+          <p:nvPr/>
+        </p:nvSpPr>
+        <p:spPr>
+          <a:xfrm>
+            <a:off x="1417320" y="1353312"/>
+            <a:ext cx="10424160" cy="320040"/>
+          </a:xfrm>
+          <a:prstGeom prst="rect">
+            <a:avLst/>
+          </a:prstGeom>
+          <a:noFill/>
+        </p:spPr>
+        <p:txBody>
+          <a:bodyPr wrap="square" anchor="t">
+            <a:spAutoFit/>
+          </a:bodyPr>
+          <a:lstStyle/>
+          <a:p>
+            <a:pPr algn="l">
+              <a:lnSpc>
+                <a:spcPct val="100000"/>
+              </a:lnSpc>
+            </a:pPr>
+            <a:r>
+              <a:rPr sz="1300" b="0">
+                <a:solidFill>
+                  <a:srgbClr val="64748B"/>
+                </a:solidFill>
+                <a:latin typeface="Malgun Gothic"/>
+              </a:rPr>
+              <a:t>영상·문서를 원본 화질 그대로 카톡으로</a:t>
+            </a:r>
+          </a:p>
+        </p:txBody>
+      </p:sp>
+      <p:sp>
+        <p:nvSpPr>
+          <p:cNvPr id="10" name="Rounded Rectangle 9"/>
+          <p:cNvSpPr/>
+          <p:nvPr/>
+        </p:nvSpPr>
+        <p:spPr>
+          <a:xfrm>
+            <a:off x="365760" y="1828800"/>
+            <a:ext cx="11430000" cy="777240"/>
+          </a:xfrm>
+          <a:prstGeom prst="roundRect">
+            <a:avLst/>
+          </a:prstGeom>
+          <a:solidFill>
+            <a:srgbClr val="ECFDF5"/>
+          </a:solidFill>
+          <a:ln>
+            <a:noFill/>
+          </a:ln>
+          <a:effectLst/>
+        </p:spPr>
+        <p:style>
+          <a:lnRef idx="1">
+            <a:schemeClr val="accent1"/>
+          </a:lnRef>
+          <a:fillRef idx="3">
+            <a:schemeClr val="accent1"/>
+          </a:fillRef>
+          <a:effectRef idx="2">
+            <a:schemeClr val="accent1"/>
+          </a:effectRef>
+          <a:fontRef idx="minor">
+            <a:schemeClr val="lt1"/>
+          </a:fontRef>
+        </p:style>
+        <p:txBody>
+          <a:bodyPr rtlCol="0" anchor="ctr"/>
+          <a:lstStyle/>
+          <a:p>
+            <a:pPr algn="ctr"/>
+          </a:p>
+        </p:txBody>
+      </p:sp>
+      <p:sp>
+        <p:nvSpPr>
+          <p:cNvPr id="11" name="TextBox 10"/>
+          <p:cNvSpPr txBox="1"/>
+          <p:nvPr/>
+        </p:nvSpPr>
+        <p:spPr>
+          <a:xfrm>
+            <a:off x="548640" y="1901952"/>
+            <a:ext cx="11064240" cy="640080"/>
+          </a:xfrm>
+          <a:prstGeom prst="rect">
+            <a:avLst/>
+          </a:prstGeom>
+          <a:noFill/>
+        </p:spPr>
+        <p:txBody>
+          <a:bodyPr wrap="square" anchor="t">
+            <a:spAutoFit/>
+          </a:bodyPr>
+          <a:lstStyle/>
+          <a:p>
+            <a:pPr algn="l">
+              <a:lnSpc>
+                <a:spcPct val="115000"/>
+              </a:lnSpc>
+            </a:pPr>
+            <a:r>
+              <a:rPr sz="1200" b="0">
+                <a:solidFill>
+                  <a:srgbClr val="334155"/>
+                </a:solidFill>
+                <a:latin typeface="Malgun Gothic"/>
+              </a:rPr>
+              <a:t>자료실의 설명서·영상마다 ‘💬 카톡 링크복사’ 버튼이 생겼어요. 카카오톡에 파일을 첨부하면 화질이 눌리지만, 링크로 보내면 원본 화질 그대로 재생돼요. 버튼 한 번으로 링크가 복사되니 학부모·강사 안내가 훨씬 쉬워요.</a:t>
+            </a:r>
+          </a:p>
+        </p:txBody>
+      </p:sp>
+      <p:sp>
+        <p:nvSpPr>
+          <p:cNvPr id="12" name="TextBox 11"/>
+          <p:cNvSpPr txBox="1"/>
+          <p:nvPr/>
+        </p:nvSpPr>
+        <p:spPr>
+          <a:xfrm>
+            <a:off x="457200" y="2743200"/>
+            <a:ext cx="5669280" cy="320040"/>
+          </a:xfrm>
+          <a:prstGeom prst="rect">
+            <a:avLst/>
+          </a:prstGeom>
+          <a:noFill/>
+        </p:spPr>
+        <p:txBody>
+          <a:bodyPr wrap="square" anchor="t">
+            <a:spAutoFit/>
+          </a:bodyPr>
+          <a:lstStyle/>
+          <a:p>
+            <a:pPr algn="l">
+              <a:lnSpc>
+                <a:spcPct val="100000"/>
+              </a:lnSpc>
+            </a:pPr>
+            <a:r>
+              <a:rPr sz="1350" b="1">
+                <a:solidFill>
+                  <a:srgbClr val="0D9488"/>
+                </a:solidFill>
+                <a:latin typeface="Malgun Gothic"/>
+              </a:rPr>
+              <a:t>사용 방법</a:t>
+            </a:r>
+          </a:p>
+        </p:txBody>
+      </p:sp>
+      <p:sp>
+        <p:nvSpPr>
+          <p:cNvPr id="13" name="TextBox 12"/>
+          <p:cNvSpPr txBox="1"/>
+          <p:nvPr/>
+        </p:nvSpPr>
+        <p:spPr>
+          <a:xfrm>
+            <a:off x="457200" y="3108960"/>
+            <a:ext cx="5669280" cy="2377440"/>
+          </a:xfrm>
+          <a:prstGeom prst="rect">
+            <a:avLst/>
+          </a:prstGeom>
+          <a:noFill/>
+        </p:spPr>
+        <p:txBody>
+          <a:bodyPr wrap="square">
+            <a:spAutoFit/>
+          </a:bodyPr>
+          <a:lstStyle/>
+          <a:p>
+            <a:pPr>
+              <a:lnSpc>
+                <a:spcPct val="115000"/>
+              </a:lnSpc>
+              <a:spcAft>
+                <a:spcPts val="600"/>
+              </a:spcAft>
+            </a:pPr>
+            <a:r>
+              <a:rPr sz="1050" b="1">
+                <a:solidFill>
+                  <a:srgbClr val="0D9488"/>
+                </a:solidFill>
+                <a:latin typeface="Malgun Gothic"/>
+              </a:rPr>
+              <a:t>● </a:t>
+            </a:r>
+            <a:r>
+              <a:rPr sz="1250">
+                <a:solidFill>
+                  <a:srgbClr val="334155"/>
+                </a:solidFill>
+                <a:latin typeface="Malgun Gothic"/>
+              </a:rPr>
+              <a:t>관리자 자료실에서 공유할 파일 옆 💬 카톡 링크복사를 눌러요.</a:t>
+            </a:r>
+          </a:p>
+          <a:p>
+            <a:pPr>
+              <a:lnSpc>
+                <a:spcPct val="115000"/>
+              </a:lnSpc>
+              <a:spcAft>
+                <a:spcPts val="600"/>
+              </a:spcAft>
+            </a:pPr>
+            <a:r>
+              <a:rPr sz="1050" b="1">
+                <a:solidFill>
+                  <a:srgbClr val="0D9488"/>
+                </a:solidFill>
+                <a:latin typeface="Malgun Gothic"/>
+              </a:rPr>
+              <a:t>● </a:t>
+            </a:r>
+            <a:r>
+              <a:rPr sz="1250">
+                <a:solidFill>
+                  <a:srgbClr val="334155"/>
+                </a:solidFill>
+                <a:latin typeface="Malgun Gothic"/>
+              </a:rPr>
+              <a:t>카카오톡 대화방에 붙여넣기로 보내요.</a:t>
+            </a:r>
+          </a:p>
+          <a:p>
+            <a:pPr>
+              <a:lnSpc>
+                <a:spcPct val="115000"/>
+              </a:lnSpc>
+              <a:spcAft>
+                <a:spcPts val="600"/>
+              </a:spcAft>
+            </a:pPr>
+            <a:r>
+              <a:rPr sz="1050" b="1">
+                <a:solidFill>
+                  <a:srgbClr val="0D9488"/>
+                </a:solidFill>
+                <a:latin typeface="Malgun Gothic"/>
+              </a:rPr>
+              <a:t>● </a:t>
+            </a:r>
+            <a:r>
+              <a:rPr sz="1250">
+                <a:solidFill>
+                  <a:srgbClr val="334155"/>
+                </a:solidFill>
+                <a:latin typeface="Malgun Gothic"/>
+              </a:rPr>
+              <a:t>받는 사람은 링크를 눌러 원본 화질로 바로 보거나 내려받아요.</a:t>
+            </a:r>
+          </a:p>
+        </p:txBody>
+      </p:sp>
+      <p:sp>
+        <p:nvSpPr>
+          <p:cNvPr id="14" name="Rounded Rectangle 13"/>
+          <p:cNvSpPr/>
+          <p:nvPr/>
+        </p:nvSpPr>
+        <p:spPr>
+          <a:xfrm>
+            <a:off x="457200" y="4398264"/>
+            <a:ext cx="5669280" cy="1005840"/>
+          </a:xfrm>
+          <a:prstGeom prst="roundRect">
+            <a:avLst/>
+          </a:prstGeom>
+          <a:solidFill>
+            <a:srgbClr val="F4F7FF"/>
+          </a:solidFill>
+          <a:ln w="12700">
+            <a:solidFill>
+              <a:srgbClr val="0D9488"/>
+            </a:solidFill>
+          </a:ln>
+          <a:effectLst/>
+        </p:spPr>
+        <p:style>
+          <a:lnRef idx="1">
+            <a:schemeClr val="accent1"/>
+          </a:lnRef>
+          <a:fillRef idx="3">
+            <a:schemeClr val="accent1"/>
+          </a:fillRef>
+          <a:effectRef idx="2">
+            <a:schemeClr val="accent1"/>
+          </a:effectRef>
+          <a:fontRef idx="minor">
+            <a:schemeClr val="lt1"/>
+          </a:fontRef>
+        </p:style>
+        <p:txBody>
+          <a:bodyPr rtlCol="0" anchor="ctr"/>
+          <a:lstStyle/>
+          <a:p>
+            <a:pPr algn="ctr"/>
+          </a:p>
+        </p:txBody>
+      </p:sp>
+      <p:sp>
+        <p:nvSpPr>
+          <p:cNvPr id="15" name="TextBox 14"/>
+          <p:cNvSpPr txBox="1"/>
+          <p:nvPr/>
+        </p:nvSpPr>
+        <p:spPr>
+          <a:xfrm>
+            <a:off x="594360" y="4453127"/>
+            <a:ext cx="5394960" cy="274320"/>
+          </a:xfrm>
+          <a:prstGeom prst="rect">
+            <a:avLst/>
+          </a:prstGeom>
+          <a:noFill/>
+        </p:spPr>
+        <p:txBody>
+          <a:bodyPr wrap="square" anchor="t">
+            <a:spAutoFit/>
+          </a:bodyPr>
+          <a:lstStyle/>
+          <a:p>
+            <a:pPr algn="l">
+              <a:lnSpc>
+                <a:spcPct val="100000"/>
+              </a:lnSpc>
+            </a:pPr>
+            <a:r>
+              <a:rPr sz="1150" b="1">
+                <a:solidFill>
+                  <a:srgbClr val="0D9488"/>
+                </a:solidFill>
+                <a:latin typeface="Malgun Gothic"/>
+              </a:rPr>
+              <a:t>✅ 핵심 포인트</a:t>
+            </a:r>
+          </a:p>
+        </p:txBody>
+      </p:sp>
+      <p:sp>
+        <p:nvSpPr>
+          <p:cNvPr id="16" name="TextBox 15"/>
+          <p:cNvSpPr txBox="1"/>
+          <p:nvPr/>
+        </p:nvSpPr>
+        <p:spPr>
+          <a:xfrm>
+            <a:off x="594360" y="4727448"/>
+            <a:ext cx="5394960" cy="640080"/>
+          </a:xfrm>
+          <a:prstGeom prst="rect">
+            <a:avLst/>
+          </a:prstGeom>
+          <a:noFill/>
+        </p:spPr>
+        <p:txBody>
+          <a:bodyPr wrap="square">
+            <a:spAutoFit/>
+          </a:bodyPr>
+          <a:lstStyle/>
+          <a:p>
+            <a:pPr>
+              <a:lnSpc>
+                <a:spcPct val="115000"/>
+              </a:lnSpc>
+              <a:spcAft>
+                <a:spcPts val="200"/>
+              </a:spcAft>
+            </a:pPr>
+            <a:r>
+              <a:rPr sz="900" b="1">
+                <a:solidFill>
+                  <a:srgbClr val="0D9488"/>
+                </a:solidFill>
+                <a:latin typeface="Malgun Gothic"/>
+              </a:rPr>
+              <a:t>● </a:t>
+            </a:r>
+            <a:r>
+              <a:rPr sz="1100">
+                <a:solidFill>
+                  <a:srgbClr val="334155"/>
+                </a:solidFill>
+                <a:latin typeface="Malgun Gothic"/>
+              </a:rPr>
+              <a:t>동영상은 링크 공유 = 원본 화질, 파일 첨부는 화질이 떨어져요.</a:t>
+            </a:r>
+          </a:p>
+          <a:p>
+            <a:pPr>
+              <a:lnSpc>
+                <a:spcPct val="115000"/>
+              </a:lnSpc>
+              <a:spcAft>
+                <a:spcPts val="200"/>
+              </a:spcAft>
+            </a:pPr>
+            <a:r>
+              <a:rPr sz="900" b="1">
+                <a:solidFill>
+                  <a:srgbClr val="0D9488"/>
+                </a:solidFill>
+                <a:latin typeface="Malgun Gothic"/>
+              </a:rPr>
+              <a:t>● </a:t>
+            </a:r>
+            <a:r>
+              <a:rPr sz="1100">
+                <a:solidFill>
+                  <a:srgbClr val="334155"/>
+                </a:solidFill>
+                <a:latin typeface="Malgun Gothic"/>
+              </a:rPr>
+              <a:t>설명서 PDF·PPT·영상 등 자료실 어디서나 같은 방식으로 공유돼요.</a:t>
+            </a:r>
+          </a:p>
+        </p:txBody>
+      </p:sp>
+      <p:sp>
+        <p:nvSpPr>
+          <p:cNvPr id="17" name="Rounded Rectangle 16"/>
+          <p:cNvSpPr/>
+          <p:nvPr/>
+        </p:nvSpPr>
+        <p:spPr>
+          <a:xfrm>
+            <a:off x="457200" y="5513831"/>
+            <a:ext cx="5669280" cy="640080"/>
+          </a:xfrm>
+          <a:prstGeom prst="roundRect">
+            <a:avLst/>
+          </a:prstGeom>
+          <a:solidFill>
+            <a:srgbClr val="FFFBEB"/>
+          </a:solidFill>
+          <a:ln w="12700">
+            <a:solidFill>
+              <a:srgbClr val="F59E0B"/>
+            </a:solidFill>
+          </a:ln>
+          <a:effectLst/>
+        </p:spPr>
+        <p:style>
+          <a:lnRef idx="1">
+            <a:schemeClr val="accent1"/>
+          </a:lnRef>
+          <a:fillRef idx="3">
+            <a:schemeClr val="accent1"/>
+          </a:fillRef>
+          <a:effectRef idx="2">
+            <a:schemeClr val="accent1"/>
+          </a:effectRef>
+          <a:fontRef idx="minor">
+            <a:schemeClr val="lt1"/>
+          </a:fontRef>
+        </p:style>
+        <p:txBody>
+          <a:bodyPr rtlCol="0" anchor="ctr"/>
+          <a:lstStyle/>
+          <a:p>
+            <a:pPr algn="ctr"/>
+          </a:p>
+        </p:txBody>
+      </p:sp>
+      <p:sp>
+        <p:nvSpPr>
+          <p:cNvPr id="18" name="TextBox 17"/>
+          <p:cNvSpPr txBox="1"/>
+          <p:nvPr/>
+        </p:nvSpPr>
+        <p:spPr>
+          <a:xfrm>
+            <a:off x="594360" y="5559551"/>
+            <a:ext cx="5394960" cy="548640"/>
+          </a:xfrm>
+          <a:prstGeom prst="rect">
+            <a:avLst/>
+          </a:prstGeom>
+          <a:noFill/>
+        </p:spPr>
+        <p:txBody>
+          <a:bodyPr wrap="square" anchor="t">
+            <a:spAutoFit/>
+          </a:bodyPr>
+          <a:lstStyle/>
+          <a:p>
+            <a:pPr algn="l">
+              <a:lnSpc>
+                <a:spcPct val="105000"/>
+              </a:lnSpc>
+            </a:pPr>
+            <a:r>
+              <a:rPr sz="1050" b="0">
+                <a:solidFill>
+                  <a:srgbClr val="92670A"/>
+                </a:solidFill>
+                <a:latin typeface="Malgun Gothic"/>
+              </a:rPr>
+              <a:t>⚠️ 알아두기 · 링크를 받은 사람은 누구나 열 수 있어요. 내부용 자료는 공유 대상을 확인하세요.</a:t>
+            </a:r>
+          </a:p>
+        </p:txBody>
+      </p:sp>
+      <p:sp>
+        <p:nvSpPr>
+          <p:cNvPr id="19" name="Rounded Rectangle 18"/>
+          <p:cNvSpPr/>
+          <p:nvPr/>
+        </p:nvSpPr>
+        <p:spPr>
+          <a:xfrm>
+            <a:off x="457200" y="6245351"/>
+            <a:ext cx="5669280" cy="658368"/>
+          </a:xfrm>
+          <a:prstGeom prst="roundRect">
+            <a:avLst/>
+          </a:prstGeom>
+          <a:solidFill>
+            <a:srgbClr val="FFF7E6"/>
+          </a:solidFill>
+          <a:ln w="12700">
+            <a:solidFill>
+              <a:srgbClr val="F59E0B"/>
+            </a:solidFill>
+          </a:ln>
+          <a:effectLst/>
+        </p:spPr>
+        <p:style>
+          <a:lnRef idx="1">
+            <a:schemeClr val="accent1"/>
+          </a:lnRef>
+          <a:fillRef idx="3">
+            <a:schemeClr val="accent1"/>
+          </a:fillRef>
+          <a:effectRef idx="2">
+            <a:schemeClr val="accent1"/>
+          </a:effectRef>
+          <a:fontRef idx="minor">
+            <a:schemeClr val="lt1"/>
+          </a:fontRef>
+        </p:style>
+        <p:txBody>
+          <a:bodyPr rtlCol="0" anchor="ctr"/>
+          <a:lstStyle/>
+          <a:p>
+            <a:pPr algn="ctr"/>
+          </a:p>
+        </p:txBody>
+      </p:sp>
+      <p:sp>
+        <p:nvSpPr>
+          <p:cNvPr id="20" name="TextBox 19"/>
+          <p:cNvSpPr txBox="1"/>
+          <p:nvPr/>
+        </p:nvSpPr>
+        <p:spPr>
+          <a:xfrm>
+            <a:off x="594360" y="6291071"/>
+            <a:ext cx="5394960" cy="566928"/>
+          </a:xfrm>
+          <a:prstGeom prst="rect">
+            <a:avLst/>
+          </a:prstGeom>
+          <a:noFill/>
+        </p:spPr>
+        <p:txBody>
+          <a:bodyPr wrap="square" anchor="t">
+            <a:spAutoFit/>
+          </a:bodyPr>
+          <a:lstStyle/>
+          <a:p>
+            <a:pPr algn="l">
+              <a:lnSpc>
+                <a:spcPct val="105000"/>
+              </a:lnSpc>
+            </a:pPr>
+            <a:r>
+              <a:rPr sz="1050" b="0">
+                <a:solidFill>
+                  <a:srgbClr val="5B4A2A"/>
+                </a:solidFill>
+                <a:latin typeface="Malgun Gothic"/>
+              </a:rPr>
+              <a:t>💡 꿀팁 · 학부모 단체방에는 영상 설명서 링크 하나면 안내가 끝나요.</a:t>
+            </a:r>
+          </a:p>
+        </p:txBody>
+      </p:sp>
+      <p:sp>
+        <p:nvSpPr>
+          <p:cNvPr id="21" name="Rectangle 20"/>
+          <p:cNvSpPr/>
+          <p:nvPr/>
+        </p:nvSpPr>
+        <p:spPr>
+          <a:xfrm>
+            <a:off x="6300216" y="2345436"/>
+            <a:ext cx="5596128" cy="3538728"/>
+          </a:xfrm>
+          <a:prstGeom prst="rect">
+            <a:avLst/>
+          </a:prstGeom>
+          <a:solidFill>
+            <a:srgbClr val="FFFFFF"/>
+          </a:solidFill>
+          <a:ln w="12700">
+            <a:solidFill>
+              <a:srgbClr val="E2E8F0"/>
+            </a:solidFill>
+          </a:ln>
+          <a:effectLst/>
+        </p:spPr>
+        <p:style>
+          <a:lnRef idx="1">
+            <a:schemeClr val="accent1"/>
+          </a:lnRef>
+          <a:fillRef idx="3">
+            <a:schemeClr val="accent1"/>
+          </a:fillRef>
+          <a:effectRef idx="2">
+            <a:schemeClr val="accent1"/>
+          </a:effectRef>
+          <a:fontRef idx="minor">
+            <a:schemeClr val="lt1"/>
+          </a:fontRef>
+        </p:style>
+        <p:txBody>
+          <a:bodyPr rtlCol="0" anchor="ctr"/>
+          <a:lstStyle/>
+          <a:p>
+            <a:pPr algn="ctr"/>
+          </a:p>
+        </p:txBody>
+      </p:sp>
+      <p:pic>
+        <p:nvPicPr>
+          <p:cNvPr id="22" name="Picture 21" descr="admin_noticestudio.jpg"/>
+          <p:cNvPicPr>
+            <a:picLocks noChangeAspect="1"/>
+          </p:cNvPicPr>
+          <p:nvPr/>
+        </p:nvPicPr>
+        <p:blipFill>
+          <a:blip r:embed="rId2"/>
+          <a:stretch>
+            <a:fillRect/>
+          </a:stretch>
+        </p:blipFill>
+        <p:spPr>
+          <a:xfrm>
+            <a:off x="6355080" y="2400300"/>
+            <a:ext cx="5486400" cy="3429000"/>
+          </a:xfrm>
+          <a:prstGeom prst="rect">
+            <a:avLst/>
+          </a:prstGeom>
+        </p:spPr>
+      </p:pic>
+    </p:spTree>
+  </p:cSld>
+  <p:clrMapOvr>
+    <a:masterClrMapping/>
+  </p:clrMapOvr>
+</p:sld>
+</file>
+
+<file path=ppt/slides/slide21.xml><?xml version="1.0" encoding="utf-8"?>
 <p:sld xmlns:a="http://schemas.openxmlformats.org/drawingml/2006/main" xmlns:p="http://schemas.openxmlformats.org/presentationml/2006/main" xmlns:r="http://schemas.openxmlformats.org/officeDocument/2006/relationships">
   <p:cSld>
     <p:bg>
@@ -15903,434 +16890,6 @@
                 </a:solidFill>
                 <a:latin typeface="Malgun Gothic"/>
               </a:rPr>
-              <a:t>18</a:t>
-            </a:r>
-          </a:p>
-        </p:txBody>
-      </p:sp>
-    </p:spTree>
-  </p:cSld>
-  <p:clrMapOvr>
-    <a:masterClrMapping/>
-  </p:clrMapOvr>
-</p:sld>
-</file>
-
-<file path=ppt/slides/slide21.xml><?xml version="1.0" encoding="utf-8"?>
-<p:sld xmlns:a="http://schemas.openxmlformats.org/drawingml/2006/main" xmlns:p="http://schemas.openxmlformats.org/presentationml/2006/main" xmlns:r="http://schemas.openxmlformats.org/officeDocument/2006/relationships">
-  <p:cSld>
-    <p:bg>
-      <p:bgPr>
-        <a:solidFill>
-          <a:srgbClr val="FFFFFF"/>
-        </a:solidFill>
-        <a:effectLst/>
-      </p:bgPr>
-    </p:bg>
-    <p:spTree>
-      <p:nvGrpSpPr>
-        <p:cNvPr id="1" name=""/>
-        <p:cNvGrpSpPr/>
-        <p:nvPr/>
-      </p:nvGrpSpPr>
-      <p:grpSpPr/>
-      <p:sp>
-        <p:nvSpPr>
-          <p:cNvPr id="2" name="Rectangle 1"/>
-          <p:cNvSpPr/>
-          <p:nvPr/>
-        </p:nvSpPr>
-        <p:spPr>
-          <a:xfrm>
-            <a:off x="0" y="0"/>
-            <a:ext cx="12191695" cy="566928"/>
-          </a:xfrm>
-          <a:prstGeom prst="rect">
-            <a:avLst/>
-          </a:prstGeom>
-          <a:solidFill>
-            <a:srgbClr val="0D9488"/>
-          </a:solidFill>
-          <a:ln>
-            <a:noFill/>
-          </a:ln>
-          <a:effectLst/>
-        </p:spPr>
-        <p:style>
-          <a:lnRef idx="1">
-            <a:schemeClr val="accent1"/>
-          </a:lnRef>
-          <a:fillRef idx="3">
-            <a:schemeClr val="accent1"/>
-          </a:fillRef>
-          <a:effectRef idx="2">
-            <a:schemeClr val="accent1"/>
-          </a:effectRef>
-          <a:fontRef idx="minor">
-            <a:schemeClr val="lt1"/>
-          </a:fontRef>
-        </p:style>
-        <p:txBody>
-          <a:bodyPr rtlCol="0" anchor="ctr"/>
-          <a:lstStyle/>
-          <a:p>
-            <a:pPr algn="ctr"/>
-          </a:p>
-        </p:txBody>
-      </p:sp>
-      <p:sp>
-        <p:nvSpPr>
-          <p:cNvPr id="3" name="Rectangle 2"/>
-          <p:cNvSpPr/>
-          <p:nvPr/>
-        </p:nvSpPr>
-        <p:spPr>
-          <a:xfrm>
-            <a:off x="0" y="566928"/>
-            <a:ext cx="12191695" cy="54864"/>
-          </a:xfrm>
-          <a:prstGeom prst="rect">
-            <a:avLst/>
-          </a:prstGeom>
-          <a:solidFill>
-            <a:srgbClr val="F59E0B"/>
-          </a:solidFill>
-          <a:ln>
-            <a:noFill/>
-          </a:ln>
-          <a:effectLst/>
-        </p:spPr>
-        <p:style>
-          <a:lnRef idx="1">
-            <a:schemeClr val="accent1"/>
-          </a:lnRef>
-          <a:fillRef idx="3">
-            <a:schemeClr val="accent1"/>
-          </a:fillRef>
-          <a:effectRef idx="2">
-            <a:schemeClr val="accent1"/>
-          </a:effectRef>
-          <a:fontRef idx="minor">
-            <a:schemeClr val="lt1"/>
-          </a:fontRef>
-        </p:style>
-        <p:txBody>
-          <a:bodyPr rtlCol="0" anchor="ctr"/>
-          <a:lstStyle/>
-          <a:p>
-            <a:pPr algn="ctr"/>
-          </a:p>
-        </p:txBody>
-      </p:sp>
-      <p:sp>
-        <p:nvSpPr>
-          <p:cNvPr id="4" name="TextBox 3"/>
-          <p:cNvSpPr txBox="1"/>
-          <p:nvPr/>
-        </p:nvSpPr>
-        <p:spPr>
-          <a:xfrm>
-            <a:off x="365760" y="27432"/>
-            <a:ext cx="7315200" cy="502920"/>
-          </a:xfrm>
-          <a:prstGeom prst="rect">
-            <a:avLst/>
-          </a:prstGeom>
-          <a:noFill/>
-        </p:spPr>
-        <p:txBody>
-          <a:bodyPr wrap="square" anchor="ctr">
-            <a:spAutoFit/>
-          </a:bodyPr>
-          <a:lstStyle/>
-          <a:p>
-            <a:pPr algn="l">
-              <a:lnSpc>
-                <a:spcPct val="100000"/>
-              </a:lnSpc>
-            </a:pPr>
-            <a:r>
-              <a:rPr sz="1500" b="1">
-                <a:solidFill>
-                  <a:srgbClr val="FFFFFF"/>
-                </a:solidFill>
-                <a:latin typeface="Malgun Gothic"/>
-              </a:rPr>
-              <a:t>🏢 망고아이 지사용 사용설명서</a:t>
-            </a:r>
-          </a:p>
-        </p:txBody>
-      </p:sp>
-      <p:sp>
-        <p:nvSpPr>
-          <p:cNvPr id="5" name="TextBox 4"/>
-          <p:cNvSpPr txBox="1"/>
-          <p:nvPr/>
-        </p:nvSpPr>
-        <p:spPr>
-          <a:xfrm>
-            <a:off x="8168335" y="27432"/>
-            <a:ext cx="3657600" cy="502920"/>
-          </a:xfrm>
-          <a:prstGeom prst="rect">
-            <a:avLst/>
-          </a:prstGeom>
-          <a:noFill/>
-        </p:spPr>
-        <p:txBody>
-          <a:bodyPr wrap="square" anchor="ctr">
-            <a:spAutoFit/>
-          </a:bodyPr>
-          <a:lstStyle/>
-          <a:p>
-            <a:pPr algn="r">
-              <a:lnSpc>
-                <a:spcPct val="100000"/>
-              </a:lnSpc>
-            </a:pPr>
-            <a:r>
-              <a:rPr sz="1300" b="1">
-                <a:solidFill>
-                  <a:srgbClr val="F1F5F9"/>
-                </a:solidFill>
-                <a:latin typeface="Malgun Gothic"/>
-              </a:rPr>
-              <a:t>한눈에 보는 데이터</a:t>
-            </a:r>
-          </a:p>
-        </p:txBody>
-      </p:sp>
-      <p:sp>
-        <p:nvSpPr>
-          <p:cNvPr id="6" name="TextBox 5"/>
-          <p:cNvSpPr txBox="1"/>
-          <p:nvPr/>
-        </p:nvSpPr>
-        <p:spPr>
-          <a:xfrm>
-            <a:off x="987552" y="868680"/>
-            <a:ext cx="9144000" cy="457200"/>
-          </a:xfrm>
-          <a:prstGeom prst="rect">
-            <a:avLst/>
-          </a:prstGeom>
-          <a:noFill/>
-        </p:spPr>
-        <p:txBody>
-          <a:bodyPr wrap="square" anchor="t">
-            <a:spAutoFit/>
-          </a:bodyPr>
-          <a:lstStyle/>
-          <a:p>
-            <a:pPr algn="l">
-              <a:lnSpc>
-                <a:spcPct val="100000"/>
-              </a:lnSpc>
-            </a:pPr>
-            <a:r>
-              <a:rPr sz="2200" b="1">
-                <a:solidFill>
-                  <a:srgbClr val="0D9488"/>
-                </a:solidFill>
-                <a:latin typeface="Malgun Gothic"/>
-              </a:rPr>
-              <a:t>📊 한눈에 보는 데이터</a:t>
-            </a:r>
-          </a:p>
-        </p:txBody>
-      </p:sp>
-      <p:sp>
-        <p:nvSpPr>
-          <p:cNvPr id="7" name="TextBox 6"/>
-          <p:cNvSpPr txBox="1"/>
-          <p:nvPr/>
-        </p:nvSpPr>
-        <p:spPr>
-          <a:xfrm>
-            <a:off x="457200" y="1554480"/>
-            <a:ext cx="5486400" cy="365760"/>
-          </a:xfrm>
-          <a:prstGeom prst="rect">
-            <a:avLst/>
-          </a:prstGeom>
-          <a:noFill/>
-        </p:spPr>
-        <p:txBody>
-          <a:bodyPr wrap="square" anchor="t">
-            <a:spAutoFit/>
-          </a:bodyPr>
-          <a:lstStyle/>
-          <a:p>
-            <a:pPr algn="l">
-              <a:lnSpc>
-                <a:spcPct val="100000"/>
-              </a:lnSpc>
-            </a:pPr>
-            <a:r>
-              <a:rPr sz="1400" b="1">
-                <a:solidFill>
-                  <a:srgbClr val="1E2340"/>
-                </a:solidFill>
-                <a:latin typeface="Malgun Gothic"/>
-              </a:rPr>
-              <a:t>대리점별 재원생(예시)</a:t>
-            </a:r>
-          </a:p>
-        </p:txBody>
-      </p:sp>
-      <p:graphicFrame>
-        <p:nvGraphicFramePr>
-          <p:cNvPr id="8" name="Chart 7"/>
-          <p:cNvGraphicFramePr>
-            <a:graphicFrameLocks noGrp="1"/>
-          </p:cNvGraphicFramePr>
-          <p:nvPr/>
-        </p:nvGraphicFramePr>
-        <p:xfrm>
-          <a:off x="457200" y="1920240"/>
-          <a:ext cx="5486400" cy="4206240"/>
-        </p:xfrm>
-        <a:graphic>
-          <a:graphicData uri="http://schemas.openxmlformats.org/drawingml/2006/chart">
-            <c:chart xmlns:c="http://schemas.openxmlformats.org/drawingml/2006/chart" r:id="rId2"/>
-          </a:graphicData>
-        </a:graphic>
-      </p:graphicFrame>
-      <p:sp>
-        <p:nvSpPr>
-          <p:cNvPr id="9" name="TextBox 8"/>
-          <p:cNvSpPr txBox="1"/>
-          <p:nvPr/>
-        </p:nvSpPr>
-        <p:spPr>
-          <a:xfrm>
-            <a:off x="6309360" y="1554480"/>
-            <a:ext cx="5486400" cy="365760"/>
-          </a:xfrm>
-          <a:prstGeom prst="rect">
-            <a:avLst/>
-          </a:prstGeom>
-          <a:noFill/>
-        </p:spPr>
-        <p:txBody>
-          <a:bodyPr wrap="square" anchor="t">
-            <a:spAutoFit/>
-          </a:bodyPr>
-          <a:lstStyle/>
-          <a:p>
-            <a:pPr algn="l">
-              <a:lnSpc>
-                <a:spcPct val="100000"/>
-              </a:lnSpc>
-            </a:pPr>
-            <a:r>
-              <a:rPr sz="1400" b="1">
-                <a:solidFill>
-                  <a:srgbClr val="1E2340"/>
-                </a:solidFill>
-                <a:latin typeface="Malgun Gothic"/>
-              </a:rPr>
-              <a:t>정산 흐름(예시 비중)</a:t>
-            </a:r>
-          </a:p>
-        </p:txBody>
-      </p:sp>
-      <p:graphicFrame>
-        <p:nvGraphicFramePr>
-          <p:cNvPr id="10" name="Chart 9"/>
-          <p:cNvGraphicFramePr>
-            <a:graphicFrameLocks noGrp="1"/>
-          </p:cNvGraphicFramePr>
-          <p:nvPr/>
-        </p:nvGraphicFramePr>
-        <p:xfrm>
-          <a:off x="6309360" y="1920240"/>
-          <a:ext cx="5486400" cy="4206240"/>
-        </p:xfrm>
-        <a:graphic>
-          <a:graphicData uri="http://schemas.openxmlformats.org/drawingml/2006/chart">
-            <c:chart xmlns:c="http://schemas.openxmlformats.org/drawingml/2006/chart" r:id="rId3"/>
-          </a:graphicData>
-        </a:graphic>
-      </p:graphicFrame>
-      <p:sp>
-        <p:nvSpPr>
-          <p:cNvPr id="6" name="Rounded Rectangle 5"/>
-          <p:cNvSpPr/>
-          <p:nvPr/>
-        </p:nvSpPr>
-        <p:spPr>
-          <a:xfrm>
-            <a:off x="365760" y="841247"/>
-            <a:ext cx="475488" cy="475488"/>
-          </a:xfrm>
-          <a:prstGeom prst="roundRect">
-            <a:avLst/>
-          </a:prstGeom>
-          <a:solidFill>
-            <a:srgbClr val="0D9488"/>
-          </a:solidFill>
-          <a:ln>
-            <a:noFill/>
-          </a:ln>
-          <a:effectLst/>
-        </p:spPr>
-        <p:style>
-          <a:lnRef idx="1">
-            <a:schemeClr val="accent1"/>
-          </a:lnRef>
-          <a:fillRef idx="3">
-            <a:schemeClr val="accent1"/>
-          </a:fillRef>
-          <a:effectRef idx="2">
-            <a:schemeClr val="accent1"/>
-          </a:effectRef>
-          <a:fontRef idx="minor">
-            <a:schemeClr val="lt1"/>
-          </a:fontRef>
-        </p:style>
-        <p:txBody>
-          <a:bodyPr rtlCol="0" anchor="ctr"/>
-          <a:lstStyle/>
-          <a:p>
-            <a:pPr algn="ctr"/>
-          </a:p>
-        </p:txBody>
-      </p:sp>
-      <p:sp>
-        <p:nvSpPr>
-          <p:cNvPr id="7" name="TextBox 6"/>
-          <p:cNvSpPr txBox="1"/>
-          <p:nvPr/>
-        </p:nvSpPr>
-        <p:spPr>
-          <a:xfrm>
-            <a:off x="365760" y="841247"/>
-            <a:ext cx="475488" cy="475488"/>
-          </a:xfrm>
-          <a:prstGeom prst="rect">
-            <a:avLst/>
-          </a:prstGeom>
-          <a:noFill/>
-        </p:spPr>
-        <p:txBody>
-          <a:bodyPr wrap="square" anchor="ctr">
-            <a:spAutoFit/>
-          </a:bodyPr>
-          <a:lstStyle/>
-          <a:p>
-            <a:pPr algn="ctr">
-              <a:lnSpc>
-                <a:spcPct val="100000"/>
-              </a:lnSpc>
-            </a:pPr>
-            <a:r>
-              <a:rPr sz="1500" b="1">
-                <a:solidFill>
-                  <a:srgbClr val="FFFFFF"/>
-                </a:solidFill>
-                <a:latin typeface="Malgun Gothic"/>
-              </a:rPr>
               <a:t>19</a:t>
             </a:r>
           </a:p>
@@ -16523,6 +17082,434 @@
                 </a:solidFill>
                 <a:latin typeface="Malgun Gothic"/>
               </a:rPr>
+              <a:t>한눈에 보는 데이터</a:t>
+            </a:r>
+          </a:p>
+        </p:txBody>
+      </p:sp>
+      <p:sp>
+        <p:nvSpPr>
+          <p:cNvPr id="6" name="TextBox 5"/>
+          <p:cNvSpPr txBox="1"/>
+          <p:nvPr/>
+        </p:nvSpPr>
+        <p:spPr>
+          <a:xfrm>
+            <a:off x="987552" y="868680"/>
+            <a:ext cx="9144000" cy="457200"/>
+          </a:xfrm>
+          <a:prstGeom prst="rect">
+            <a:avLst/>
+          </a:prstGeom>
+          <a:noFill/>
+        </p:spPr>
+        <p:txBody>
+          <a:bodyPr wrap="square" anchor="t">
+            <a:spAutoFit/>
+          </a:bodyPr>
+          <a:lstStyle/>
+          <a:p>
+            <a:pPr algn="l">
+              <a:lnSpc>
+                <a:spcPct val="100000"/>
+              </a:lnSpc>
+            </a:pPr>
+            <a:r>
+              <a:rPr sz="2200" b="1">
+                <a:solidFill>
+                  <a:srgbClr val="0D9488"/>
+                </a:solidFill>
+                <a:latin typeface="Malgun Gothic"/>
+              </a:rPr>
+              <a:t>📊 한눈에 보는 데이터</a:t>
+            </a:r>
+          </a:p>
+        </p:txBody>
+      </p:sp>
+      <p:sp>
+        <p:nvSpPr>
+          <p:cNvPr id="7" name="TextBox 6"/>
+          <p:cNvSpPr txBox="1"/>
+          <p:nvPr/>
+        </p:nvSpPr>
+        <p:spPr>
+          <a:xfrm>
+            <a:off x="457200" y="1554480"/>
+            <a:ext cx="5486400" cy="365760"/>
+          </a:xfrm>
+          <a:prstGeom prst="rect">
+            <a:avLst/>
+          </a:prstGeom>
+          <a:noFill/>
+        </p:spPr>
+        <p:txBody>
+          <a:bodyPr wrap="square" anchor="t">
+            <a:spAutoFit/>
+          </a:bodyPr>
+          <a:lstStyle/>
+          <a:p>
+            <a:pPr algn="l">
+              <a:lnSpc>
+                <a:spcPct val="100000"/>
+              </a:lnSpc>
+            </a:pPr>
+            <a:r>
+              <a:rPr sz="1400" b="1">
+                <a:solidFill>
+                  <a:srgbClr val="1E2340"/>
+                </a:solidFill>
+                <a:latin typeface="Malgun Gothic"/>
+              </a:rPr>
+              <a:t>대리점별 재원생(예시)</a:t>
+            </a:r>
+          </a:p>
+        </p:txBody>
+      </p:sp>
+      <p:graphicFrame>
+        <p:nvGraphicFramePr>
+          <p:cNvPr id="8" name="Chart 7"/>
+          <p:cNvGraphicFramePr>
+            <a:graphicFrameLocks noGrp="1"/>
+          </p:cNvGraphicFramePr>
+          <p:nvPr/>
+        </p:nvGraphicFramePr>
+        <p:xfrm>
+          <a:off x="457200" y="1920240"/>
+          <a:ext cx="5486400" cy="4206240"/>
+        </p:xfrm>
+        <a:graphic>
+          <a:graphicData uri="http://schemas.openxmlformats.org/drawingml/2006/chart">
+            <c:chart xmlns:c="http://schemas.openxmlformats.org/drawingml/2006/chart" r:id="rId2"/>
+          </a:graphicData>
+        </a:graphic>
+      </p:graphicFrame>
+      <p:sp>
+        <p:nvSpPr>
+          <p:cNvPr id="9" name="TextBox 8"/>
+          <p:cNvSpPr txBox="1"/>
+          <p:nvPr/>
+        </p:nvSpPr>
+        <p:spPr>
+          <a:xfrm>
+            <a:off x="6309360" y="1554480"/>
+            <a:ext cx="5486400" cy="365760"/>
+          </a:xfrm>
+          <a:prstGeom prst="rect">
+            <a:avLst/>
+          </a:prstGeom>
+          <a:noFill/>
+        </p:spPr>
+        <p:txBody>
+          <a:bodyPr wrap="square" anchor="t">
+            <a:spAutoFit/>
+          </a:bodyPr>
+          <a:lstStyle/>
+          <a:p>
+            <a:pPr algn="l">
+              <a:lnSpc>
+                <a:spcPct val="100000"/>
+              </a:lnSpc>
+            </a:pPr>
+            <a:r>
+              <a:rPr sz="1400" b="1">
+                <a:solidFill>
+                  <a:srgbClr val="1E2340"/>
+                </a:solidFill>
+                <a:latin typeface="Malgun Gothic"/>
+              </a:rPr>
+              <a:t>정산 흐름(예시 비중)</a:t>
+            </a:r>
+          </a:p>
+        </p:txBody>
+      </p:sp>
+      <p:graphicFrame>
+        <p:nvGraphicFramePr>
+          <p:cNvPr id="10" name="Chart 9"/>
+          <p:cNvGraphicFramePr>
+            <a:graphicFrameLocks noGrp="1"/>
+          </p:cNvGraphicFramePr>
+          <p:nvPr/>
+        </p:nvGraphicFramePr>
+        <p:xfrm>
+          <a:off x="6309360" y="1920240"/>
+          <a:ext cx="5486400" cy="4206240"/>
+        </p:xfrm>
+        <a:graphic>
+          <a:graphicData uri="http://schemas.openxmlformats.org/drawingml/2006/chart">
+            <c:chart xmlns:c="http://schemas.openxmlformats.org/drawingml/2006/chart" r:id="rId3"/>
+          </a:graphicData>
+        </a:graphic>
+      </p:graphicFrame>
+      <p:sp>
+        <p:nvSpPr>
+          <p:cNvPr id="6" name="Rounded Rectangle 5"/>
+          <p:cNvSpPr/>
+          <p:nvPr/>
+        </p:nvSpPr>
+        <p:spPr>
+          <a:xfrm>
+            <a:off x="365760" y="841247"/>
+            <a:ext cx="475488" cy="475488"/>
+          </a:xfrm>
+          <a:prstGeom prst="roundRect">
+            <a:avLst/>
+          </a:prstGeom>
+          <a:solidFill>
+            <a:srgbClr val="0D9488"/>
+          </a:solidFill>
+          <a:ln>
+            <a:noFill/>
+          </a:ln>
+          <a:effectLst/>
+        </p:spPr>
+        <p:style>
+          <a:lnRef idx="1">
+            <a:schemeClr val="accent1"/>
+          </a:lnRef>
+          <a:fillRef idx="3">
+            <a:schemeClr val="accent1"/>
+          </a:fillRef>
+          <a:effectRef idx="2">
+            <a:schemeClr val="accent1"/>
+          </a:effectRef>
+          <a:fontRef idx="minor">
+            <a:schemeClr val="lt1"/>
+          </a:fontRef>
+        </p:style>
+        <p:txBody>
+          <a:bodyPr rtlCol="0" anchor="ctr"/>
+          <a:lstStyle/>
+          <a:p>
+            <a:pPr algn="ctr"/>
+          </a:p>
+        </p:txBody>
+      </p:sp>
+      <p:sp>
+        <p:nvSpPr>
+          <p:cNvPr id="7" name="TextBox 6"/>
+          <p:cNvSpPr txBox="1"/>
+          <p:nvPr/>
+        </p:nvSpPr>
+        <p:spPr>
+          <a:xfrm>
+            <a:off x="365760" y="841247"/>
+            <a:ext cx="475488" cy="475488"/>
+          </a:xfrm>
+          <a:prstGeom prst="rect">
+            <a:avLst/>
+          </a:prstGeom>
+          <a:noFill/>
+        </p:spPr>
+        <p:txBody>
+          <a:bodyPr wrap="square" anchor="ctr">
+            <a:spAutoFit/>
+          </a:bodyPr>
+          <a:lstStyle/>
+          <a:p>
+            <a:pPr algn="ctr">
+              <a:lnSpc>
+                <a:spcPct val="100000"/>
+              </a:lnSpc>
+            </a:pPr>
+            <a:r>
+              <a:rPr sz="1500" b="1">
+                <a:solidFill>
+                  <a:srgbClr val="FFFFFF"/>
+                </a:solidFill>
+                <a:latin typeface="Malgun Gothic"/>
+              </a:rPr>
+              <a:t>20</a:t>
+            </a:r>
+          </a:p>
+        </p:txBody>
+      </p:sp>
+    </p:spTree>
+  </p:cSld>
+  <p:clrMapOvr>
+    <a:masterClrMapping/>
+  </p:clrMapOvr>
+</p:sld>
+</file>
+
+<file path=ppt/slides/slide23.xml><?xml version="1.0" encoding="utf-8"?>
+<p:sld xmlns:a="http://schemas.openxmlformats.org/drawingml/2006/main" xmlns:p="http://schemas.openxmlformats.org/presentationml/2006/main" xmlns:r="http://schemas.openxmlformats.org/officeDocument/2006/relationships">
+  <p:cSld>
+    <p:bg>
+      <p:bgPr>
+        <a:solidFill>
+          <a:srgbClr val="FFFFFF"/>
+        </a:solidFill>
+        <a:effectLst/>
+      </p:bgPr>
+    </p:bg>
+    <p:spTree>
+      <p:nvGrpSpPr>
+        <p:cNvPr id="1" name=""/>
+        <p:cNvGrpSpPr/>
+        <p:nvPr/>
+      </p:nvGrpSpPr>
+      <p:grpSpPr/>
+      <p:sp>
+        <p:nvSpPr>
+          <p:cNvPr id="2" name="Rectangle 1"/>
+          <p:cNvSpPr/>
+          <p:nvPr/>
+        </p:nvSpPr>
+        <p:spPr>
+          <a:xfrm>
+            <a:off x="0" y="0"/>
+            <a:ext cx="12191695" cy="566928"/>
+          </a:xfrm>
+          <a:prstGeom prst="rect">
+            <a:avLst/>
+          </a:prstGeom>
+          <a:solidFill>
+            <a:srgbClr val="0D9488"/>
+          </a:solidFill>
+          <a:ln>
+            <a:noFill/>
+          </a:ln>
+          <a:effectLst/>
+        </p:spPr>
+        <p:style>
+          <a:lnRef idx="1">
+            <a:schemeClr val="accent1"/>
+          </a:lnRef>
+          <a:fillRef idx="3">
+            <a:schemeClr val="accent1"/>
+          </a:fillRef>
+          <a:effectRef idx="2">
+            <a:schemeClr val="accent1"/>
+          </a:effectRef>
+          <a:fontRef idx="minor">
+            <a:schemeClr val="lt1"/>
+          </a:fontRef>
+        </p:style>
+        <p:txBody>
+          <a:bodyPr rtlCol="0" anchor="ctr"/>
+          <a:lstStyle/>
+          <a:p>
+            <a:pPr algn="ctr"/>
+          </a:p>
+        </p:txBody>
+      </p:sp>
+      <p:sp>
+        <p:nvSpPr>
+          <p:cNvPr id="3" name="Rectangle 2"/>
+          <p:cNvSpPr/>
+          <p:nvPr/>
+        </p:nvSpPr>
+        <p:spPr>
+          <a:xfrm>
+            <a:off x="0" y="566928"/>
+            <a:ext cx="12191695" cy="54864"/>
+          </a:xfrm>
+          <a:prstGeom prst="rect">
+            <a:avLst/>
+          </a:prstGeom>
+          <a:solidFill>
+            <a:srgbClr val="F59E0B"/>
+          </a:solidFill>
+          <a:ln>
+            <a:noFill/>
+          </a:ln>
+          <a:effectLst/>
+        </p:spPr>
+        <p:style>
+          <a:lnRef idx="1">
+            <a:schemeClr val="accent1"/>
+          </a:lnRef>
+          <a:fillRef idx="3">
+            <a:schemeClr val="accent1"/>
+          </a:fillRef>
+          <a:effectRef idx="2">
+            <a:schemeClr val="accent1"/>
+          </a:effectRef>
+          <a:fontRef idx="minor">
+            <a:schemeClr val="lt1"/>
+          </a:fontRef>
+        </p:style>
+        <p:txBody>
+          <a:bodyPr rtlCol="0" anchor="ctr"/>
+          <a:lstStyle/>
+          <a:p>
+            <a:pPr algn="ctr"/>
+          </a:p>
+        </p:txBody>
+      </p:sp>
+      <p:sp>
+        <p:nvSpPr>
+          <p:cNvPr id="4" name="TextBox 3"/>
+          <p:cNvSpPr txBox="1"/>
+          <p:nvPr/>
+        </p:nvSpPr>
+        <p:spPr>
+          <a:xfrm>
+            <a:off x="365760" y="27432"/>
+            <a:ext cx="7315200" cy="502920"/>
+          </a:xfrm>
+          <a:prstGeom prst="rect">
+            <a:avLst/>
+          </a:prstGeom>
+          <a:noFill/>
+        </p:spPr>
+        <p:txBody>
+          <a:bodyPr wrap="square" anchor="ctr">
+            <a:spAutoFit/>
+          </a:bodyPr>
+          <a:lstStyle/>
+          <a:p>
+            <a:pPr algn="l">
+              <a:lnSpc>
+                <a:spcPct val="100000"/>
+              </a:lnSpc>
+            </a:pPr>
+            <a:r>
+              <a:rPr sz="1500" b="1">
+                <a:solidFill>
+                  <a:srgbClr val="FFFFFF"/>
+                </a:solidFill>
+                <a:latin typeface="Malgun Gothic"/>
+              </a:rPr>
+              <a:t>🏢 망고아이 지사용 사용설명서</a:t>
+            </a:r>
+          </a:p>
+        </p:txBody>
+      </p:sp>
+      <p:sp>
+        <p:nvSpPr>
+          <p:cNvPr id="5" name="TextBox 4"/>
+          <p:cNvSpPr txBox="1"/>
+          <p:nvPr/>
+        </p:nvSpPr>
+        <p:spPr>
+          <a:xfrm>
+            <a:off x="8168335" y="27432"/>
+            <a:ext cx="3657600" cy="502920"/>
+          </a:xfrm>
+          <a:prstGeom prst="rect">
+            <a:avLst/>
+          </a:prstGeom>
+          <a:noFill/>
+        </p:spPr>
+        <p:txBody>
+          <a:bodyPr wrap="square" anchor="ctr">
+            <a:spAutoFit/>
+          </a:bodyPr>
+          <a:lstStyle/>
+          <a:p>
+            <a:pPr algn="r">
+              <a:lnSpc>
+                <a:spcPct val="100000"/>
+              </a:lnSpc>
+            </a:pPr>
+            <a:r>
+              <a:rPr sz="1300" b="1">
+                <a:solidFill>
+                  <a:srgbClr val="F1F5F9"/>
+                </a:solidFill>
+                <a:latin typeface="Malgun Gothic"/>
+              </a:rPr>
               <a:t>자주 묻는 질문 (FAQ)</a:t>
             </a:r>
           </a:p>
@@ -17265,7 +18252,7 @@
                 </a:solidFill>
                 <a:latin typeface="Malgun Gothic"/>
               </a:rPr>
-              <a:t>20</a:t>
+              <a:t>21</a:t>
             </a:r>
           </a:p>
         </p:txBody>
@@ -17278,7 +18265,7 @@
 </p:sld>
 </file>
 
-<file path=ppt/slides/slide23.xml><?xml version="1.0" encoding="utf-8"?>
+<file path=ppt/slides/slide24.xml><?xml version="1.0" encoding="utf-8"?>
 <p:sld xmlns:a="http://schemas.openxmlformats.org/drawingml/2006/main" xmlns:p="http://schemas.openxmlformats.org/presentationml/2006/main" xmlns:r="http://schemas.openxmlformats.org/officeDocument/2006/relationships">
   <p:cSld>
     <p:bg>
@@ -18198,7 +19185,7 @@
                 </a:solidFill>
                 <a:latin typeface="Malgun Gothic"/>
               </a:rPr>
-              <a:t>21</a:t>
+              <a:t>22</a:t>
             </a:r>
           </a:p>
         </p:txBody>
@@ -18211,7 +19198,7 @@
 </p:sld>
 </file>
 
-<file path=ppt/slides/slide24.xml><?xml version="1.0" encoding="utf-8"?>
+<file path=ppt/slides/slide25.xml><?xml version="1.0" encoding="utf-8"?>
 <p:sld xmlns:a="http://schemas.openxmlformats.org/drawingml/2006/main" xmlns:p="http://schemas.openxmlformats.org/presentationml/2006/main" xmlns:r="http://schemas.openxmlformats.org/officeDocument/2006/relationships">
   <p:cSld>
     <p:bg>
@@ -19705,7 +20692,7 @@
                 </a:solidFill>
                 <a:latin typeface="Malgun Gothic"/>
               </a:rPr>
-              <a:t>22</a:t>
+              <a:t>23</a:t>
             </a:r>
           </a:p>
         </p:txBody>
@@ -19718,7 +20705,7 @@
 </p:sld>
 </file>
 
-<file path=ppt/slides/slide25.xml><?xml version="1.0" encoding="utf-8"?>
+<file path=ppt/slides/slide26.xml><?xml version="1.0" encoding="utf-8"?>
 <p:sld xmlns:a="http://schemas.openxmlformats.org/drawingml/2006/main" xmlns:p="http://schemas.openxmlformats.org/presentationml/2006/main" xmlns:r="http://schemas.openxmlformats.org/officeDocument/2006/relationships">
   <p:cSld>
     <p:bg>
@@ -19993,7 +20980,7 @@
 </p:sld>
 </file>
 
-<file path=ppt/slides/slide26.xml><?xml version="1.0" encoding="utf-8"?>
+<file path=ppt/slides/slide27.xml><?xml version="1.0" encoding="utf-8"?>
 <p:sld xmlns:a="http://schemas.openxmlformats.org/drawingml/2006/main" xmlns:p="http://schemas.openxmlformats.org/presentationml/2006/main" xmlns:r="http://schemas.openxmlformats.org/officeDocument/2006/relationships">
   <p:cSld>
     <p:spTree>
@@ -20881,7 +21868,7 @@
                 </a:solidFill>
                 <a:latin typeface="Malgun Gothic"/>
               </a:rPr>
-              <a:t>지사 기능 한눈에</a:t>
+              <a:t>💬 자료실 카카오톡 링크 공유</a:t>
             </a:r>
             <a:r>
               <a:rPr sz="950">
@@ -20915,7 +21902,7 @@
                 </a:solidFill>
                 <a:latin typeface="Malgun Gothic"/>
               </a:rPr>
-              <a:t>한눈에 보는 데이터</a:t>
+              <a:t>지사 기능 한눈에</a:t>
             </a:r>
             <a:r>
               <a:rPr sz="950">
@@ -20949,7 +21936,7 @@
                 </a:solidFill>
                 <a:latin typeface="Malgun Gothic"/>
               </a:rPr>
-              <a:t>자주 묻는 질문 (FAQ)</a:t>
+              <a:t>한눈에 보는 데이터</a:t>
             </a:r>
             <a:r>
               <a:rPr sz="950">
@@ -20983,7 +21970,7 @@
                 </a:solidFill>
                 <a:latin typeface="Malgun Gothic"/>
               </a:rPr>
-              <a:t>지사 운영 체크리스트</a:t>
+              <a:t>자주 묻는 질문 (FAQ)</a:t>
             </a:r>
             <a:r>
               <a:rPr sz="950">
@@ -21017,6 +22004,40 @@
                 </a:solidFill>
                 <a:latin typeface="Malgun Gothic"/>
               </a:rPr>
+              <a:t>지사 운영 체크리스트</a:t>
+            </a:r>
+            <a:r>
+              <a:rPr sz="950">
+                <a:solidFill>
+                  <a:srgbClr val="94A3B8"/>
+                </a:solidFill>
+                <a:latin typeface="Malgun Gothic"/>
+              </a:rPr>
+              <a:t>   ·  p.25</a:t>
+            </a:r>
+          </a:p>
+          <a:p>
+            <a:pPr>
+              <a:spcAft>
+                <a:spcPts val="1935"/>
+              </a:spcAft>
+            </a:pPr>
+            <a:r>
+              <a:rPr sz="1100" b="1">
+                <a:solidFill>
+                  <a:srgbClr val="4F46E5"/>
+                </a:solidFill>
+                <a:latin typeface="Malgun Gothic"/>
+              </a:rPr>
+              <a:t>23  </a:t>
+            </a:r>
+            <a:r>
+              <a:rPr sz="1100">
+                <a:solidFill>
+                  <a:srgbClr val="334155"/>
+                </a:solidFill>
+                <a:latin typeface="Malgun Gothic"/>
+              </a:rPr>
               <a:t>마무리 · 지사 성장을 위한 실천 가이드</a:t>
             </a:r>
             <a:r>
@@ -21026,7 +22047,7 @@
                 </a:solidFill>
                 <a:latin typeface="Malgun Gothic"/>
               </a:rPr>
-              <a:t>   ·  p.25</a:t>
+              <a:t>   ·  p.26</a:t>
             </a:r>
           </a:p>
         </p:txBody>
